--- a/docs/AURA-Workforce-Deck.pptx
+++ b/docs/AURA-Workforce-Deck.pptx
@@ -14,6 +14,9 @@
     <p:sldId id="262" r:id="rId13"/>
     <p:sldId id="263" r:id="rId14"/>
     <p:sldId id="264" r:id="rId15"/>
+    <p:sldId id="265" r:id="rId16"/>
+    <p:sldId id="266" r:id="rId17"/>
+    <p:sldId id="267" r:id="rId18"/>
   </p:sldIdLst>
   <p:sldSz cx="12191695" cy="6858000" type="screen4x3"/>
   <p:notesSz cx="6858000" cy="9144000"/>
@@ -3106,40 +3109,83 @@
       <p:grpSpPr/>
       <p:sp>
         <p:nvSpPr>
-          <p:cNvPr id="2" name="TextBox 1"/>
-          <p:cNvSpPr txBox="1"/>
-          <p:nvPr/>
-        </p:nvSpPr>
-        <p:spPr>
-          <a:xfrm>
-            <a:off x="822960" y="1920240"/>
-            <a:ext cx="10058400" cy="365760"/>
-          </a:xfrm>
-          <a:prstGeom prst="rect">
-            <a:avLst/>
-          </a:prstGeom>
-          <a:noFill/>
-        </p:spPr>
-        <p:txBody>
-          <a:bodyPr wrap="square">
-            <a:spAutoFit/>
-          </a:bodyPr>
-          <a:lstStyle/>
-          <a:p>
-            <a:pPr>
-              <a:lnSpc>
-                <a:spcPct val="115000"/>
-              </a:lnSpc>
-              <a:spcAft>
-                <a:spcPts val="600"/>
-              </a:spcAft>
-            </a:pPr>
-            <a:r>
-              <a:rPr sz="1100" b="1">
+          <p:cNvPr id="2" name="Rectangle 1"/>
+          <p:cNvSpPr/>
+          <p:nvPr/>
+        </p:nvSpPr>
+        <p:spPr>
+          <a:xfrm>
+            <a:off x="777240" y="1417320"/>
+            <a:ext cx="822960" cy="31750"/>
+          </a:xfrm>
+          <a:prstGeom prst="rect">
+            <a:avLst/>
+          </a:prstGeom>
+          <a:solidFill>
+            <a:srgbClr val="D98E77"/>
+          </a:solidFill>
+          <a:ln>
+            <a:noFill/>
+          </a:ln>
+        </p:spPr>
+        <p:style>
+          <a:lnRef idx="1">
+            <a:schemeClr val="accent1"/>
+          </a:lnRef>
+          <a:fillRef idx="3">
+            <a:schemeClr val="accent1"/>
+          </a:fillRef>
+          <a:effectRef idx="2">
+            <a:schemeClr val="accent1"/>
+          </a:effectRef>
+          <a:fontRef idx="minor">
+            <a:schemeClr val="lt1"/>
+          </a:fontRef>
+        </p:style>
+        <p:txBody>
+          <a:bodyPr rtlCol="0" anchor="ctr"/>
+          <a:lstStyle/>
+          <a:p>
+            <a:pPr algn="ctr"/>
+          </a:p>
+        </p:txBody>
+      </p:sp>
+      <p:sp>
+        <p:nvSpPr>
+          <p:cNvPr id="3" name="TextBox 2"/>
+          <p:cNvSpPr txBox="1"/>
+          <p:nvPr/>
+        </p:nvSpPr>
+        <p:spPr>
+          <a:xfrm>
+            <a:off x="777240" y="1600200"/>
+            <a:ext cx="9144000" cy="365760"/>
+          </a:xfrm>
+          <a:prstGeom prst="rect">
+            <a:avLst/>
+          </a:prstGeom>
+          <a:noFill/>
+        </p:spPr>
+        <p:txBody>
+          <a:bodyPr wrap="square" anchor="t">
+            <a:spAutoFit/>
+          </a:bodyPr>
+          <a:lstStyle/>
+          <a:p>
+            <a:pPr algn="l">
+              <a:lnSpc>
+                <a:spcPct val="125000"/>
+              </a:lnSpc>
+              <a:spcAft>
+                <a:spcPts val="800"/>
+              </a:spcAft>
+            </a:pPr>
+            <a:r>
+              <a:rPr sz="1050" b="1">
                 <a:solidFill>
                   <a:srgbClr val="D98E77"/>
                 </a:solidFill>
-                <a:latin typeface="Arial"/>
+                <a:latin typeface="Segoe UI Semibold"/>
               </a:rPr>
               <a:t>SDC HACKATHON 2026  ·  DOMAIN 1  ·  THE AIVERSECITY FUTURE-READY WORKFORCE DOMAIN</a:t>
             </a:r>
@@ -3148,155 +3194,2256 @@
       </p:sp>
       <p:sp>
         <p:nvSpPr>
+          <p:cNvPr id="4" name="TextBox 3"/>
+          <p:cNvSpPr txBox="1"/>
+          <p:nvPr/>
+        </p:nvSpPr>
+        <p:spPr>
+          <a:xfrm>
+            <a:off x="777240" y="2103120"/>
+            <a:ext cx="10058400" cy="1280160"/>
+          </a:xfrm>
+          <a:prstGeom prst="rect">
+            <a:avLst/>
+          </a:prstGeom>
+          <a:noFill/>
+        </p:spPr>
+        <p:txBody>
+          <a:bodyPr wrap="square" anchor="t">
+            <a:spAutoFit/>
+          </a:bodyPr>
+          <a:lstStyle/>
+          <a:p>
+            <a:pPr algn="l">
+              <a:lnSpc>
+                <a:spcPct val="98000"/>
+              </a:lnSpc>
+              <a:spcAft>
+                <a:spcPts val="800"/>
+              </a:spcAft>
+            </a:pPr>
+            <a:r>
+              <a:rPr sz="6200" b="1">
+                <a:solidFill>
+                  <a:srgbClr val="FFFFFF"/>
+                </a:solidFill>
+                <a:latin typeface="Segoe UI Semibold"/>
+              </a:rPr>
+              <a:t>AURA-Workforce</a:t>
+            </a:r>
+          </a:p>
+        </p:txBody>
+      </p:sp>
+      <p:sp>
+        <p:nvSpPr>
+          <p:cNvPr id="5" name="TextBox 4"/>
+          <p:cNvSpPr txBox="1"/>
+          <p:nvPr/>
+        </p:nvSpPr>
+        <p:spPr>
+          <a:xfrm>
+            <a:off x="777240" y="3429000"/>
+            <a:ext cx="7863840" cy="1463040"/>
+          </a:xfrm>
+          <a:prstGeom prst="rect">
+            <a:avLst/>
+          </a:prstGeom>
+          <a:noFill/>
+        </p:spPr>
+        <p:txBody>
+          <a:bodyPr wrap="square" anchor="t">
+            <a:spAutoFit/>
+          </a:bodyPr>
+          <a:lstStyle/>
+          <a:p>
+            <a:pPr algn="l">
+              <a:lnSpc>
+                <a:spcPct val="112000"/>
+              </a:lnSpc>
+              <a:spcAft>
+                <a:spcPts val="200"/>
+              </a:spcAft>
+            </a:pPr>
+            <a:r>
+              <a:rPr sz="2000" b="0">
+                <a:solidFill>
+                  <a:srgbClr val="F6F2EA"/>
+                </a:solidFill>
+                <a:latin typeface="Segoe UI"/>
+              </a:rPr>
+              <a:t>Four checkpoints from the market evidence to a study plan</a:t>
+            </a:r>
+          </a:p>
+          <a:p>
+            <a:pPr algn="l">
+              <a:lnSpc>
+                <a:spcPct val="112000"/>
+              </a:lnSpc>
+              <a:spcAft>
+                <a:spcPts val="200"/>
+              </a:spcAft>
+            </a:pPr>
+            <a:r>
+              <a:rPr sz="2000" b="0">
+                <a:solidFill>
+                  <a:srgbClr val="F6F2EA"/>
+                </a:solidFill>
+                <a:latin typeface="Segoe UI"/>
+              </a:rPr>
+              <a:t>a person can actually follow.</a:t>
+            </a:r>
+          </a:p>
+        </p:txBody>
+      </p:sp>
+      <p:pic>
+        <p:nvPicPr>
+          <p:cNvPr id="6" name="Picture 5" descr="device-tablet.png"/>
+          <p:cNvPicPr>
+            <a:picLocks noChangeAspect="1"/>
+          </p:cNvPicPr>
+          <p:nvPr/>
+        </p:nvPicPr>
+        <p:blipFill>
+          <a:blip r:embed="rId2"/>
+          <a:stretch>
+            <a:fillRect/>
+          </a:stretch>
+        </p:blipFill>
+        <p:spPr>
+          <a:xfrm>
+            <a:off x="8412480" y="2057400"/>
+            <a:ext cx="3088937" cy="2377440"/>
+          </a:xfrm>
+          <a:prstGeom prst="rect">
+            <a:avLst/>
+          </a:prstGeom>
+        </p:spPr>
+      </p:pic>
+      <p:sp>
+        <p:nvSpPr>
+          <p:cNvPr id="7" name="Rectangle 6"/>
+          <p:cNvSpPr/>
+          <p:nvPr/>
+        </p:nvSpPr>
+        <p:spPr>
+          <a:xfrm>
+            <a:off x="777240" y="5074920"/>
+            <a:ext cx="10607040" cy="12700"/>
+          </a:xfrm>
+          <a:prstGeom prst="rect">
+            <a:avLst/>
+          </a:prstGeom>
+          <a:solidFill>
+            <a:srgbClr val="3A5551"/>
+          </a:solidFill>
+          <a:ln>
+            <a:noFill/>
+          </a:ln>
+        </p:spPr>
+        <p:style>
+          <a:lnRef idx="1">
+            <a:schemeClr val="accent1"/>
+          </a:lnRef>
+          <a:fillRef idx="3">
+            <a:schemeClr val="accent1"/>
+          </a:fillRef>
+          <a:effectRef idx="2">
+            <a:schemeClr val="accent1"/>
+          </a:effectRef>
+          <a:fontRef idx="minor">
+            <a:schemeClr val="lt1"/>
+          </a:fontRef>
+        </p:style>
+        <p:txBody>
+          <a:bodyPr rtlCol="0" anchor="ctr"/>
+          <a:lstStyle/>
+          <a:p>
+            <a:pPr algn="ctr"/>
+          </a:p>
+        </p:txBody>
+      </p:sp>
+      <p:sp>
+        <p:nvSpPr>
+          <p:cNvPr id="8" name="TextBox 7"/>
+          <p:cNvSpPr txBox="1"/>
+          <p:nvPr/>
+        </p:nvSpPr>
+        <p:spPr>
+          <a:xfrm>
+            <a:off x="777240" y="5257800"/>
+            <a:ext cx="4937760" cy="1005840"/>
+          </a:xfrm>
+          <a:prstGeom prst="rect">
+            <a:avLst/>
+          </a:prstGeom>
+          <a:noFill/>
+        </p:spPr>
+        <p:txBody>
+          <a:bodyPr wrap="square" anchor="t">
+            <a:spAutoFit/>
+          </a:bodyPr>
+          <a:lstStyle/>
+          <a:p>
+            <a:pPr algn="l">
+              <a:lnSpc>
+                <a:spcPct val="140000"/>
+              </a:lnSpc>
+              <a:spcAft>
+                <a:spcPts val="800"/>
+              </a:spcAft>
+            </a:pPr>
+            <a:r>
+              <a:rPr sz="1250" b="0">
+                <a:solidFill>
+                  <a:srgbClr val="F6F2EA"/>
+                </a:solidFill>
+                <a:latin typeface="Segoe UI"/>
+              </a:rPr>
+              <a:t>overinfinity  ·  Ahmad Adam Hakimi bin Naeman</a:t>
+            </a:r>
+          </a:p>
+          <a:p>
+            <a:pPr algn="l">
+              <a:lnSpc>
+                <a:spcPct val="140000"/>
+              </a:lnSpc>
+              <a:spcAft>
+                <a:spcPts val="800"/>
+              </a:spcAft>
+            </a:pPr>
+            <a:r>
+              <a:rPr sz="1250" b="0">
+                <a:solidFill>
+                  <a:srgbClr val="F6F2EA"/>
+                </a:solidFill>
+                <a:latin typeface="Segoe UI"/>
+              </a:rPr>
+              <a:t>International Islamic University Malaysia</a:t>
+            </a:r>
+          </a:p>
+        </p:txBody>
+      </p:sp>
+      <p:sp>
+        <p:nvSpPr>
+          <p:cNvPr id="9" name="TextBox 8"/>
+          <p:cNvSpPr txBox="1"/>
+          <p:nvPr/>
+        </p:nvSpPr>
+        <p:spPr>
+          <a:xfrm>
+            <a:off x="6400800" y="5257800"/>
+            <a:ext cx="5029200" cy="1005840"/>
+          </a:xfrm>
+          <a:prstGeom prst="rect">
+            <a:avLst/>
+          </a:prstGeom>
+          <a:noFill/>
+        </p:spPr>
+        <p:txBody>
+          <a:bodyPr wrap="square" anchor="t">
+            <a:spAutoFit/>
+          </a:bodyPr>
+          <a:lstStyle/>
+          <a:p>
+            <a:pPr algn="l">
+              <a:lnSpc>
+                <a:spcPct val="140000"/>
+              </a:lnSpc>
+              <a:spcAft>
+                <a:spcPts val="800"/>
+              </a:spcAft>
+            </a:pPr>
+            <a:r>
+              <a:rPr sz="1250" b="0">
+                <a:solidFill>
+                  <a:srgbClr val="D98E77"/>
+                </a:solidFill>
+                <a:latin typeface="Segoe UI"/>
+              </a:rPr>
+              <a:t>aura-workforce.replit.app</a:t>
+            </a:r>
+          </a:p>
+          <a:p>
+            <a:pPr algn="l">
+              <a:lnSpc>
+                <a:spcPct val="140000"/>
+              </a:lnSpc>
+              <a:spcAft>
+                <a:spcPts val="800"/>
+              </a:spcAft>
+            </a:pPr>
+            <a:r>
+              <a:rPr sz="1250" b="0">
+                <a:solidFill>
+                  <a:srgbClr val="D98E77"/>
+                </a:solidFill>
+                <a:latin typeface="Segoe UI"/>
+              </a:rPr>
+              <a:t>github.com/adamnaemman/sdc-hackathon</a:t>
+            </a:r>
+          </a:p>
+        </p:txBody>
+      </p:sp>
+    </p:spTree>
+  </p:cSld>
+  <p:clrMapOvr>
+    <a:masterClrMapping/>
+  </p:clrMapOvr>
+</p:sld>
+</file>
+
+<file path=ppt/slides/slide10.xml><?xml version="1.0" encoding="utf-8"?>
+<p:sld xmlns:a="http://schemas.openxmlformats.org/drawingml/2006/main" xmlns:p="http://schemas.openxmlformats.org/presentationml/2006/main" xmlns:r="http://schemas.openxmlformats.org/officeDocument/2006/relationships">
+  <p:cSld>
+    <p:bg>
+      <p:bgPr>
+        <a:solidFill>
+          <a:srgbClr val="F6F2EA"/>
+        </a:solidFill>
+        <a:effectLst/>
+      </p:bgPr>
+    </p:bg>
+    <p:spTree>
+      <p:nvGrpSpPr>
+        <p:cNvPr id="1" name=""/>
+        <p:cNvGrpSpPr/>
+        <p:nvPr/>
+      </p:nvGrpSpPr>
+      <p:grpSpPr/>
+      <p:sp>
+        <p:nvSpPr>
+          <p:cNvPr id="2" name="Rectangle 1"/>
+          <p:cNvSpPr/>
+          <p:nvPr/>
+        </p:nvSpPr>
+        <p:spPr>
+          <a:xfrm>
+            <a:off x="777240" y="566928"/>
+            <a:ext cx="310896" cy="31750"/>
+          </a:xfrm>
+          <a:prstGeom prst="rect">
+            <a:avLst/>
+          </a:prstGeom>
+          <a:solidFill>
+            <a:srgbClr val="D98E77"/>
+          </a:solidFill>
+          <a:ln>
+            <a:noFill/>
+          </a:ln>
+        </p:spPr>
+        <p:style>
+          <a:lnRef idx="1">
+            <a:schemeClr val="accent1"/>
+          </a:lnRef>
+          <a:fillRef idx="3">
+            <a:schemeClr val="accent1"/>
+          </a:fillRef>
+          <a:effectRef idx="2">
+            <a:schemeClr val="accent1"/>
+          </a:effectRef>
+          <a:fontRef idx="minor">
+            <a:schemeClr val="lt1"/>
+          </a:fontRef>
+        </p:style>
+        <p:txBody>
+          <a:bodyPr rtlCol="0" anchor="ctr"/>
+          <a:lstStyle/>
+          <a:p>
+            <a:pPr algn="ctr"/>
+          </a:p>
+        </p:txBody>
+      </p:sp>
+      <p:sp>
+        <p:nvSpPr>
           <p:cNvPr id="3" name="TextBox 2"/>
           <p:cNvSpPr txBox="1"/>
           <p:nvPr/>
         </p:nvSpPr>
         <p:spPr>
           <a:xfrm>
-            <a:off x="822960" y="2377440"/>
-            <a:ext cx="10058400" cy="1280160"/>
-          </a:xfrm>
-          <a:prstGeom prst="rect">
-            <a:avLst/>
-          </a:prstGeom>
-          <a:noFill/>
-        </p:spPr>
-        <p:txBody>
-          <a:bodyPr wrap="square">
-            <a:spAutoFit/>
-          </a:bodyPr>
-          <a:lstStyle/>
-          <a:p>
-            <a:pPr>
-              <a:lnSpc>
-                <a:spcPct val="115000"/>
-              </a:lnSpc>
-              <a:spcAft>
-                <a:spcPts val="600"/>
-              </a:spcAft>
-            </a:pPr>
-            <a:r>
-              <a:rPr sz="5400" b="1">
+            <a:off x="1234440" y="457200"/>
+            <a:ext cx="8229600" cy="274320"/>
+          </a:xfrm>
+          <a:prstGeom prst="rect">
+            <a:avLst/>
+          </a:prstGeom>
+          <a:noFill/>
+        </p:spPr>
+        <p:txBody>
+          <a:bodyPr wrap="square" anchor="t">
+            <a:spAutoFit/>
+          </a:bodyPr>
+          <a:lstStyle/>
+          <a:p>
+            <a:pPr algn="l">
+              <a:lnSpc>
+                <a:spcPct val="125000"/>
+              </a:lnSpc>
+              <a:spcAft>
+                <a:spcPts val="800"/>
+              </a:spcAft>
+            </a:pPr>
+            <a:r>
+              <a:rPr sz="1050" b="1">
+                <a:solidFill>
+                  <a:srgbClr val="5B6B63"/>
+                </a:solidFill>
+                <a:latin typeface="Segoe UI Semibold"/>
+              </a:rPr>
+              <a:t>SDG IMPACT FRAMEWORK</a:t>
+            </a:r>
+          </a:p>
+        </p:txBody>
+      </p:sp>
+      <p:sp>
+        <p:nvSpPr>
+          <p:cNvPr id="4" name="TextBox 3"/>
+          <p:cNvSpPr txBox="1"/>
+          <p:nvPr/>
+        </p:nvSpPr>
+        <p:spPr>
+          <a:xfrm>
+            <a:off x="777240" y="960120"/>
+            <a:ext cx="9692640" cy="1554480"/>
+          </a:xfrm>
+          <a:prstGeom prst="rect">
+            <a:avLst/>
+          </a:prstGeom>
+          <a:noFill/>
+        </p:spPr>
+        <p:txBody>
+          <a:bodyPr wrap="square" anchor="t">
+            <a:spAutoFit/>
+          </a:bodyPr>
+          <a:lstStyle/>
+          <a:p>
+            <a:pPr algn="l">
+              <a:lnSpc>
+                <a:spcPct val="105000"/>
+              </a:lnSpc>
+              <a:spcAft>
+                <a:spcPts val="800"/>
+              </a:spcAft>
+            </a:pPr>
+            <a:r>
+              <a:rPr sz="4000" b="1">
+                <a:solidFill>
+                  <a:srgbClr val="1F3A37"/>
+                </a:solidFill>
+                <a:latin typeface="Segoe UI Semibold"/>
+              </a:rPr>
+              <a:t>Baseline, KPI, and a target we can be held to.</a:t>
+            </a:r>
+          </a:p>
+        </p:txBody>
+      </p:sp>
+      <p:sp>
+        <p:nvSpPr>
+          <p:cNvPr id="5" name="Rounded Rectangle 4"/>
+          <p:cNvSpPr/>
+          <p:nvPr/>
+        </p:nvSpPr>
+        <p:spPr>
+          <a:xfrm>
+            <a:off x="777240" y="2606040"/>
+            <a:ext cx="5029200" cy="3017520"/>
+          </a:xfrm>
+          <a:prstGeom prst="roundRect">
+            <a:avLst>
+              <a:gd name="adj" fmla="val 14000"/>
+            </a:avLst>
+          </a:prstGeom>
+          <a:solidFill>
+            <a:srgbClr val="FFFFFF"/>
+          </a:solidFill>
+          <a:ln w="12700">
+            <a:solidFill>
+              <a:srgbClr val="D8D0C2"/>
+            </a:solidFill>
+          </a:ln>
+          <a:effectLst/>
+        </p:spPr>
+        <p:style>
+          <a:lnRef idx="1">
+            <a:schemeClr val="accent1"/>
+          </a:lnRef>
+          <a:fillRef idx="3">
+            <a:schemeClr val="accent1"/>
+          </a:fillRef>
+          <a:effectRef idx="2">
+            <a:schemeClr val="accent1"/>
+          </a:effectRef>
+          <a:fontRef idx="minor">
+            <a:schemeClr val="lt1"/>
+          </a:fontRef>
+        </p:style>
+        <p:txBody>
+          <a:bodyPr rtlCol="0" anchor="ctr"/>
+          <a:lstStyle/>
+          <a:p>
+            <a:pPr algn="ctr"/>
+          </a:p>
+        </p:txBody>
+      </p:sp>
+      <p:sp>
+        <p:nvSpPr>
+          <p:cNvPr id="6" name="TextBox 5"/>
+          <p:cNvSpPr txBox="1"/>
+          <p:nvPr/>
+        </p:nvSpPr>
+        <p:spPr>
+          <a:xfrm>
+            <a:off x="1051560" y="2743200"/>
+            <a:ext cx="4572000" cy="274320"/>
+          </a:xfrm>
+          <a:prstGeom prst="rect">
+            <a:avLst/>
+          </a:prstGeom>
+          <a:noFill/>
+        </p:spPr>
+        <p:txBody>
+          <a:bodyPr wrap="square" anchor="t">
+            <a:spAutoFit/>
+          </a:bodyPr>
+          <a:lstStyle/>
+          <a:p>
+            <a:pPr algn="l">
+              <a:lnSpc>
+                <a:spcPct val="125000"/>
+              </a:lnSpc>
+              <a:spcAft>
+                <a:spcPts val="800"/>
+              </a:spcAft>
+            </a:pPr>
+            <a:r>
+              <a:rPr sz="950" b="1">
+                <a:solidFill>
+                  <a:srgbClr val="D98E77"/>
+                </a:solidFill>
+                <a:latin typeface="Segoe UI Semibold"/>
+              </a:rPr>
+              <a:t>TARGETS</a:t>
+            </a:r>
+          </a:p>
+        </p:txBody>
+      </p:sp>
+      <p:sp>
+        <p:nvSpPr>
+          <p:cNvPr id="7" name="TextBox 6"/>
+          <p:cNvSpPr txBox="1"/>
+          <p:nvPr/>
+        </p:nvSpPr>
+        <p:spPr>
+          <a:xfrm>
+            <a:off x="1051560" y="3063240"/>
+            <a:ext cx="4572000" cy="2377440"/>
+          </a:xfrm>
+          <a:prstGeom prst="rect">
+            <a:avLst/>
+          </a:prstGeom>
+          <a:noFill/>
+        </p:spPr>
+        <p:txBody>
+          <a:bodyPr wrap="square" anchor="t">
+            <a:spAutoFit/>
+          </a:bodyPr>
+          <a:lstStyle/>
+          <a:p>
+            <a:pPr algn="l">
+              <a:lnSpc>
+                <a:spcPct val="170000"/>
+              </a:lnSpc>
+              <a:spcAft>
+                <a:spcPts val="800"/>
+              </a:spcAft>
+            </a:pPr>
+            <a:r>
+              <a:rPr sz="1250" b="0">
+                <a:solidFill>
+                  <a:srgbClr val="1F3A37"/>
+                </a:solidFill>
+                <a:latin typeface="Segoe UI"/>
+              </a:rPr>
+              <a:t>4.4.1  Relevant skills for employment</a:t>
+            </a:r>
+          </a:p>
+          <a:p>
+            <a:pPr algn="l">
+              <a:lnSpc>
+                <a:spcPct val="170000"/>
+              </a:lnSpc>
+              <a:spcAft>
+                <a:spcPts val="800"/>
+              </a:spcAft>
+            </a:pPr>
+            <a:r>
+              <a:rPr sz="1250" b="0">
+                <a:solidFill>
+                  <a:srgbClr val="1F3A37"/>
+                </a:solidFill>
+                <a:latin typeface="Segoe UI"/>
+              </a:rPr>
+              <a:t>4.3.1  Access to lifelong learning</a:t>
+            </a:r>
+          </a:p>
+          <a:p>
+            <a:pPr algn="l">
+              <a:lnSpc>
+                <a:spcPct val="170000"/>
+              </a:lnSpc>
+              <a:spcAft>
+                <a:spcPts val="800"/>
+              </a:spcAft>
+            </a:pPr>
+            <a:r>
+              <a:rPr sz="1250" b="0">
+                <a:solidFill>
+                  <a:srgbClr val="1F3A37"/>
+                </a:solidFill>
+                <a:latin typeface="Segoe UI"/>
+              </a:rPr>
+              <a:t>8.5.2  Employment and decent work</a:t>
+            </a:r>
+          </a:p>
+          <a:p>
+            <a:pPr algn="l">
+              <a:lnSpc>
+                <a:spcPct val="170000"/>
+              </a:lnSpc>
+              <a:spcAft>
+                <a:spcPts val="800"/>
+              </a:spcAft>
+            </a:pPr>
+            <a:r>
+              <a:rPr sz="1250" b="0">
+                <a:solidFill>
+                  <a:srgbClr val="1F3A37"/>
+                </a:solidFill>
+                <a:latin typeface="Segoe UI"/>
+              </a:rPr>
+              <a:t>8.2.1  Productivity through technology</a:t>
+            </a:r>
+          </a:p>
+        </p:txBody>
+      </p:sp>
+      <p:sp>
+        <p:nvSpPr>
+          <p:cNvPr id="8" name="Rounded Rectangle 7"/>
+          <p:cNvSpPr/>
+          <p:nvPr/>
+        </p:nvSpPr>
+        <p:spPr>
+          <a:xfrm>
+            <a:off x="6263640" y="2606040"/>
+            <a:ext cx="5120640" cy="3017520"/>
+          </a:xfrm>
+          <a:prstGeom prst="roundRect">
+            <a:avLst>
+              <a:gd name="adj" fmla="val 14000"/>
+            </a:avLst>
+          </a:prstGeom>
+          <a:solidFill>
+            <a:srgbClr val="1F3A37"/>
+          </a:solidFill>
+          <a:ln>
+            <a:noFill/>
+          </a:ln>
+          <a:effectLst/>
+        </p:spPr>
+        <p:style>
+          <a:lnRef idx="1">
+            <a:schemeClr val="accent1"/>
+          </a:lnRef>
+          <a:fillRef idx="3">
+            <a:schemeClr val="accent1"/>
+          </a:fillRef>
+          <a:effectRef idx="2">
+            <a:schemeClr val="accent1"/>
+          </a:effectRef>
+          <a:fontRef idx="minor">
+            <a:schemeClr val="lt1"/>
+          </a:fontRef>
+        </p:style>
+        <p:txBody>
+          <a:bodyPr rtlCol="0" anchor="ctr"/>
+          <a:lstStyle/>
+          <a:p>
+            <a:pPr algn="ctr"/>
+          </a:p>
+        </p:txBody>
+      </p:sp>
+      <p:sp>
+        <p:nvSpPr>
+          <p:cNvPr id="9" name="TextBox 8"/>
+          <p:cNvSpPr txBox="1"/>
+          <p:nvPr/>
+        </p:nvSpPr>
+        <p:spPr>
+          <a:xfrm>
+            <a:off x="6537960" y="2743200"/>
+            <a:ext cx="4572000" cy="274320"/>
+          </a:xfrm>
+          <a:prstGeom prst="rect">
+            <a:avLst/>
+          </a:prstGeom>
+          <a:noFill/>
+        </p:spPr>
+        <p:txBody>
+          <a:bodyPr wrap="square" anchor="t">
+            <a:spAutoFit/>
+          </a:bodyPr>
+          <a:lstStyle/>
+          <a:p>
+            <a:pPr algn="l">
+              <a:lnSpc>
+                <a:spcPct val="125000"/>
+              </a:lnSpc>
+              <a:spcAft>
+                <a:spcPts val="800"/>
+              </a:spcAft>
+            </a:pPr>
+            <a:r>
+              <a:rPr sz="950" b="1">
+                <a:solidFill>
+                  <a:srgbClr val="D98E77"/>
+                </a:solidFill>
+                <a:latin typeface="Segoe UI Semibold"/>
+              </a:rPr>
+              <a:t>MEASUREMENT</a:t>
+            </a:r>
+          </a:p>
+        </p:txBody>
+      </p:sp>
+      <p:sp>
+        <p:nvSpPr>
+          <p:cNvPr id="10" name="TextBox 9"/>
+          <p:cNvSpPr txBox="1"/>
+          <p:nvPr/>
+        </p:nvSpPr>
+        <p:spPr>
+          <a:xfrm>
+            <a:off x="6537960" y="3063240"/>
+            <a:ext cx="4572000" cy="2377440"/>
+          </a:xfrm>
+          <a:prstGeom prst="rect">
+            <a:avLst/>
+          </a:prstGeom>
+          <a:noFill/>
+        </p:spPr>
+        <p:txBody>
+          <a:bodyPr wrap="square" anchor="t">
+            <a:spAutoFit/>
+          </a:bodyPr>
+          <a:lstStyle/>
+          <a:p>
+            <a:pPr algn="l">
+              <a:lnSpc>
+                <a:spcPct val="135000"/>
+              </a:lnSpc>
+              <a:spcAft>
+                <a:spcPts val="800"/>
+              </a:spcAft>
+            </a:pPr>
+            <a:r>
+              <a:rPr sz="1150" b="0">
+                <a:solidFill>
+                  <a:srgbClr val="F6F2EA"/>
+                </a:solidFill>
+                <a:latin typeface="Segoe UI"/>
+              </a:rPr>
+              <a:t>Baseline — 56% use AI, 26% trained, 600k need reskilling.</a:t>
+            </a:r>
+          </a:p>
+          <a:p>
+            <a:pPr algn="l">
+              <a:lnSpc>
+                <a:spcPct val="135000"/>
+              </a:lnSpc>
+              <a:spcAft>
+                <a:spcPts val="800"/>
+              </a:spcAft>
+            </a:pPr>
+            <a:r>
+              <a:rPr sz="1150" b="0">
+                <a:solidFill>
+                  <a:srgbClr val="F6F2EA"/>
+                </a:solidFill>
+                <a:latin typeface="Segoe UI"/>
+              </a:rPr>
+              <a:t>KPI — share of recommendations carrying a verifiable source and date; time to a ranked plan.</a:t>
+            </a:r>
+          </a:p>
+          <a:p>
+            <a:pPr algn="l">
+              <a:lnSpc>
+                <a:spcPct val="135000"/>
+              </a:lnSpc>
+              <a:spcAft>
+                <a:spcPts val="800"/>
+              </a:spcAft>
+            </a:pPr>
+            <a:r>
+              <a:rPr sz="1150" b="0">
+                <a:solidFill>
+                  <a:srgbClr val="F6F2EA"/>
+                </a:solidFill>
+                <a:latin typeface="Segoe UI"/>
+              </a:rPr>
+              <a:t>Phase 2 target — 100% sourced, under five minutes, with a Malaysian trend source.</a:t>
+            </a:r>
+          </a:p>
+        </p:txBody>
+      </p:sp>
+      <p:sp>
+        <p:nvSpPr>
+          <p:cNvPr id="11" name="TextBox 10"/>
+          <p:cNvSpPr txBox="1"/>
+          <p:nvPr/>
+        </p:nvSpPr>
+        <p:spPr>
+          <a:xfrm>
+            <a:off x="777240" y="5806440"/>
+            <a:ext cx="10424160" cy="365760"/>
+          </a:xfrm>
+          <a:prstGeom prst="rect">
+            <a:avLst/>
+          </a:prstGeom>
+          <a:noFill/>
+        </p:spPr>
+        <p:txBody>
+          <a:bodyPr wrap="square" anchor="t">
+            <a:spAutoFit/>
+          </a:bodyPr>
+          <a:lstStyle/>
+          <a:p>
+            <a:pPr algn="l">
+              <a:lnSpc>
+                <a:spcPct val="125000"/>
+              </a:lnSpc>
+              <a:spcAft>
+                <a:spcPts val="800"/>
+              </a:spcAft>
+            </a:pPr>
+            <a:r>
+              <a:rPr sz="1100" b="0">
+                <a:solidFill>
+                  <a:srgbClr val="5B6B63"/>
+                </a:solidFill>
+                <a:latin typeface="Segoe UI"/>
+              </a:rPr>
+              <a:t>We report the KPI we can be measured on, not the one that flatters us.</a:t>
+            </a:r>
+          </a:p>
+        </p:txBody>
+      </p:sp>
+      <p:sp>
+        <p:nvSpPr>
+          <p:cNvPr id="12" name="TextBox 11"/>
+          <p:cNvSpPr txBox="1"/>
+          <p:nvPr/>
+        </p:nvSpPr>
+        <p:spPr>
+          <a:xfrm>
+            <a:off x="777240" y="6263640"/>
+            <a:ext cx="10607040" cy="274320"/>
+          </a:xfrm>
+          <a:prstGeom prst="rect">
+            <a:avLst/>
+          </a:prstGeom>
+          <a:noFill/>
+        </p:spPr>
+        <p:txBody>
+          <a:bodyPr wrap="square" anchor="t">
+            <a:spAutoFit/>
+          </a:bodyPr>
+          <a:lstStyle/>
+          <a:p>
+            <a:pPr algn="l">
+              <a:lnSpc>
+                <a:spcPct val="125000"/>
+              </a:lnSpc>
+              <a:spcAft>
+                <a:spcPts val="800"/>
+              </a:spcAft>
+            </a:pPr>
+            <a:r>
+              <a:rPr sz="900" b="0">
+                <a:solidFill>
+                  <a:srgbClr val="5B6B63"/>
+                </a:solidFill>
+                <a:latin typeface="Segoe UI"/>
+              </a:rPr>
+              <a:t>SDG 4 · 8</a:t>
+            </a:r>
+          </a:p>
+        </p:txBody>
+      </p:sp>
+      <p:sp>
+        <p:nvSpPr>
+          <p:cNvPr id="13" name="TextBox 12"/>
+          <p:cNvSpPr txBox="1"/>
+          <p:nvPr/>
+        </p:nvSpPr>
+        <p:spPr>
+          <a:xfrm>
+            <a:off x="10591495" y="6263640"/>
+            <a:ext cx="822960" cy="274320"/>
+          </a:xfrm>
+          <a:prstGeom prst="rect">
+            <a:avLst/>
+          </a:prstGeom>
+          <a:noFill/>
+        </p:spPr>
+        <p:txBody>
+          <a:bodyPr wrap="square" anchor="t">
+            <a:spAutoFit/>
+          </a:bodyPr>
+          <a:lstStyle/>
+          <a:p>
+            <a:pPr algn="r">
+              <a:lnSpc>
+                <a:spcPct val="125000"/>
+              </a:lnSpc>
+              <a:spcAft>
+                <a:spcPts val="800"/>
+              </a:spcAft>
+            </a:pPr>
+            <a:r>
+              <a:rPr sz="900" b="0">
+                <a:solidFill>
+                  <a:srgbClr val="5B6B63"/>
+                </a:solidFill>
+                <a:latin typeface="Segoe UI"/>
+              </a:rPr>
+              <a:t>10 / 12</a:t>
+            </a:r>
+          </a:p>
+        </p:txBody>
+      </p:sp>
+    </p:spTree>
+  </p:cSld>
+  <p:clrMapOvr>
+    <a:masterClrMapping/>
+  </p:clrMapOvr>
+</p:sld>
+</file>
+
+<file path=ppt/slides/slide11.xml><?xml version="1.0" encoding="utf-8"?>
+<p:sld xmlns:a="http://schemas.openxmlformats.org/drawingml/2006/main" xmlns:p="http://schemas.openxmlformats.org/presentationml/2006/main" xmlns:r="http://schemas.openxmlformats.org/officeDocument/2006/relationships">
+  <p:cSld>
+    <p:bg>
+      <p:bgPr>
+        <a:solidFill>
+          <a:srgbClr val="F6F2EA"/>
+        </a:solidFill>
+        <a:effectLst/>
+      </p:bgPr>
+    </p:bg>
+    <p:spTree>
+      <p:nvGrpSpPr>
+        <p:cNvPr id="1" name=""/>
+        <p:cNvGrpSpPr/>
+        <p:nvPr/>
+      </p:nvGrpSpPr>
+      <p:grpSpPr/>
+      <p:sp>
+        <p:nvSpPr>
+          <p:cNvPr id="2" name="Rectangle 1"/>
+          <p:cNvSpPr/>
+          <p:nvPr/>
+        </p:nvSpPr>
+        <p:spPr>
+          <a:xfrm>
+            <a:off x="777240" y="566928"/>
+            <a:ext cx="310896" cy="31750"/>
+          </a:xfrm>
+          <a:prstGeom prst="rect">
+            <a:avLst/>
+          </a:prstGeom>
+          <a:solidFill>
+            <a:srgbClr val="D98E77"/>
+          </a:solidFill>
+          <a:ln>
+            <a:noFill/>
+          </a:ln>
+        </p:spPr>
+        <p:style>
+          <a:lnRef idx="1">
+            <a:schemeClr val="accent1"/>
+          </a:lnRef>
+          <a:fillRef idx="3">
+            <a:schemeClr val="accent1"/>
+          </a:fillRef>
+          <a:effectRef idx="2">
+            <a:schemeClr val="accent1"/>
+          </a:effectRef>
+          <a:fontRef idx="minor">
+            <a:schemeClr val="lt1"/>
+          </a:fontRef>
+        </p:style>
+        <p:txBody>
+          <a:bodyPr rtlCol="0" anchor="ctr"/>
+          <a:lstStyle/>
+          <a:p>
+            <a:pPr algn="ctr"/>
+          </a:p>
+        </p:txBody>
+      </p:sp>
+      <p:sp>
+        <p:nvSpPr>
+          <p:cNvPr id="3" name="TextBox 2"/>
+          <p:cNvSpPr txBox="1"/>
+          <p:nvPr/>
+        </p:nvSpPr>
+        <p:spPr>
+          <a:xfrm>
+            <a:off x="1234440" y="457200"/>
+            <a:ext cx="8229600" cy="274320"/>
+          </a:xfrm>
+          <a:prstGeom prst="rect">
+            <a:avLst/>
+          </a:prstGeom>
+          <a:noFill/>
+        </p:spPr>
+        <p:txBody>
+          <a:bodyPr wrap="square" anchor="t">
+            <a:spAutoFit/>
+          </a:bodyPr>
+          <a:lstStyle/>
+          <a:p>
+            <a:pPr algn="l">
+              <a:lnSpc>
+                <a:spcPct val="125000"/>
+              </a:lnSpc>
+              <a:spcAft>
+                <a:spcPts val="800"/>
+              </a:spcAft>
+            </a:pPr>
+            <a:r>
+              <a:rPr sz="1050" b="1">
+                <a:solidFill>
+                  <a:srgbClr val="5B6B63"/>
+                </a:solidFill>
+                <a:latin typeface="Segoe UI Semibold"/>
+              </a:rPr>
+              <a:t>FEASIBILITY, AND THE RISK WE NAME</a:t>
+            </a:r>
+          </a:p>
+        </p:txBody>
+      </p:sp>
+      <p:sp>
+        <p:nvSpPr>
+          <p:cNvPr id="4" name="TextBox 3"/>
+          <p:cNvSpPr txBox="1"/>
+          <p:nvPr/>
+        </p:nvSpPr>
+        <p:spPr>
+          <a:xfrm>
+            <a:off x="777240" y="960120"/>
+            <a:ext cx="10058400" cy="1554480"/>
+          </a:xfrm>
+          <a:prstGeom prst="rect">
+            <a:avLst/>
+          </a:prstGeom>
+          <a:noFill/>
+        </p:spPr>
+        <p:txBody>
+          <a:bodyPr wrap="square" anchor="t">
+            <a:spAutoFit/>
+          </a:bodyPr>
+          <a:lstStyle/>
+          <a:p>
+            <a:pPr algn="l">
+              <a:lnSpc>
+                <a:spcPct val="105000"/>
+              </a:lnSpc>
+              <a:spcAft>
+                <a:spcPts val="800"/>
+              </a:spcAft>
+            </a:pPr>
+            <a:r>
+              <a:rPr sz="3000" b="1">
+                <a:solidFill>
+                  <a:srgbClr val="1F3A37"/>
+                </a:solidFill>
+                <a:latin typeface="Segoe UI Semibold"/>
+              </a:rPr>
+              <a:t>Hardest risk: the model inventing a job or a course.</a:t>
+            </a:r>
+          </a:p>
+        </p:txBody>
+      </p:sp>
+      <p:sp>
+        <p:nvSpPr>
+          <p:cNvPr id="5" name="Rounded Rectangle 4"/>
+          <p:cNvSpPr/>
+          <p:nvPr/>
+        </p:nvSpPr>
+        <p:spPr>
+          <a:xfrm>
+            <a:off x="777240" y="2148840"/>
+            <a:ext cx="6309360" cy="3246120"/>
+          </a:xfrm>
+          <a:prstGeom prst="roundRect">
+            <a:avLst>
+              <a:gd name="adj" fmla="val 14000"/>
+            </a:avLst>
+          </a:prstGeom>
+          <a:solidFill>
+            <a:srgbClr val="FFFFFF"/>
+          </a:solidFill>
+          <a:ln w="19050">
+            <a:solidFill>
+              <a:srgbClr val="D98E77"/>
+            </a:solidFill>
+          </a:ln>
+          <a:effectLst/>
+        </p:spPr>
+        <p:style>
+          <a:lnRef idx="1">
+            <a:schemeClr val="accent1"/>
+          </a:lnRef>
+          <a:fillRef idx="3">
+            <a:schemeClr val="accent1"/>
+          </a:fillRef>
+          <a:effectRef idx="2">
+            <a:schemeClr val="accent1"/>
+          </a:effectRef>
+          <a:fontRef idx="minor">
+            <a:schemeClr val="lt1"/>
+          </a:fontRef>
+        </p:style>
+        <p:txBody>
+          <a:bodyPr rtlCol="0" anchor="ctr"/>
+          <a:lstStyle/>
+          <a:p>
+            <a:pPr algn="ctr"/>
+          </a:p>
+        </p:txBody>
+      </p:sp>
+      <p:sp>
+        <p:nvSpPr>
+          <p:cNvPr id="6" name="TextBox 5"/>
+          <p:cNvSpPr txBox="1"/>
+          <p:nvPr/>
+        </p:nvSpPr>
+        <p:spPr>
+          <a:xfrm>
+            <a:off x="1051560" y="2286000"/>
+            <a:ext cx="5760720" cy="274320"/>
+          </a:xfrm>
+          <a:prstGeom prst="rect">
+            <a:avLst/>
+          </a:prstGeom>
+          <a:noFill/>
+        </p:spPr>
+        <p:txBody>
+          <a:bodyPr wrap="square" anchor="t">
+            <a:spAutoFit/>
+          </a:bodyPr>
+          <a:lstStyle/>
+          <a:p>
+            <a:pPr algn="l">
+              <a:lnSpc>
+                <a:spcPct val="125000"/>
+              </a:lnSpc>
+              <a:spcAft>
+                <a:spcPts val="800"/>
+              </a:spcAft>
+            </a:pPr>
+            <a:r>
+              <a:rPr sz="950" b="1">
+                <a:solidFill>
+                  <a:srgbClr val="D98E77"/>
+                </a:solidFill>
+                <a:latin typeface="Segoe UI Semibold"/>
+              </a:rPr>
+              <a:t>RISK AND FALLBACK</a:t>
+            </a:r>
+          </a:p>
+        </p:txBody>
+      </p:sp>
+      <p:sp>
+        <p:nvSpPr>
+          <p:cNvPr id="7" name="TextBox 6"/>
+          <p:cNvSpPr txBox="1"/>
+          <p:nvPr/>
+        </p:nvSpPr>
+        <p:spPr>
+          <a:xfrm>
+            <a:off x="1051560" y="2606040"/>
+            <a:ext cx="5760720" cy="2651760"/>
+          </a:xfrm>
+          <a:prstGeom prst="rect">
+            <a:avLst/>
+          </a:prstGeom>
+          <a:noFill/>
+        </p:spPr>
+        <p:txBody>
+          <a:bodyPr wrap="square" anchor="t">
+            <a:spAutoFit/>
+          </a:bodyPr>
+          <a:lstStyle/>
+          <a:p>
+            <a:pPr algn="l">
+              <a:lnSpc>
+                <a:spcPct val="130000"/>
+              </a:lnSpc>
+              <a:spcAft>
+                <a:spcPts val="700"/>
+              </a:spcAft>
+            </a:pPr>
+            <a:r>
+              <a:rPr sz="1100" b="0">
+                <a:solidFill>
+                  <a:srgbClr val="1F3A37"/>
+                </a:solidFill>
+                <a:latin typeface="Segoe UI"/>
+              </a:rPr>
+              <a:t>A generated role, course or statistic that does not exist.</a:t>
+            </a:r>
+          </a:p>
+          <a:p>
+            <a:pPr algn="l">
+              <a:lnSpc>
+                <a:spcPct val="130000"/>
+              </a:lnSpc>
+              <a:spcAft>
+                <a:spcPts val="700"/>
+              </a:spcAft>
+            </a:pPr>
+            <a:r>
+              <a:rPr sz="1100" b="0">
+                <a:solidFill>
+                  <a:srgbClr val="1F3A37"/>
+                </a:solidFill>
+                <a:latin typeface="Segoe UI"/>
+              </a:rPr>
+              <a:t>·  Catalogue and library are closed; unknown IDs are dropped server-side.</a:t>
+            </a:r>
+          </a:p>
+          <a:p>
+            <a:pPr algn="l">
+              <a:lnSpc>
+                <a:spcPct val="130000"/>
+              </a:lnSpc>
+              <a:spcAft>
+                <a:spcPts val="700"/>
+              </a:spcAft>
+            </a:pPr>
+            <a:r>
+              <a:rPr sz="1100" b="0">
+                <a:solidFill>
+                  <a:srgbClr val="1F3A37"/>
+                </a:solidFill>
+                <a:latin typeface="Segoe UI"/>
+              </a:rPr>
+              <a:t>·  The exploratory tier must name an occupational reference or the suggestion is removed.</a:t>
+            </a:r>
+          </a:p>
+          <a:p>
+            <a:pPr algn="l">
+              <a:lnSpc>
+                <a:spcPct val="130000"/>
+              </a:lnSpc>
+              <a:spcAft>
+                <a:spcPts val="700"/>
+              </a:spcAft>
+            </a:pPr>
+            <a:r>
+              <a:rPr sz="1100" b="0">
+                <a:solidFill>
+                  <a:srgbClr val="1F3A37"/>
+                </a:solidFill>
+                <a:latin typeface="Segoe UI"/>
+              </a:rPr>
+              <a:t>·  Course steps resolve only to URLs we fetched and verified before shipping.</a:t>
+            </a:r>
+          </a:p>
+          <a:p>
+            <a:pPr algn="l">
+              <a:lnSpc>
+                <a:spcPct val="130000"/>
+              </a:lnSpc>
+              <a:spcAft>
+                <a:spcPts val="700"/>
+              </a:spcAft>
+            </a:pPr>
+            <a:r>
+              <a:rPr sz="1100" b="0">
+                <a:solidFill>
+                  <a:srgbClr val="1F3A37"/>
+                </a:solidFill>
+                <a:latin typeface="Segoe UI"/>
+              </a:rPr>
+              <a:t>Second risk: a global job feed is not Malaysian vacancy data — stated on screen, fixed in Phase 2.</a:t>
+            </a:r>
+          </a:p>
+        </p:txBody>
+      </p:sp>
+      <p:sp>
+        <p:nvSpPr>
+          <p:cNvPr id="8" name="Rounded Rectangle 7"/>
+          <p:cNvSpPr/>
+          <p:nvPr/>
+        </p:nvSpPr>
+        <p:spPr>
+          <a:xfrm>
+            <a:off x="7315200" y="2148840"/>
+            <a:ext cx="4069080" cy="3246120"/>
+          </a:xfrm>
+          <a:prstGeom prst="roundRect">
+            <a:avLst>
+              <a:gd name="adj" fmla="val 14000"/>
+            </a:avLst>
+          </a:prstGeom>
+          <a:solidFill>
+            <a:srgbClr val="ECE5D8"/>
+          </a:solidFill>
+          <a:ln>
+            <a:noFill/>
+          </a:ln>
+          <a:effectLst/>
+        </p:spPr>
+        <p:style>
+          <a:lnRef idx="1">
+            <a:schemeClr val="accent1"/>
+          </a:lnRef>
+          <a:fillRef idx="3">
+            <a:schemeClr val="accent1"/>
+          </a:fillRef>
+          <a:effectRef idx="2">
+            <a:schemeClr val="accent1"/>
+          </a:effectRef>
+          <a:fontRef idx="minor">
+            <a:schemeClr val="lt1"/>
+          </a:fontRef>
+        </p:style>
+        <p:txBody>
+          <a:bodyPr rtlCol="0" anchor="ctr"/>
+          <a:lstStyle/>
+          <a:p>
+            <a:pPr algn="ctr"/>
+          </a:p>
+        </p:txBody>
+      </p:sp>
+      <p:sp>
+        <p:nvSpPr>
+          <p:cNvPr id="9" name="TextBox 8"/>
+          <p:cNvSpPr txBox="1"/>
+          <p:nvPr/>
+        </p:nvSpPr>
+        <p:spPr>
+          <a:xfrm>
+            <a:off x="7589520" y="2286000"/>
+            <a:ext cx="3566160" cy="274320"/>
+          </a:xfrm>
+          <a:prstGeom prst="rect">
+            <a:avLst/>
+          </a:prstGeom>
+          <a:noFill/>
+        </p:spPr>
+        <p:txBody>
+          <a:bodyPr wrap="square" anchor="t">
+            <a:spAutoFit/>
+          </a:bodyPr>
+          <a:lstStyle/>
+          <a:p>
+            <a:pPr algn="l">
+              <a:lnSpc>
+                <a:spcPct val="125000"/>
+              </a:lnSpc>
+              <a:spcAft>
+                <a:spcPts val="800"/>
+              </a:spcAft>
+            </a:pPr>
+            <a:r>
+              <a:rPr sz="950" b="1">
+                <a:solidFill>
+                  <a:srgbClr val="5B6B63"/>
+                </a:solidFill>
+                <a:latin typeface="Segoe UI Semibold"/>
+              </a:rPr>
+              <a:t>STACK</a:t>
+            </a:r>
+          </a:p>
+        </p:txBody>
+      </p:sp>
+      <p:sp>
+        <p:nvSpPr>
+          <p:cNvPr id="10" name="TextBox 9"/>
+          <p:cNvSpPr txBox="1"/>
+          <p:nvPr/>
+        </p:nvSpPr>
+        <p:spPr>
+          <a:xfrm>
+            <a:off x="7589520" y="2606040"/>
+            <a:ext cx="3566160" cy="2651760"/>
+          </a:xfrm>
+          <a:prstGeom prst="rect">
+            <a:avLst/>
+          </a:prstGeom>
+          <a:noFill/>
+        </p:spPr>
+        <p:txBody>
+          <a:bodyPr wrap="square" anchor="t">
+            <a:spAutoFit/>
+          </a:bodyPr>
+          <a:lstStyle/>
+          <a:p>
+            <a:pPr algn="l">
+              <a:lnSpc>
+                <a:spcPct val="145000"/>
+              </a:lnSpc>
+              <a:spcAft>
+                <a:spcPts val="800"/>
+              </a:spcAft>
+            </a:pPr>
+            <a:r>
+              <a:rPr sz="1050" b="0">
+                <a:solidFill>
+                  <a:srgbClr val="1F3A37"/>
+                </a:solidFill>
+                <a:latin typeface="Segoe UI"/>
+              </a:rPr>
+              <a:t>React 19 · Vite · Tailwind 4</a:t>
+            </a:r>
+          </a:p>
+          <a:p>
+            <a:pPr algn="l">
+              <a:lnSpc>
+                <a:spcPct val="145000"/>
+              </a:lnSpc>
+              <a:spcAft>
+                <a:spcPts val="800"/>
+              </a:spcAft>
+            </a:pPr>
+            <a:r>
+              <a:rPr sz="1050" b="0">
+                <a:solidFill>
+                  <a:srgbClr val="1F3A37"/>
+                </a:solidFill>
+                <a:latin typeface="Segoe UI"/>
+              </a:rPr>
+              <a:t>TanStack Query · Wouter</a:t>
+            </a:r>
+          </a:p>
+          <a:p>
+            <a:pPr algn="l">
+              <a:lnSpc>
+                <a:spcPct val="145000"/>
+              </a:lnSpc>
+              <a:spcAft>
+                <a:spcPts val="800"/>
+              </a:spcAft>
+            </a:pPr>
+            <a:r>
+              <a:rPr sz="1050" b="0">
+                <a:solidFill>
+                  <a:srgbClr val="1F3A37"/>
+                </a:solidFill>
+                <a:latin typeface="Segoe UI"/>
+              </a:rPr>
+              <a:t>Express 5 · Zod · OpenAPI + Orval</a:t>
+            </a:r>
+          </a:p>
+          <a:p>
+            <a:pPr algn="l">
+              <a:lnSpc>
+                <a:spcPct val="145000"/>
+              </a:lnSpc>
+              <a:spcAft>
+                <a:spcPts val="800"/>
+              </a:spcAft>
+            </a:pPr>
+            <a:r>
+              <a:rPr sz="1050" b="0">
+                <a:solidFill>
+                  <a:srgbClr val="1F3A37"/>
+                </a:solidFill>
+                <a:latin typeface="Segoe UI"/>
+              </a:rPr>
+              <a:t>DeepSeek (declared)</a:t>
+            </a:r>
+          </a:p>
+          <a:p>
+            <a:pPr algn="l">
+              <a:lnSpc>
+                <a:spcPct val="145000"/>
+              </a:lnSpc>
+              <a:spcAft>
+                <a:spcPts val="800"/>
+              </a:spcAft>
+            </a:pPr>
+            <a:r>
+              <a:rPr sz="1050" b="0">
+                <a:solidFill>
+                  <a:srgbClr val="1F3A37"/>
+                </a:solidFill>
+                <a:latin typeface="Segoe UI"/>
+              </a:rPr>
+              <a:t>O*NET 30.1 · Arbeitnow</a:t>
+            </a:r>
+          </a:p>
+          <a:p>
+            <a:pPr algn="l">
+              <a:lnSpc>
+                <a:spcPct val="145000"/>
+              </a:lnSpc>
+              <a:spcAft>
+                <a:spcPts val="800"/>
+              </a:spcAft>
+            </a:pPr>
+            <a:r>
+              <a:rPr sz="1050" b="0">
+                <a:solidFill>
+                  <a:srgbClr val="1F3A37"/>
+                </a:solidFill>
+                <a:latin typeface="Segoe UI"/>
+              </a:rPr>
+              <a:t>Replit hosting and deploy</a:t>
+            </a:r>
+          </a:p>
+        </p:txBody>
+      </p:sp>
+      <p:sp>
+        <p:nvSpPr>
+          <p:cNvPr id="11" name="TextBox 10"/>
+          <p:cNvSpPr txBox="1"/>
+          <p:nvPr/>
+        </p:nvSpPr>
+        <p:spPr>
+          <a:xfrm>
+            <a:off x="777240" y="5623560"/>
+            <a:ext cx="10424160" cy="457200"/>
+          </a:xfrm>
+          <a:prstGeom prst="rect">
+            <a:avLst/>
+          </a:prstGeom>
+          <a:noFill/>
+        </p:spPr>
+        <p:txBody>
+          <a:bodyPr wrap="square" anchor="t">
+            <a:spAutoFit/>
+          </a:bodyPr>
+          <a:lstStyle/>
+          <a:p>
+            <a:pPr algn="l">
+              <a:lnSpc>
+                <a:spcPct val="130000"/>
+              </a:lnSpc>
+              <a:spcAft>
+                <a:spcPts val="800"/>
+              </a:spcAft>
+            </a:pPr>
+            <a:r>
+              <a:rPr sz="1200" b="0">
+                <a:solidFill>
+                  <a:srgbClr val="1F3A37"/>
+                </a:solidFill>
+                <a:latin typeface="Segoe UI"/>
+              </a:rPr>
+              <a:t>Live prototype: aura-workforce.replit.app      Repository: github.com/adamnaemman/sdc-hackathon</a:t>
+            </a:r>
+          </a:p>
+        </p:txBody>
+      </p:sp>
+      <p:sp>
+        <p:nvSpPr>
+          <p:cNvPr id="12" name="TextBox 11"/>
+          <p:cNvSpPr txBox="1"/>
+          <p:nvPr/>
+        </p:nvSpPr>
+        <p:spPr>
+          <a:xfrm>
+            <a:off x="777240" y="6263640"/>
+            <a:ext cx="10607040" cy="274320"/>
+          </a:xfrm>
+          <a:prstGeom prst="rect">
+            <a:avLst/>
+          </a:prstGeom>
+          <a:noFill/>
+        </p:spPr>
+        <p:txBody>
+          <a:bodyPr wrap="square" anchor="t">
+            <a:spAutoFit/>
+          </a:bodyPr>
+          <a:lstStyle/>
+          <a:p>
+            <a:pPr algn="l">
+              <a:lnSpc>
+                <a:spcPct val="125000"/>
+              </a:lnSpc>
+              <a:spcAft>
+                <a:spcPts val="800"/>
+              </a:spcAft>
+            </a:pPr>
+            <a:r>
+              <a:rPr sz="900" b="0">
+                <a:solidFill>
+                  <a:srgbClr val="5B6B63"/>
+                </a:solidFill>
+                <a:latin typeface="Segoe UI"/>
+              </a:rPr>
+              <a:t>Every claim in this deck is reproducible from the repository</a:t>
+            </a:r>
+          </a:p>
+        </p:txBody>
+      </p:sp>
+      <p:sp>
+        <p:nvSpPr>
+          <p:cNvPr id="13" name="TextBox 12"/>
+          <p:cNvSpPr txBox="1"/>
+          <p:nvPr/>
+        </p:nvSpPr>
+        <p:spPr>
+          <a:xfrm>
+            <a:off x="10591495" y="6263640"/>
+            <a:ext cx="822960" cy="274320"/>
+          </a:xfrm>
+          <a:prstGeom prst="rect">
+            <a:avLst/>
+          </a:prstGeom>
+          <a:noFill/>
+        </p:spPr>
+        <p:txBody>
+          <a:bodyPr wrap="square" anchor="t">
+            <a:spAutoFit/>
+          </a:bodyPr>
+          <a:lstStyle/>
+          <a:p>
+            <a:pPr algn="r">
+              <a:lnSpc>
+                <a:spcPct val="125000"/>
+              </a:lnSpc>
+              <a:spcAft>
+                <a:spcPts val="800"/>
+              </a:spcAft>
+            </a:pPr>
+            <a:r>
+              <a:rPr sz="900" b="0">
+                <a:solidFill>
+                  <a:srgbClr val="5B6B63"/>
+                </a:solidFill>
+                <a:latin typeface="Segoe UI"/>
+              </a:rPr>
+              <a:t>11 / 12</a:t>
+            </a:r>
+          </a:p>
+        </p:txBody>
+      </p:sp>
+    </p:spTree>
+  </p:cSld>
+  <p:clrMapOvr>
+    <a:masterClrMapping/>
+  </p:clrMapOvr>
+</p:sld>
+</file>
+
+<file path=ppt/slides/slide12.xml><?xml version="1.0" encoding="utf-8"?>
+<p:sld xmlns:a="http://schemas.openxmlformats.org/drawingml/2006/main" xmlns:p="http://schemas.openxmlformats.org/presentationml/2006/main" xmlns:r="http://schemas.openxmlformats.org/officeDocument/2006/relationships">
+  <p:cSld>
+    <p:bg>
+      <p:bgPr>
+        <a:solidFill>
+          <a:srgbClr val="1F3A37"/>
+        </a:solidFill>
+        <a:effectLst/>
+      </p:bgPr>
+    </p:bg>
+    <p:spTree>
+      <p:nvGrpSpPr>
+        <p:cNvPr id="1" name=""/>
+        <p:cNvGrpSpPr/>
+        <p:nvPr/>
+      </p:nvGrpSpPr>
+      <p:grpSpPr/>
+      <p:sp>
+        <p:nvSpPr>
+          <p:cNvPr id="2" name="Rectangle 1"/>
+          <p:cNvSpPr/>
+          <p:nvPr/>
+        </p:nvSpPr>
+        <p:spPr>
+          <a:xfrm>
+            <a:off x="777240" y="566928"/>
+            <a:ext cx="310896" cy="31750"/>
+          </a:xfrm>
+          <a:prstGeom prst="rect">
+            <a:avLst/>
+          </a:prstGeom>
+          <a:solidFill>
+            <a:srgbClr val="D98E77"/>
+          </a:solidFill>
+          <a:ln>
+            <a:noFill/>
+          </a:ln>
+        </p:spPr>
+        <p:style>
+          <a:lnRef idx="1">
+            <a:schemeClr val="accent1"/>
+          </a:lnRef>
+          <a:fillRef idx="3">
+            <a:schemeClr val="accent1"/>
+          </a:fillRef>
+          <a:effectRef idx="2">
+            <a:schemeClr val="accent1"/>
+          </a:effectRef>
+          <a:fontRef idx="minor">
+            <a:schemeClr val="lt1"/>
+          </a:fontRef>
+        </p:style>
+        <p:txBody>
+          <a:bodyPr rtlCol="0" anchor="ctr"/>
+          <a:lstStyle/>
+          <a:p>
+            <a:pPr algn="ctr"/>
+          </a:p>
+        </p:txBody>
+      </p:sp>
+      <p:sp>
+        <p:nvSpPr>
+          <p:cNvPr id="3" name="TextBox 2"/>
+          <p:cNvSpPr txBox="1"/>
+          <p:nvPr/>
+        </p:nvSpPr>
+        <p:spPr>
+          <a:xfrm>
+            <a:off x="1234440" y="457200"/>
+            <a:ext cx="8229600" cy="274320"/>
+          </a:xfrm>
+          <a:prstGeom prst="rect">
+            <a:avLst/>
+          </a:prstGeom>
+          <a:noFill/>
+        </p:spPr>
+        <p:txBody>
+          <a:bodyPr wrap="square" anchor="t">
+            <a:spAutoFit/>
+          </a:bodyPr>
+          <a:lstStyle/>
+          <a:p>
+            <a:pPr algn="l">
+              <a:lnSpc>
+                <a:spcPct val="125000"/>
+              </a:lnSpc>
+              <a:spcAft>
+                <a:spcPts val="800"/>
+              </a:spcAft>
+            </a:pPr>
+            <a:r>
+              <a:rPr sz="1050" b="1">
+                <a:solidFill>
+                  <a:srgbClr val="D98E77"/>
+                </a:solidFill>
+                <a:latin typeface="Segoe UI Semibold"/>
+              </a:rPr>
+              <a:t>WHAT COMES NEXT</a:t>
+            </a:r>
+          </a:p>
+        </p:txBody>
+      </p:sp>
+      <p:sp>
+        <p:nvSpPr>
+          <p:cNvPr id="4" name="TextBox 3"/>
+          <p:cNvSpPr txBox="1"/>
+          <p:nvPr/>
+        </p:nvSpPr>
+        <p:spPr>
+          <a:xfrm>
+            <a:off x="777240" y="914400"/>
+            <a:ext cx="10058400" cy="914400"/>
+          </a:xfrm>
+          <a:prstGeom prst="rect">
+            <a:avLst/>
+          </a:prstGeom>
+          <a:noFill/>
+        </p:spPr>
+        <p:txBody>
+          <a:bodyPr wrap="square" anchor="t">
+            <a:spAutoFit/>
+          </a:bodyPr>
+          <a:lstStyle/>
+          <a:p>
+            <a:pPr algn="l">
+              <a:lnSpc>
+                <a:spcPct val="125000"/>
+              </a:lnSpc>
+              <a:spcAft>
+                <a:spcPts val="800"/>
+              </a:spcAft>
+            </a:pPr>
+            <a:r>
+              <a:rPr sz="3400" b="1">
                 <a:solidFill>
                   <a:srgbClr val="FFFFFF"/>
                 </a:solidFill>
-                <a:latin typeface="Arial"/>
-              </a:rPr>
-              <a:t>AURA-Workforce</a:t>
-            </a:r>
-          </a:p>
-        </p:txBody>
-      </p:sp>
-      <p:sp>
-        <p:nvSpPr>
-          <p:cNvPr id="4" name="TextBox 3"/>
-          <p:cNvSpPr txBox="1"/>
-          <p:nvPr/>
-        </p:nvSpPr>
-        <p:spPr>
-          <a:xfrm>
-            <a:off x="822960" y="3566160"/>
-            <a:ext cx="9601200" cy="1097280"/>
-          </a:xfrm>
-          <a:prstGeom prst="rect">
-            <a:avLst/>
-          </a:prstGeom>
-          <a:noFill/>
-        </p:spPr>
-        <p:txBody>
-          <a:bodyPr wrap="square">
-            <a:spAutoFit/>
-          </a:bodyPr>
-          <a:lstStyle/>
-          <a:p>
-            <a:pPr>
-              <a:lnSpc>
-                <a:spcPct val="130000"/>
-              </a:lnSpc>
-              <a:spcAft>
-                <a:spcPts val="600"/>
-              </a:spcAft>
-            </a:pPr>
-            <a:r>
-              <a:rPr sz="2000" b="0">
+                <a:latin typeface="Segoe UI Semibold"/>
+              </a:rPr>
+              <a:t>Phase 2: local data, sharper matching, proof.</a:t>
+            </a:r>
+          </a:p>
+        </p:txBody>
+      </p:sp>
+      <p:sp>
+        <p:nvSpPr>
+          <p:cNvPr id="5" name="TextBox 4"/>
+          <p:cNvSpPr txBox="1"/>
+          <p:nvPr/>
+        </p:nvSpPr>
+        <p:spPr>
+          <a:xfrm>
+            <a:off x="777240" y="2331720"/>
+            <a:ext cx="4023360" cy="274320"/>
+          </a:xfrm>
+          <a:prstGeom prst="rect">
+            <a:avLst/>
+          </a:prstGeom>
+          <a:noFill/>
+        </p:spPr>
+        <p:txBody>
+          <a:bodyPr wrap="square" anchor="t">
+            <a:spAutoFit/>
+          </a:bodyPr>
+          <a:lstStyle/>
+          <a:p>
+            <a:pPr algn="l">
+              <a:lnSpc>
+                <a:spcPct val="125000"/>
+              </a:lnSpc>
+              <a:spcAft>
+                <a:spcPts val="800"/>
+              </a:spcAft>
+            </a:pPr>
+            <a:r>
+              <a:rPr sz="1300" b="1">
+                <a:solidFill>
+                  <a:srgbClr val="D98E77"/>
+                </a:solidFill>
+                <a:latin typeface="Segoe UI Semibold"/>
+              </a:rPr>
+              <a:t>Malaysian demand data</a:t>
+            </a:r>
+          </a:p>
+        </p:txBody>
+      </p:sp>
+      <p:sp>
+        <p:nvSpPr>
+          <p:cNvPr id="6" name="TextBox 5"/>
+          <p:cNvSpPr txBox="1"/>
+          <p:nvPr/>
+        </p:nvSpPr>
+        <p:spPr>
+          <a:xfrm>
+            <a:off x="4983480" y="2304288"/>
+            <a:ext cx="6217920" cy="457200"/>
+          </a:xfrm>
+          <a:prstGeom prst="rect">
+            <a:avLst/>
+          </a:prstGeom>
+          <a:noFill/>
+        </p:spPr>
+        <p:txBody>
+          <a:bodyPr wrap="square" anchor="t">
+            <a:spAutoFit/>
+          </a:bodyPr>
+          <a:lstStyle/>
+          <a:p>
+            <a:pPr algn="l">
+              <a:lnSpc>
+                <a:spcPct val="125000"/>
+              </a:lnSpc>
+              <a:spcAft>
+                <a:spcPts val="800"/>
+              </a:spcAft>
+            </a:pPr>
+            <a:r>
+              <a:rPr sz="1100" b="0">
                 <a:solidFill>
                   <a:srgbClr val="F6F2EA"/>
                 </a:solidFill>
-                <a:latin typeface="Arial"/>
-              </a:rPr>
-              <a:t>A privacy-first career-transition planner: from “who I am today”</a:t>
-            </a:r>
-            <a:br/>
-            <a:r>
-              <a:rPr sz="2000" b="0">
+                <a:latin typeface="Segoe UI"/>
+              </a:rPr>
+              <a:t>DOSM and local postings, so ranking reflects the country rather than a global feed.</a:t>
+            </a:r>
+          </a:p>
+        </p:txBody>
+      </p:sp>
+      <p:sp>
+        <p:nvSpPr>
+          <p:cNvPr id="7" name="TextBox 6"/>
+          <p:cNvSpPr txBox="1"/>
+          <p:nvPr/>
+        </p:nvSpPr>
+        <p:spPr>
+          <a:xfrm>
+            <a:off x="777240" y="3108960"/>
+            <a:ext cx="4023360" cy="274320"/>
+          </a:xfrm>
+          <a:prstGeom prst="rect">
+            <a:avLst/>
+          </a:prstGeom>
+          <a:noFill/>
+        </p:spPr>
+        <p:txBody>
+          <a:bodyPr wrap="square" anchor="t">
+            <a:spAutoFit/>
+          </a:bodyPr>
+          <a:lstStyle/>
+          <a:p>
+            <a:pPr algn="l">
+              <a:lnSpc>
+                <a:spcPct val="125000"/>
+              </a:lnSpc>
+              <a:spcAft>
+                <a:spcPts val="800"/>
+              </a:spcAft>
+            </a:pPr>
+            <a:r>
+              <a:rPr sz="1300" b="1">
+                <a:solidFill>
+                  <a:srgbClr val="D98E77"/>
+                </a:solidFill>
+                <a:latin typeface="Segoe UI Semibold"/>
+              </a:rPr>
+              <a:t>Semantic skill matching</a:t>
+            </a:r>
+          </a:p>
+        </p:txBody>
+      </p:sp>
+      <p:sp>
+        <p:nvSpPr>
+          <p:cNvPr id="8" name="TextBox 7"/>
+          <p:cNvSpPr txBox="1"/>
+          <p:nvPr/>
+        </p:nvSpPr>
+        <p:spPr>
+          <a:xfrm>
+            <a:off x="4983480" y="3081528"/>
+            <a:ext cx="6217920" cy="457200"/>
+          </a:xfrm>
+          <a:prstGeom prst="rect">
+            <a:avLst/>
+          </a:prstGeom>
+          <a:noFill/>
+        </p:spPr>
+        <p:txBody>
+          <a:bodyPr wrap="square" anchor="t">
+            <a:spAutoFit/>
+          </a:bodyPr>
+          <a:lstStyle/>
+          <a:p>
+            <a:pPr algn="l">
+              <a:lnSpc>
+                <a:spcPct val="125000"/>
+              </a:lnSpc>
+              <a:spcAft>
+                <a:spcPts val="800"/>
+              </a:spcAft>
+            </a:pPr>
+            <a:r>
+              <a:rPr sz="1100" b="0">
                 <a:solidFill>
                   <a:srgbClr val="F6F2EA"/>
                 </a:solidFill>
-                <a:latin typeface="Arial"/>
-              </a:rPr>
-              <a:t>to a sourced, sequenced plan for the AI era.</a:t>
-            </a:r>
-          </a:p>
-        </p:txBody>
-      </p:sp>
-      <p:sp>
-        <p:nvSpPr>
-          <p:cNvPr id="5" name="TextBox 4"/>
-          <p:cNvSpPr txBox="1"/>
-          <p:nvPr/>
-        </p:nvSpPr>
-        <p:spPr>
-          <a:xfrm>
-            <a:off x="822960" y="5120640"/>
-            <a:ext cx="10058400" cy="822960"/>
-          </a:xfrm>
-          <a:prstGeom prst="rect">
-            <a:avLst/>
-          </a:prstGeom>
-          <a:noFill/>
-        </p:spPr>
-        <p:txBody>
-          <a:bodyPr wrap="square">
-            <a:spAutoFit/>
-          </a:bodyPr>
-          <a:lstStyle/>
-          <a:p>
-            <a:pPr>
-              <a:lnSpc>
-                <a:spcPct val="130000"/>
-              </a:lnSpc>
-              <a:spcAft>
-                <a:spcPts val="600"/>
-              </a:spcAft>
-            </a:pPr>
-            <a:r>
-              <a:rPr sz="1300" b="0">
+                <a:latin typeface="Segoe UI"/>
+              </a:rPr>
+              <a:t>Embeddings instead of lexical overlap — the weakest part of the current engine.</a:t>
+            </a:r>
+          </a:p>
+        </p:txBody>
+      </p:sp>
+      <p:sp>
+        <p:nvSpPr>
+          <p:cNvPr id="9" name="TextBox 8"/>
+          <p:cNvSpPr txBox="1"/>
+          <p:nvPr/>
+        </p:nvSpPr>
+        <p:spPr>
+          <a:xfrm>
+            <a:off x="777240" y="3886200"/>
+            <a:ext cx="4023360" cy="274320"/>
+          </a:xfrm>
+          <a:prstGeom prst="rect">
+            <a:avLst/>
+          </a:prstGeom>
+          <a:noFill/>
+        </p:spPr>
+        <p:txBody>
+          <a:bodyPr wrap="square" anchor="t">
+            <a:spAutoFit/>
+          </a:bodyPr>
+          <a:lstStyle/>
+          <a:p>
+            <a:pPr algn="l">
+              <a:lnSpc>
+                <a:spcPct val="125000"/>
+              </a:lnSpc>
+              <a:spcAft>
+                <a:spcPts val="800"/>
+              </a:spcAft>
+            </a:pPr>
+            <a:r>
+              <a:rPr sz="1300" b="1">
                 <a:solidFill>
                   <a:srgbClr val="D98E77"/>
                 </a:solidFill>
-                <a:latin typeface="Arial"/>
-              </a:rPr>
-              <a:t>overinfinity  ·  Ahmad Adam Hakimi bin Naeman  ·  IIUM</a:t>
-            </a:r>
-          </a:p>
-          <a:p>
-            <a:pPr>
-              <a:lnSpc>
-                <a:spcPct val="130000"/>
-              </a:lnSpc>
-              <a:spcAft>
-                <a:spcPts val="600"/>
-              </a:spcAft>
-            </a:pPr>
-            <a:r>
-              <a:rPr sz="1300" b="0">
+                <a:latin typeface="Segoe UI Semibold"/>
+              </a:rPr>
+              <a:t>Counsellor view</a:t>
+            </a:r>
+          </a:p>
+        </p:txBody>
+      </p:sp>
+      <p:sp>
+        <p:nvSpPr>
+          <p:cNvPr id="10" name="TextBox 9"/>
+          <p:cNvSpPr txBox="1"/>
+          <p:nvPr/>
+        </p:nvSpPr>
+        <p:spPr>
+          <a:xfrm>
+            <a:off x="4983480" y="3858768"/>
+            <a:ext cx="6217920" cy="457200"/>
+          </a:xfrm>
+          <a:prstGeom prst="rect">
+            <a:avLst/>
+          </a:prstGeom>
+          <a:noFill/>
+        </p:spPr>
+        <p:txBody>
+          <a:bodyPr wrap="square" anchor="t">
+            <a:spAutoFit/>
+          </a:bodyPr>
+          <a:lstStyle/>
+          <a:p>
+            <a:pPr algn="l">
+              <a:lnSpc>
+                <a:spcPct val="125000"/>
+              </a:lnSpc>
+              <a:spcAft>
+                <a:spcPts val="800"/>
+              </a:spcAft>
+            </a:pPr>
+            <a:r>
+              <a:rPr sz="1100" b="0">
+                <a:solidFill>
+                  <a:srgbClr val="F6F2EA"/>
+                </a:solidFill>
+                <a:latin typeface="Segoe UI"/>
+              </a:rPr>
+              <a:t>Cohort gaps and shared plans for TVET and university advisers.</a:t>
+            </a:r>
+          </a:p>
+        </p:txBody>
+      </p:sp>
+      <p:sp>
+        <p:nvSpPr>
+          <p:cNvPr id="11" name="TextBox 10"/>
+          <p:cNvSpPr txBox="1"/>
+          <p:nvPr/>
+        </p:nvSpPr>
+        <p:spPr>
+          <a:xfrm>
+            <a:off x="777240" y="4663440"/>
+            <a:ext cx="4023360" cy="274320"/>
+          </a:xfrm>
+          <a:prstGeom prst="rect">
+            <a:avLst/>
+          </a:prstGeom>
+          <a:noFill/>
+        </p:spPr>
+        <p:txBody>
+          <a:bodyPr wrap="square" anchor="t">
+            <a:spAutoFit/>
+          </a:bodyPr>
+          <a:lstStyle/>
+          <a:p>
+            <a:pPr algn="l">
+              <a:lnSpc>
+                <a:spcPct val="125000"/>
+              </a:lnSpc>
+              <a:spcAft>
+                <a:spcPts val="800"/>
+              </a:spcAft>
+            </a:pPr>
+            <a:r>
+              <a:rPr sz="1300" b="1">
                 <a:solidFill>
                   <a:srgbClr val="D98E77"/>
                 </a:solidFill>
-                <a:latin typeface="Arial"/>
-              </a:rPr>
-              <a:t>Live prototype: aura-workforce.replit.app</a:t>
+                <a:latin typeface="Segoe UI Semibold"/>
+              </a:rPr>
+              <a:t>Self-hosted model</a:t>
+            </a:r>
+          </a:p>
+        </p:txBody>
+      </p:sp>
+      <p:sp>
+        <p:nvSpPr>
+          <p:cNvPr id="12" name="TextBox 11"/>
+          <p:cNvSpPr txBox="1"/>
+          <p:nvPr/>
+        </p:nvSpPr>
+        <p:spPr>
+          <a:xfrm>
+            <a:off x="4983480" y="4636008"/>
+            <a:ext cx="6217920" cy="457200"/>
+          </a:xfrm>
+          <a:prstGeom prst="rect">
+            <a:avLst/>
+          </a:prstGeom>
+          <a:noFill/>
+        </p:spPr>
+        <p:txBody>
+          <a:bodyPr wrap="square" anchor="t">
+            <a:spAutoFit/>
+          </a:bodyPr>
+          <a:lstStyle/>
+          <a:p>
+            <a:pPr algn="l">
+              <a:lnSpc>
+                <a:spcPct val="125000"/>
+              </a:lnSpc>
+              <a:spcAft>
+                <a:spcPts val="800"/>
+              </a:spcAft>
+            </a:pPr>
+            <a:r>
+              <a:rPr sz="1100" b="0">
+                <a:solidFill>
+                  <a:srgbClr val="F6F2EA"/>
+                </a:solidFill>
+                <a:latin typeface="Segoe UI"/>
+              </a:rPr>
+              <a:t>RunPod credit already allocated; the client is OpenAI-compatible.</a:t>
+            </a:r>
+          </a:p>
+        </p:txBody>
+      </p:sp>
+      <p:sp>
+        <p:nvSpPr>
+          <p:cNvPr id="13" name="Rectangle 12"/>
+          <p:cNvSpPr/>
+          <p:nvPr/>
+        </p:nvSpPr>
+        <p:spPr>
+          <a:xfrm>
+            <a:off x="777240" y="5623560"/>
+            <a:ext cx="10607040" cy="12700"/>
+          </a:xfrm>
+          <a:prstGeom prst="rect">
+            <a:avLst/>
+          </a:prstGeom>
+          <a:solidFill>
+            <a:srgbClr val="3A5551"/>
+          </a:solidFill>
+          <a:ln>
+            <a:noFill/>
+          </a:ln>
+        </p:spPr>
+        <p:style>
+          <a:lnRef idx="1">
+            <a:schemeClr val="accent1"/>
+          </a:lnRef>
+          <a:fillRef idx="3">
+            <a:schemeClr val="accent1"/>
+          </a:fillRef>
+          <a:effectRef idx="2">
+            <a:schemeClr val="accent1"/>
+          </a:effectRef>
+          <a:fontRef idx="minor">
+            <a:schemeClr val="lt1"/>
+          </a:fontRef>
+        </p:style>
+        <p:txBody>
+          <a:bodyPr rtlCol="0" anchor="ctr"/>
+          <a:lstStyle/>
+          <a:p>
+            <a:pPr algn="ctr"/>
+          </a:p>
+        </p:txBody>
+      </p:sp>
+      <p:sp>
+        <p:nvSpPr>
+          <p:cNvPr id="14" name="TextBox 13"/>
+          <p:cNvSpPr txBox="1"/>
+          <p:nvPr/>
+        </p:nvSpPr>
+        <p:spPr>
+          <a:xfrm>
+            <a:off x="777240" y="5806440"/>
+            <a:ext cx="10424160" cy="457200"/>
+          </a:xfrm>
+          <a:prstGeom prst="rect">
+            <a:avLst/>
+          </a:prstGeom>
+          <a:noFill/>
+        </p:spPr>
+        <p:txBody>
+          <a:bodyPr wrap="square" anchor="t">
+            <a:spAutoFit/>
+          </a:bodyPr>
+          <a:lstStyle/>
+          <a:p>
+            <a:pPr algn="l">
+              <a:lnSpc>
+                <a:spcPct val="125000"/>
+              </a:lnSpc>
+              <a:spcAft>
+                <a:spcPts val="800"/>
+              </a:spcAft>
+            </a:pPr>
+            <a:r>
+              <a:rPr sz="1150" b="0">
+                <a:solidFill>
+                  <a:srgbClr val="F6F2EA"/>
+                </a:solidFill>
+                <a:latin typeface="Segoe UI"/>
+              </a:rPr>
+              <a:t>overinfinity  ·  Ahmad Adam Hakimi bin Naeman  ·  IIUM  ·  SDC 2026, Domain 1</a:t>
+            </a:r>
+          </a:p>
+        </p:txBody>
+      </p:sp>
+      <p:sp>
+        <p:nvSpPr>
+          <p:cNvPr id="15" name="TextBox 14"/>
+          <p:cNvSpPr txBox="1"/>
+          <p:nvPr/>
+        </p:nvSpPr>
+        <p:spPr>
+          <a:xfrm>
+            <a:off x="10591495" y="6263640"/>
+            <a:ext cx="822960" cy="274320"/>
+          </a:xfrm>
+          <a:prstGeom prst="rect">
+            <a:avLst/>
+          </a:prstGeom>
+          <a:noFill/>
+        </p:spPr>
+        <p:txBody>
+          <a:bodyPr wrap="square" anchor="t">
+            <a:spAutoFit/>
+          </a:bodyPr>
+          <a:lstStyle/>
+          <a:p>
+            <a:pPr algn="r">
+              <a:lnSpc>
+                <a:spcPct val="125000"/>
+              </a:lnSpc>
+              <a:spcAft>
+                <a:spcPts val="800"/>
+              </a:spcAft>
+            </a:pPr>
+            <a:r>
+              <a:rPr sz="900" b="0">
+                <a:solidFill>
+                  <a:srgbClr val="9AB0AB"/>
+                </a:solidFill>
+                <a:latin typeface="Segoe UI"/>
+              </a:rPr>
+              <a:t>12 / 12</a:t>
             </a:r>
           </a:p>
         </p:txBody>
@@ -3329,56 +5476,14 @@
       <p:grpSpPr/>
       <p:sp>
         <p:nvSpPr>
-          <p:cNvPr id="2" name="TextBox 1"/>
-          <p:cNvSpPr txBox="1"/>
-          <p:nvPr/>
-        </p:nvSpPr>
-        <p:spPr>
-          <a:xfrm>
-            <a:off x="822960" y="502920"/>
-            <a:ext cx="8229600" cy="274320"/>
-          </a:xfrm>
-          <a:prstGeom prst="rect">
-            <a:avLst/>
-          </a:prstGeom>
-          <a:noFill/>
-        </p:spPr>
-        <p:txBody>
-          <a:bodyPr wrap="square">
-            <a:spAutoFit/>
-          </a:bodyPr>
-          <a:lstStyle/>
-          <a:p>
-            <a:pPr>
-              <a:lnSpc>
-                <a:spcPct val="115000"/>
-              </a:lnSpc>
-              <a:spcAft>
-                <a:spcPts val="600"/>
-              </a:spcAft>
-            </a:pPr>
-            <a:r>
-              <a:rPr sz="1100" b="1">
-                <a:solidFill>
-                  <a:srgbClr val="5B6B67"/>
-                </a:solidFill>
-                <a:latin typeface="Arial"/>
-              </a:rPr>
-              <a:t>THE PROBLEM</a:t>
-            </a:r>
-          </a:p>
-        </p:txBody>
-      </p:sp>
-      <p:sp>
-        <p:nvSpPr>
-          <p:cNvPr id="3" name="Rectangle 2"/>
+          <p:cNvPr id="2" name="Rectangle 1"/>
           <p:cNvSpPr/>
           <p:nvPr/>
         </p:nvSpPr>
         <p:spPr>
           <a:xfrm>
-            <a:off x="822960" y="822960"/>
-            <a:ext cx="1005840" cy="45720"/>
+            <a:off x="777240" y="566928"/>
+            <a:ext cx="310896" cy="31750"/>
           </a:xfrm>
           <a:prstGeom prst="rect">
             <a:avLst/>
@@ -3414,32 +5519,183 @@
       </p:sp>
       <p:sp>
         <p:nvSpPr>
+          <p:cNvPr id="3" name="TextBox 2"/>
+          <p:cNvSpPr txBox="1"/>
+          <p:nvPr/>
+        </p:nvSpPr>
+        <p:spPr>
+          <a:xfrm>
+            <a:off x="1234440" y="457200"/>
+            <a:ext cx="8229600" cy="274320"/>
+          </a:xfrm>
+          <a:prstGeom prst="rect">
+            <a:avLst/>
+          </a:prstGeom>
+          <a:noFill/>
+        </p:spPr>
+        <p:txBody>
+          <a:bodyPr wrap="square" anchor="t">
+            <a:spAutoFit/>
+          </a:bodyPr>
+          <a:lstStyle/>
+          <a:p>
+            <a:pPr algn="l">
+              <a:lnSpc>
+                <a:spcPct val="125000"/>
+              </a:lnSpc>
+              <a:spcAft>
+                <a:spcPts val="800"/>
+              </a:spcAft>
+            </a:pPr>
+            <a:r>
+              <a:rPr sz="1050" b="1">
+                <a:solidFill>
+                  <a:srgbClr val="5B6B63"/>
+                </a:solidFill>
+                <a:latin typeface="Segoe UI Semibold"/>
+              </a:rPr>
+              <a:t>THE PROBLEM</a:t>
+            </a:r>
+          </a:p>
+        </p:txBody>
+      </p:sp>
+      <p:sp>
+        <p:nvSpPr>
           <p:cNvPr id="4" name="TextBox 3"/>
           <p:cNvSpPr txBox="1"/>
           <p:nvPr/>
         </p:nvSpPr>
         <p:spPr>
           <a:xfrm>
-            <a:off x="822960" y="960120"/>
-            <a:ext cx="10515600" cy="1463040"/>
-          </a:xfrm>
-          <a:prstGeom prst="rect">
-            <a:avLst/>
-          </a:prstGeom>
-          <a:noFill/>
-        </p:spPr>
-        <p:txBody>
-          <a:bodyPr wrap="square">
-            <a:spAutoFit/>
-          </a:bodyPr>
-          <a:lstStyle/>
-          <a:p>
-            <a:pPr>
-              <a:lnSpc>
-                <a:spcPct val="115000"/>
-              </a:lnSpc>
-              <a:spcAft>
-                <a:spcPts val="600"/>
+            <a:off x="777240" y="960120"/>
+            <a:ext cx="9692640" cy="1554480"/>
+          </a:xfrm>
+          <a:prstGeom prst="rect">
+            <a:avLst/>
+          </a:prstGeom>
+          <a:noFill/>
+        </p:spPr>
+        <p:txBody>
+          <a:bodyPr wrap="square" anchor="t">
+            <a:spAutoFit/>
+          </a:bodyPr>
+          <a:lstStyle/>
+          <a:p>
+            <a:pPr algn="l">
+              <a:lnSpc>
+                <a:spcPct val="105000"/>
+              </a:lnSpc>
+              <a:spcAft>
+                <a:spcPts val="800"/>
+              </a:spcAft>
+            </a:pPr>
+            <a:r>
+              <a:rPr sz="4000" b="1">
+                <a:solidFill>
+                  <a:srgbClr val="1F3A37"/>
+                </a:solidFill>
+                <a:latin typeface="Segoe UI Semibold"/>
+              </a:rPr>
+              <a:t>Workers are told to reskill,</a:t>
+            </a:r>
+          </a:p>
+          <a:p>
+            <a:pPr algn="l">
+              <a:lnSpc>
+                <a:spcPct val="105000"/>
+              </a:lnSpc>
+              <a:spcAft>
+                <a:spcPts val="800"/>
+              </a:spcAft>
+            </a:pPr>
+            <a:r>
+              <a:rPr sz="4000" b="1">
+                <a:solidFill>
+                  <a:srgbClr val="1F3A37"/>
+                </a:solidFill>
+                <a:latin typeface="Segoe UI Semibold"/>
+              </a:rPr>
+              <a:t>but not what to do on Monday.</a:t>
+            </a:r>
+          </a:p>
+        </p:txBody>
+      </p:sp>
+      <p:sp>
+        <p:nvSpPr>
+          <p:cNvPr id="5" name="Rounded Rectangle 4"/>
+          <p:cNvSpPr/>
+          <p:nvPr/>
+        </p:nvSpPr>
+        <p:spPr>
+          <a:xfrm>
+            <a:off x="777240" y="2697480"/>
+            <a:ext cx="3246120" cy="2148840"/>
+          </a:xfrm>
+          <a:prstGeom prst="roundRect">
+            <a:avLst>
+              <a:gd name="adj" fmla="val 14000"/>
+            </a:avLst>
+          </a:prstGeom>
+          <a:solidFill>
+            <a:srgbClr val="FFFFFF"/>
+          </a:solidFill>
+          <a:ln w="12700">
+            <a:solidFill>
+              <a:srgbClr val="D8D0C2"/>
+            </a:solidFill>
+          </a:ln>
+          <a:effectLst/>
+        </p:spPr>
+        <p:style>
+          <a:lnRef idx="1">
+            <a:schemeClr val="accent1"/>
+          </a:lnRef>
+          <a:fillRef idx="3">
+            <a:schemeClr val="accent1"/>
+          </a:fillRef>
+          <a:effectRef idx="2">
+            <a:schemeClr val="accent1"/>
+          </a:effectRef>
+          <a:fontRef idx="minor">
+            <a:schemeClr val="lt1"/>
+          </a:fontRef>
+        </p:style>
+        <p:txBody>
+          <a:bodyPr rtlCol="0" anchor="ctr"/>
+          <a:lstStyle/>
+          <a:p>
+            <a:pPr algn="ctr"/>
+          </a:p>
+        </p:txBody>
+      </p:sp>
+      <p:sp>
+        <p:nvSpPr>
+          <p:cNvPr id="6" name="TextBox 5"/>
+          <p:cNvSpPr txBox="1"/>
+          <p:nvPr/>
+        </p:nvSpPr>
+        <p:spPr>
+          <a:xfrm>
+            <a:off x="1033272" y="2852928"/>
+            <a:ext cx="2743200" cy="640080"/>
+          </a:xfrm>
+          <a:prstGeom prst="rect">
+            <a:avLst/>
+          </a:prstGeom>
+          <a:noFill/>
+        </p:spPr>
+        <p:txBody>
+          <a:bodyPr wrap="square" anchor="t">
+            <a:spAutoFit/>
+          </a:bodyPr>
+          <a:lstStyle/>
+          <a:p>
+            <a:pPr algn="l">
+              <a:lnSpc>
+                <a:spcPct val="125000"/>
+              </a:lnSpc>
+              <a:spcAft>
+                <a:spcPts val="800"/>
               </a:spcAft>
             </a:pPr>
             <a:r>
@@ -3447,169 +5703,567 @@
                 <a:solidFill>
                   <a:srgbClr val="1F3A37"/>
                 </a:solidFill>
-                <a:latin typeface="Arial"/>
-              </a:rPr>
-              <a:t>Workers are told to reskill, but not what to do on Monday.</a:t>
-            </a:r>
-          </a:p>
-        </p:txBody>
-      </p:sp>
-      <p:sp>
-        <p:nvSpPr>
-          <p:cNvPr id="5" name="TextBox 4"/>
-          <p:cNvSpPr txBox="1"/>
-          <p:nvPr/>
-        </p:nvSpPr>
-        <p:spPr>
-          <a:xfrm>
-            <a:off x="822960" y="2743200"/>
-            <a:ext cx="10515600" cy="3840480"/>
-          </a:xfrm>
-          <a:prstGeom prst="rect">
-            <a:avLst/>
-          </a:prstGeom>
-          <a:noFill/>
-        </p:spPr>
-        <p:txBody>
-          <a:bodyPr wrap="square">
-            <a:spAutoFit/>
-          </a:bodyPr>
-          <a:lstStyle/>
-          <a:p>
-            <a:pPr>
+                <a:latin typeface="Segoe UI Semibold"/>
+              </a:rPr>
+              <a:t>56%</a:t>
+            </a:r>
+          </a:p>
+        </p:txBody>
+      </p:sp>
+      <p:sp>
+        <p:nvSpPr>
+          <p:cNvPr id="7" name="TextBox 6"/>
+          <p:cNvSpPr txBox="1"/>
+          <p:nvPr/>
+        </p:nvSpPr>
+        <p:spPr>
+          <a:xfrm>
+            <a:off x="1033272" y="3520440"/>
+            <a:ext cx="2743200" cy="1005840"/>
+          </a:xfrm>
+          <a:prstGeom prst="rect">
+            <a:avLst/>
+          </a:prstGeom>
+          <a:noFill/>
+        </p:spPr>
+        <p:txBody>
+          <a:bodyPr wrap="square" anchor="t">
+            <a:spAutoFit/>
+          </a:bodyPr>
+          <a:lstStyle/>
+          <a:p>
+            <a:pPr algn="l">
+              <a:lnSpc>
+                <a:spcPct val="125000"/>
+              </a:lnSpc>
+              <a:spcAft>
+                <a:spcPts val="800"/>
+              </a:spcAft>
+            </a:pPr>
+            <a:r>
+              <a:rPr sz="1100" b="0">
+                <a:solidFill>
+                  <a:srgbClr val="5B6B63"/>
+                </a:solidFill>
+                <a:latin typeface="Segoe UI"/>
+              </a:rPr>
+              <a:t>of Malaysian professionals already use AI at work — only 26% have had formal training.</a:t>
+            </a:r>
+          </a:p>
+        </p:txBody>
+      </p:sp>
+      <p:sp>
+        <p:nvSpPr>
+          <p:cNvPr id="8" name="TextBox 7"/>
+          <p:cNvSpPr txBox="1"/>
+          <p:nvPr/>
+        </p:nvSpPr>
+        <p:spPr>
+          <a:xfrm>
+            <a:off x="1033272" y="4434840"/>
+            <a:ext cx="2743200" cy="274320"/>
+          </a:xfrm>
+          <a:prstGeom prst="rect">
+            <a:avLst/>
+          </a:prstGeom>
+          <a:noFill/>
+        </p:spPr>
+        <p:txBody>
+          <a:bodyPr wrap="square" anchor="t">
+            <a:spAutoFit/>
+          </a:bodyPr>
+          <a:lstStyle/>
+          <a:p>
+            <a:pPr algn="l">
+              <a:lnSpc>
+                <a:spcPct val="125000"/>
+              </a:lnSpc>
+              <a:spcAft>
+                <a:spcPts val="800"/>
+              </a:spcAft>
+            </a:pPr>
+            <a:r>
+              <a:rPr sz="850" b="1">
+                <a:solidFill>
+                  <a:srgbClr val="D98E77"/>
+                </a:solidFill>
+                <a:latin typeface="Segoe UI Semibold"/>
+              </a:rPr>
+              <a:t>Hays Asia Salary Guide 2025</a:t>
+            </a:r>
+          </a:p>
+        </p:txBody>
+      </p:sp>
+      <p:sp>
+        <p:nvSpPr>
+          <p:cNvPr id="9" name="Rounded Rectangle 8"/>
+          <p:cNvSpPr/>
+          <p:nvPr/>
+        </p:nvSpPr>
+        <p:spPr>
+          <a:xfrm>
+            <a:off x="4178808" y="2697480"/>
+            <a:ext cx="3246120" cy="2148840"/>
+          </a:xfrm>
+          <a:prstGeom prst="roundRect">
+            <a:avLst>
+              <a:gd name="adj" fmla="val 14000"/>
+            </a:avLst>
+          </a:prstGeom>
+          <a:solidFill>
+            <a:srgbClr val="FFFFFF"/>
+          </a:solidFill>
+          <a:ln w="12700">
+            <a:solidFill>
+              <a:srgbClr val="D8D0C2"/>
+            </a:solidFill>
+          </a:ln>
+          <a:effectLst/>
+        </p:spPr>
+        <p:style>
+          <a:lnRef idx="1">
+            <a:schemeClr val="accent1"/>
+          </a:lnRef>
+          <a:fillRef idx="3">
+            <a:schemeClr val="accent1"/>
+          </a:fillRef>
+          <a:effectRef idx="2">
+            <a:schemeClr val="accent1"/>
+          </a:effectRef>
+          <a:fontRef idx="minor">
+            <a:schemeClr val="lt1"/>
+          </a:fontRef>
+        </p:style>
+        <p:txBody>
+          <a:bodyPr rtlCol="0" anchor="ctr"/>
+          <a:lstStyle/>
+          <a:p>
+            <a:pPr algn="ctr"/>
+          </a:p>
+        </p:txBody>
+      </p:sp>
+      <p:sp>
+        <p:nvSpPr>
+          <p:cNvPr id="10" name="TextBox 9"/>
+          <p:cNvSpPr txBox="1"/>
+          <p:nvPr/>
+        </p:nvSpPr>
+        <p:spPr>
+          <a:xfrm>
+            <a:off x="4434840" y="2852928"/>
+            <a:ext cx="2743200" cy="640080"/>
+          </a:xfrm>
+          <a:prstGeom prst="rect">
+            <a:avLst/>
+          </a:prstGeom>
+          <a:noFill/>
+        </p:spPr>
+        <p:txBody>
+          <a:bodyPr wrap="square" anchor="t">
+            <a:spAutoFit/>
+          </a:bodyPr>
+          <a:lstStyle/>
+          <a:p>
+            <a:pPr algn="l">
+              <a:lnSpc>
+                <a:spcPct val="125000"/>
+              </a:lnSpc>
+              <a:spcAft>
+                <a:spcPts val="800"/>
+              </a:spcAft>
+            </a:pPr>
+            <a:r>
+              <a:rPr sz="3400" b="1">
+                <a:solidFill>
+                  <a:srgbClr val="1F3A37"/>
+                </a:solidFill>
+                <a:latin typeface="Segoe UI Semibold"/>
+              </a:rPr>
+              <a:t>600,000+</a:t>
+            </a:r>
+          </a:p>
+        </p:txBody>
+      </p:sp>
+      <p:sp>
+        <p:nvSpPr>
+          <p:cNvPr id="11" name="TextBox 10"/>
+          <p:cNvSpPr txBox="1"/>
+          <p:nvPr/>
+        </p:nvSpPr>
+        <p:spPr>
+          <a:xfrm>
+            <a:off x="4434840" y="3520440"/>
+            <a:ext cx="2743200" cy="1005840"/>
+          </a:xfrm>
+          <a:prstGeom prst="rect">
+            <a:avLst/>
+          </a:prstGeom>
+          <a:noFill/>
+        </p:spPr>
+        <p:txBody>
+          <a:bodyPr wrap="square" anchor="t">
+            <a:spAutoFit/>
+          </a:bodyPr>
+          <a:lstStyle/>
+          <a:p>
+            <a:pPr algn="l">
+              <a:lnSpc>
+                <a:spcPct val="125000"/>
+              </a:lnSpc>
+              <a:spcAft>
+                <a:spcPts val="800"/>
+              </a:spcAft>
+            </a:pPr>
+            <a:r>
+              <a:rPr sz="1100" b="0">
+                <a:solidFill>
+                  <a:srgbClr val="5B6B63"/>
+                </a:solidFill>
+                <a:latin typeface="Segoe UI"/>
+              </a:rPr>
+              <a:t>workers projected to need reskilling within three to five years.</a:t>
+            </a:r>
+          </a:p>
+        </p:txBody>
+      </p:sp>
+      <p:sp>
+        <p:nvSpPr>
+          <p:cNvPr id="12" name="TextBox 11"/>
+          <p:cNvSpPr txBox="1"/>
+          <p:nvPr/>
+        </p:nvSpPr>
+        <p:spPr>
+          <a:xfrm>
+            <a:off x="4434840" y="4434840"/>
+            <a:ext cx="2743200" cy="274320"/>
+          </a:xfrm>
+          <a:prstGeom prst="rect">
+            <a:avLst/>
+          </a:prstGeom>
+          <a:noFill/>
+        </p:spPr>
+        <p:txBody>
+          <a:bodyPr wrap="square" anchor="t">
+            <a:spAutoFit/>
+          </a:bodyPr>
+          <a:lstStyle/>
+          <a:p>
+            <a:pPr algn="l">
+              <a:lnSpc>
+                <a:spcPct val="125000"/>
+              </a:lnSpc>
+              <a:spcAft>
+                <a:spcPts val="800"/>
+              </a:spcAft>
+            </a:pPr>
+            <a:r>
+              <a:rPr sz="850" b="1">
+                <a:solidFill>
+                  <a:srgbClr val="D98E77"/>
+                </a:solidFill>
+                <a:latin typeface="Segoe UI Semibold"/>
+              </a:rPr>
+              <a:t>MOSTI</a:t>
+            </a:r>
+          </a:p>
+        </p:txBody>
+      </p:sp>
+      <p:sp>
+        <p:nvSpPr>
+          <p:cNvPr id="13" name="Rounded Rectangle 12"/>
+          <p:cNvSpPr/>
+          <p:nvPr/>
+        </p:nvSpPr>
+        <p:spPr>
+          <a:xfrm>
+            <a:off x="7580376" y="2697480"/>
+            <a:ext cx="3246120" cy="2148840"/>
+          </a:xfrm>
+          <a:prstGeom prst="roundRect">
+            <a:avLst>
+              <a:gd name="adj" fmla="val 14000"/>
+            </a:avLst>
+          </a:prstGeom>
+          <a:solidFill>
+            <a:srgbClr val="FFFFFF"/>
+          </a:solidFill>
+          <a:ln w="12700">
+            <a:solidFill>
+              <a:srgbClr val="D8D0C2"/>
+            </a:solidFill>
+          </a:ln>
+          <a:effectLst/>
+        </p:spPr>
+        <p:style>
+          <a:lnRef idx="1">
+            <a:schemeClr val="accent1"/>
+          </a:lnRef>
+          <a:fillRef idx="3">
+            <a:schemeClr val="accent1"/>
+          </a:fillRef>
+          <a:effectRef idx="2">
+            <a:schemeClr val="accent1"/>
+          </a:effectRef>
+          <a:fontRef idx="minor">
+            <a:schemeClr val="lt1"/>
+          </a:fontRef>
+        </p:style>
+        <p:txBody>
+          <a:bodyPr rtlCol="0" anchor="ctr"/>
+          <a:lstStyle/>
+          <a:p>
+            <a:pPr algn="ctr"/>
+          </a:p>
+        </p:txBody>
+      </p:sp>
+      <p:sp>
+        <p:nvSpPr>
+          <p:cNvPr id="14" name="TextBox 13"/>
+          <p:cNvSpPr txBox="1"/>
+          <p:nvPr/>
+        </p:nvSpPr>
+        <p:spPr>
+          <a:xfrm>
+            <a:off x="7836408" y="2852928"/>
+            <a:ext cx="2743200" cy="640080"/>
+          </a:xfrm>
+          <a:prstGeom prst="rect">
+            <a:avLst/>
+          </a:prstGeom>
+          <a:noFill/>
+        </p:spPr>
+        <p:txBody>
+          <a:bodyPr wrap="square" anchor="t">
+            <a:spAutoFit/>
+          </a:bodyPr>
+          <a:lstStyle/>
+          <a:p>
+            <a:pPr algn="l">
+              <a:lnSpc>
+                <a:spcPct val="125000"/>
+              </a:lnSpc>
+              <a:spcAft>
+                <a:spcPts val="800"/>
+              </a:spcAft>
+            </a:pPr>
+            <a:r>
+              <a:rPr sz="3400" b="1">
+                <a:solidFill>
+                  <a:srgbClr val="1F3A37"/>
+                </a:solidFill>
+                <a:latin typeface="Segoe UI Semibold"/>
+              </a:rPr>
+              <a:t>39%</a:t>
+            </a:r>
+          </a:p>
+        </p:txBody>
+      </p:sp>
+      <p:sp>
+        <p:nvSpPr>
+          <p:cNvPr id="15" name="TextBox 14"/>
+          <p:cNvSpPr txBox="1"/>
+          <p:nvPr/>
+        </p:nvSpPr>
+        <p:spPr>
+          <a:xfrm>
+            <a:off x="7836408" y="3520440"/>
+            <a:ext cx="2743200" cy="1005840"/>
+          </a:xfrm>
+          <a:prstGeom prst="rect">
+            <a:avLst/>
+          </a:prstGeom>
+          <a:noFill/>
+        </p:spPr>
+        <p:txBody>
+          <a:bodyPr wrap="square" anchor="t">
+            <a:spAutoFit/>
+          </a:bodyPr>
+          <a:lstStyle/>
+          <a:p>
+            <a:pPr algn="l">
+              <a:lnSpc>
+                <a:spcPct val="125000"/>
+              </a:lnSpc>
+              <a:spcAft>
+                <a:spcPts val="800"/>
+              </a:spcAft>
+            </a:pPr>
+            <a:r>
+              <a:rPr sz="1100" b="0">
+                <a:solidFill>
+                  <a:srgbClr val="5B6B63"/>
+                </a:solidFill>
+                <a:latin typeface="Segoe UI"/>
+              </a:rPr>
+              <a:t>of workers' core skills are expected to change by 2030.</a:t>
+            </a:r>
+          </a:p>
+        </p:txBody>
+      </p:sp>
+      <p:sp>
+        <p:nvSpPr>
+          <p:cNvPr id="16" name="TextBox 15"/>
+          <p:cNvSpPr txBox="1"/>
+          <p:nvPr/>
+        </p:nvSpPr>
+        <p:spPr>
+          <a:xfrm>
+            <a:off x="7836408" y="4434840"/>
+            <a:ext cx="2743200" cy="274320"/>
+          </a:xfrm>
+          <a:prstGeom prst="rect">
+            <a:avLst/>
+          </a:prstGeom>
+          <a:noFill/>
+        </p:spPr>
+        <p:txBody>
+          <a:bodyPr wrap="square" anchor="t">
+            <a:spAutoFit/>
+          </a:bodyPr>
+          <a:lstStyle/>
+          <a:p>
+            <a:pPr algn="l">
+              <a:lnSpc>
+                <a:spcPct val="125000"/>
+              </a:lnSpc>
+              <a:spcAft>
+                <a:spcPts val="800"/>
+              </a:spcAft>
+            </a:pPr>
+            <a:r>
+              <a:rPr sz="850" b="1">
+                <a:solidFill>
+                  <a:srgbClr val="D98E77"/>
+                </a:solidFill>
+                <a:latin typeface="Segoe UI Semibold"/>
+              </a:rPr>
+              <a:t>WEF · Future of Jobs 2025</a:t>
+            </a:r>
+          </a:p>
+        </p:txBody>
+      </p:sp>
+      <p:sp>
+        <p:nvSpPr>
+          <p:cNvPr id="17" name="TextBox 16"/>
+          <p:cNvSpPr txBox="1"/>
+          <p:nvPr/>
+        </p:nvSpPr>
+        <p:spPr>
+          <a:xfrm>
+            <a:off x="777240" y="5166360"/>
+            <a:ext cx="10424160" cy="822960"/>
+          </a:xfrm>
+          <a:prstGeom prst="rect">
+            <a:avLst/>
+          </a:prstGeom>
+          <a:noFill/>
+        </p:spPr>
+        <p:txBody>
+          <a:bodyPr wrap="square" anchor="t">
+            <a:spAutoFit/>
+          </a:bodyPr>
+          <a:lstStyle/>
+          <a:p>
+            <a:pPr algn="l">
               <a:lnSpc>
                 <a:spcPct val="130000"/>
               </a:lnSpc>
               <a:spcAft>
-                <a:spcPts val="600"/>
-              </a:spcAft>
-            </a:pPr>
-            <a:r>
-              <a:rPr sz="1700" b="0">
+                <a:spcPts val="800"/>
+              </a:spcAft>
+            </a:pPr>
+            <a:r>
+              <a:rPr sz="1400" b="0">
                 <a:solidFill>
                   <a:srgbClr val="1F3A37"/>
                 </a:solidFill>
-                <a:latin typeface="Arial"/>
-              </a:rPr>
-              <a:t>56% of Malaysian professionals already use AI at work — only 26% have had formal training.  (Hays Asia Salary Guide 2025)</a:t>
-            </a:r>
-          </a:p>
-          <a:p>
-            <a:pPr>
-              <a:lnSpc>
-                <a:spcPct val="130000"/>
-              </a:lnSpc>
-              <a:spcAft>
-                <a:spcPts val="600"/>
-              </a:spcAft>
-            </a:pPr>
-            <a:r>
-              <a:rPr sz="1700" b="0">
-                <a:solidFill>
-                  <a:srgbClr val="1F3A37"/>
-                </a:solidFill>
-                <a:latin typeface="Arial"/>
-              </a:rPr>
-              <a:t>MOSTI projects 600,000+ workers needing reskilling within 3–5 years.</a:t>
-            </a:r>
-          </a:p>
-          <a:p>
-            <a:pPr>
-              <a:lnSpc>
-                <a:spcPct val="130000"/>
-              </a:lnSpc>
-              <a:spcAft>
-                <a:spcPts val="600"/>
-              </a:spcAft>
-            </a:pPr>
-            <a:r>
-              <a:rPr sz="1700" b="0">
-                <a:solidFill>
-                  <a:srgbClr val="1F3A37"/>
-                </a:solidFill>
-                <a:latin typeface="Arial"/>
-              </a:rPr>
-              <a:t>Career advice is generic, static and unsourced: no way to see which roles are rising,</a:t>
-            </a:r>
-          </a:p>
-          <a:p>
-            <a:pPr>
-              <a:lnSpc>
-                <a:spcPct val="130000"/>
-              </a:lnSpc>
-              <a:spcAft>
-                <a:spcPts val="600"/>
-              </a:spcAft>
-            </a:pPr>
-            <a:r>
-              <a:rPr sz="1700" b="0">
-                <a:solidFill>
-                  <a:srgbClr val="1F3A37"/>
-                </a:solidFill>
-                <a:latin typeface="Arial"/>
-              </a:rPr>
-              <a:t>which skills transfer, how long a pathway takes — or where any claim came from.</a:t>
-            </a:r>
-          </a:p>
-          <a:p>
-            <a:pPr>
-              <a:lnSpc>
-                <a:spcPct val="130000"/>
-              </a:lnSpc>
-              <a:spcAft>
-                <a:spcPts val="600"/>
-              </a:spcAft>
-            </a:pPr>
-            <a:r>
-              <a:rPr sz="1700" b="0">
-                <a:solidFill>
-                  <a:srgbClr val="1F3A37"/>
-                </a:solidFill>
-                <a:latin typeface="Arial"/>
-              </a:rPr>
-              <a:t>The cost is paid twice: people buy courses that lead nowhere; employers retrain for roles that are closing.</a:t>
-            </a:r>
-          </a:p>
-        </p:txBody>
-      </p:sp>
-      <p:sp>
-        <p:nvSpPr>
-          <p:cNvPr id="6" name="TextBox 5"/>
-          <p:cNvSpPr txBox="1"/>
-          <p:nvPr/>
-        </p:nvSpPr>
-        <p:spPr>
-          <a:xfrm>
-            <a:off x="822960" y="6263640"/>
-            <a:ext cx="10515600" cy="274320"/>
-          </a:xfrm>
-          <a:prstGeom prst="rect">
-            <a:avLst/>
-          </a:prstGeom>
-          <a:noFill/>
-        </p:spPr>
-        <p:txBody>
-          <a:bodyPr wrap="square">
-            <a:spAutoFit/>
-          </a:bodyPr>
-          <a:lstStyle/>
-          <a:p>
-            <a:pPr>
-              <a:lnSpc>
-                <a:spcPct val="115000"/>
-              </a:lnSpc>
-              <a:spcAft>
-                <a:spcPts val="600"/>
+                <a:latin typeface="Segoe UI"/>
+              </a:rPr>
+              <a:t>Yet the advice a worker receives is generic, static and rarely cites a source — while the training they are told to buy is expensive and often already out of date.</a:t>
+            </a:r>
+          </a:p>
+        </p:txBody>
+      </p:sp>
+      <p:sp>
+        <p:nvSpPr>
+          <p:cNvPr id="18" name="TextBox 17"/>
+          <p:cNvSpPr txBox="1"/>
+          <p:nvPr/>
+        </p:nvSpPr>
+        <p:spPr>
+          <a:xfrm>
+            <a:off x="777240" y="6263640"/>
+            <a:ext cx="10607040" cy="274320"/>
+          </a:xfrm>
+          <a:prstGeom prst="rect">
+            <a:avLst/>
+          </a:prstGeom>
+          <a:noFill/>
+        </p:spPr>
+        <p:txBody>
+          <a:bodyPr wrap="square" anchor="t">
+            <a:spAutoFit/>
+          </a:bodyPr>
+          <a:lstStyle/>
+          <a:p>
+            <a:pPr algn="l">
+              <a:lnSpc>
+                <a:spcPct val="125000"/>
+              </a:lnSpc>
+              <a:spcAft>
+                <a:spcPts val="800"/>
               </a:spcAft>
             </a:pPr>
             <a:r>
               <a:rPr sz="900" b="0">
                 <a:solidFill>
-                  <a:srgbClr val="5B6B67"/>
-                </a:solidFill>
-                <a:latin typeface="Arial"/>
+                  <a:srgbClr val="5B6B63"/>
+                </a:solidFill>
+                <a:latin typeface="Segoe UI"/>
               </a:rPr>
               <a:t>Domain 1 brief · problem statement</a:t>
+            </a:r>
+          </a:p>
+        </p:txBody>
+      </p:sp>
+      <p:sp>
+        <p:nvSpPr>
+          <p:cNvPr id="19" name="TextBox 18"/>
+          <p:cNvSpPr txBox="1"/>
+          <p:nvPr/>
+        </p:nvSpPr>
+        <p:spPr>
+          <a:xfrm>
+            <a:off x="10591495" y="6263640"/>
+            <a:ext cx="822960" cy="274320"/>
+          </a:xfrm>
+          <a:prstGeom prst="rect">
+            <a:avLst/>
+          </a:prstGeom>
+          <a:noFill/>
+        </p:spPr>
+        <p:txBody>
+          <a:bodyPr wrap="square" anchor="t">
+            <a:spAutoFit/>
+          </a:bodyPr>
+          <a:lstStyle/>
+          <a:p>
+            <a:pPr algn="r">
+              <a:lnSpc>
+                <a:spcPct val="125000"/>
+              </a:lnSpc>
+              <a:spcAft>
+                <a:spcPts val="800"/>
+              </a:spcAft>
+            </a:pPr>
+            <a:r>
+              <a:rPr sz="900" b="0">
+                <a:solidFill>
+                  <a:srgbClr val="5B6B63"/>
+                </a:solidFill>
+                <a:latin typeface="Segoe UI"/>
+              </a:rPr>
+              <a:t>02 / 12</a:t>
             </a:r>
           </a:p>
         </p:txBody>
@@ -3642,56 +6296,14 @@
       <p:grpSpPr/>
       <p:sp>
         <p:nvSpPr>
-          <p:cNvPr id="2" name="TextBox 1"/>
-          <p:cNvSpPr txBox="1"/>
-          <p:nvPr/>
-        </p:nvSpPr>
-        <p:spPr>
-          <a:xfrm>
-            <a:off x="822960" y="502920"/>
-            <a:ext cx="8229600" cy="274320"/>
-          </a:xfrm>
-          <a:prstGeom prst="rect">
-            <a:avLst/>
-          </a:prstGeom>
-          <a:noFill/>
-        </p:spPr>
-        <p:txBody>
-          <a:bodyPr wrap="square">
-            <a:spAutoFit/>
-          </a:bodyPr>
-          <a:lstStyle/>
-          <a:p>
-            <a:pPr>
-              <a:lnSpc>
-                <a:spcPct val="115000"/>
-              </a:lnSpc>
-              <a:spcAft>
-                <a:spcPts val="600"/>
-              </a:spcAft>
-            </a:pPr>
-            <a:r>
-              <a:rPr sz="1100" b="1">
-                <a:solidFill>
-                  <a:srgbClr val="5B6B67"/>
-                </a:solidFill>
-                <a:latin typeface="Arial"/>
-              </a:rPr>
-              <a:t>WHO IT IS FOR</a:t>
-            </a:r>
-          </a:p>
-        </p:txBody>
-      </p:sp>
-      <p:sp>
-        <p:nvSpPr>
-          <p:cNvPr id="3" name="Rectangle 2"/>
+          <p:cNvPr id="2" name="Rectangle 1"/>
           <p:cNvSpPr/>
           <p:nvPr/>
         </p:nvSpPr>
         <p:spPr>
           <a:xfrm>
-            <a:off x="822960" y="822960"/>
-            <a:ext cx="1005840" cy="45720"/>
+            <a:off x="777240" y="566928"/>
+            <a:ext cx="310896" cy="31750"/>
           </a:xfrm>
           <a:prstGeom prst="rect">
             <a:avLst/>
@@ -3727,40 +6339,82 @@
       </p:sp>
       <p:sp>
         <p:nvSpPr>
+          <p:cNvPr id="3" name="TextBox 2"/>
+          <p:cNvSpPr txBox="1"/>
+          <p:nvPr/>
+        </p:nvSpPr>
+        <p:spPr>
+          <a:xfrm>
+            <a:off x="1234440" y="457200"/>
+            <a:ext cx="8229600" cy="274320"/>
+          </a:xfrm>
+          <a:prstGeom prst="rect">
+            <a:avLst/>
+          </a:prstGeom>
+          <a:noFill/>
+        </p:spPr>
+        <p:txBody>
+          <a:bodyPr wrap="square" anchor="t">
+            <a:spAutoFit/>
+          </a:bodyPr>
+          <a:lstStyle/>
+          <a:p>
+            <a:pPr algn="l">
+              <a:lnSpc>
+                <a:spcPct val="125000"/>
+              </a:lnSpc>
+              <a:spcAft>
+                <a:spcPts val="800"/>
+              </a:spcAft>
+            </a:pPr>
+            <a:r>
+              <a:rPr sz="1050" b="1">
+                <a:solidFill>
+                  <a:srgbClr val="5B6B63"/>
+                </a:solidFill>
+                <a:latin typeface="Segoe UI Semibold"/>
+              </a:rPr>
+              <a:t>WHO IT IS FOR</a:t>
+            </a:r>
+          </a:p>
+        </p:txBody>
+      </p:sp>
+      <p:sp>
+        <p:nvSpPr>
           <p:cNvPr id="4" name="TextBox 3"/>
           <p:cNvSpPr txBox="1"/>
           <p:nvPr/>
         </p:nvSpPr>
         <p:spPr>
           <a:xfrm>
-            <a:off x="822960" y="960120"/>
-            <a:ext cx="10515600" cy="1463040"/>
-          </a:xfrm>
-          <a:prstGeom prst="rect">
-            <a:avLst/>
-          </a:prstGeom>
-          <a:noFill/>
-        </p:spPr>
-        <p:txBody>
-          <a:bodyPr wrap="square">
-            <a:spAutoFit/>
-          </a:bodyPr>
-          <a:lstStyle/>
-          <a:p>
-            <a:pPr>
-              <a:lnSpc>
-                <a:spcPct val="115000"/>
-              </a:lnSpc>
-              <a:spcAft>
-                <a:spcPts val="600"/>
-              </a:spcAft>
-            </a:pPr>
-            <a:r>
-              <a:rPr sz="3400" b="1">
+            <a:off x="777240" y="960120"/>
+            <a:ext cx="9692640" cy="1554480"/>
+          </a:xfrm>
+          <a:prstGeom prst="rect">
+            <a:avLst/>
+          </a:prstGeom>
+          <a:noFill/>
+        </p:spPr>
+        <p:txBody>
+          <a:bodyPr wrap="square" anchor="t">
+            <a:spAutoFit/>
+          </a:bodyPr>
+          <a:lstStyle/>
+          <a:p>
+            <a:pPr algn="l">
+              <a:lnSpc>
+                <a:spcPct val="105000"/>
+              </a:lnSpc>
+              <a:spcAft>
+                <a:spcPts val="800"/>
+              </a:spcAft>
+            </a:pPr>
+            <a:r>
+              <a:rPr sz="4000" b="1">
                 <a:solidFill>
                   <a:srgbClr val="1F3A37"/>
                 </a:solidFill>
-                <a:latin typeface="Arial"/>
+                <a:latin typeface="Segoe UI Semibold"/>
               </a:rPr>
               <a:t>Four people, one moment of need.</a:t>
             </a:r>
@@ -3769,147 +6423,654 @@
       </p:sp>
       <p:sp>
         <p:nvSpPr>
-          <p:cNvPr id="5" name="TextBox 4"/>
-          <p:cNvSpPr txBox="1"/>
-          <p:nvPr/>
-        </p:nvSpPr>
-        <p:spPr>
-          <a:xfrm>
-            <a:off x="822960" y="2651760"/>
-            <a:ext cx="10515600" cy="3840480"/>
-          </a:xfrm>
-          <a:prstGeom prst="rect">
-            <a:avLst/>
-          </a:prstGeom>
-          <a:noFill/>
-        </p:spPr>
-        <p:txBody>
-          <a:bodyPr wrap="square">
-            <a:spAutoFit/>
-          </a:bodyPr>
-          <a:lstStyle/>
-          <a:p>
-            <a:pPr>
+          <p:cNvPr id="5" name="Rounded Rectangle 4"/>
+          <p:cNvSpPr/>
+          <p:nvPr/>
+        </p:nvSpPr>
+        <p:spPr>
+          <a:xfrm>
+            <a:off x="777240" y="2651760"/>
+            <a:ext cx="5029200" cy="1143000"/>
+          </a:xfrm>
+          <a:prstGeom prst="roundRect">
+            <a:avLst>
+              <a:gd name="adj" fmla="val 14000"/>
+            </a:avLst>
+          </a:prstGeom>
+          <a:solidFill>
+            <a:srgbClr val="FFFFFF"/>
+          </a:solidFill>
+          <a:ln w="12700">
+            <a:solidFill>
+              <a:srgbClr val="D8D0C2"/>
+            </a:solidFill>
+          </a:ln>
+          <a:effectLst/>
+        </p:spPr>
+        <p:style>
+          <a:lnRef idx="1">
+            <a:schemeClr val="accent1"/>
+          </a:lnRef>
+          <a:fillRef idx="3">
+            <a:schemeClr val="accent1"/>
+          </a:fillRef>
+          <a:effectRef idx="2">
+            <a:schemeClr val="accent1"/>
+          </a:effectRef>
+          <a:fontRef idx="minor">
+            <a:schemeClr val="lt1"/>
+          </a:fontRef>
+        </p:style>
+        <p:txBody>
+          <a:bodyPr rtlCol="0" anchor="ctr"/>
+          <a:lstStyle/>
+          <a:p>
+            <a:pPr algn="ctr"/>
+          </a:p>
+        </p:txBody>
+      </p:sp>
+      <p:sp>
+        <p:nvSpPr>
+          <p:cNvPr id="6" name="TextBox 5"/>
+          <p:cNvSpPr txBox="1"/>
+          <p:nvPr/>
+        </p:nvSpPr>
+        <p:spPr>
+          <a:xfrm>
+            <a:off x="1005840" y="2779776"/>
+            <a:ext cx="4572000" cy="274320"/>
+          </a:xfrm>
+          <a:prstGeom prst="rect">
+            <a:avLst/>
+          </a:prstGeom>
+          <a:noFill/>
+        </p:spPr>
+        <p:txBody>
+          <a:bodyPr wrap="square" anchor="t">
+            <a:spAutoFit/>
+          </a:bodyPr>
+          <a:lstStyle/>
+          <a:p>
+            <a:pPr algn="l">
+              <a:lnSpc>
+                <a:spcPct val="125000"/>
+              </a:lnSpc>
+              <a:spcAft>
+                <a:spcPts val="800"/>
+              </a:spcAft>
+            </a:pPr>
+            <a:r>
+              <a:rPr sz="1300" b="1">
+                <a:solidFill>
+                  <a:srgbClr val="1F3A37"/>
+                </a:solidFill>
+                <a:latin typeface="Segoe UI Semibold"/>
+              </a:rPr>
+              <a:t>The displaced worker</a:t>
+            </a:r>
+          </a:p>
+        </p:txBody>
+      </p:sp>
+      <p:sp>
+        <p:nvSpPr>
+          <p:cNvPr id="7" name="TextBox 6"/>
+          <p:cNvSpPr txBox="1"/>
+          <p:nvPr/>
+        </p:nvSpPr>
+        <p:spPr>
+          <a:xfrm>
+            <a:off x="1005840" y="3090672"/>
+            <a:ext cx="4572000" cy="640080"/>
+          </a:xfrm>
+          <a:prstGeom prst="rect">
+            <a:avLst/>
+          </a:prstGeom>
+          <a:noFill/>
+        </p:spPr>
+        <p:txBody>
+          <a:bodyPr wrap="square" anchor="t">
+            <a:spAutoFit/>
+          </a:bodyPr>
+          <a:lstStyle/>
+          <a:p>
+            <a:pPr algn="l">
+              <a:lnSpc>
+                <a:spcPct val="120000"/>
+              </a:lnSpc>
+              <a:spcAft>
+                <a:spcPts val="800"/>
+              </a:spcAft>
+            </a:pPr>
+            <a:r>
+              <a:rPr sz="1050" b="0">
+                <a:solidFill>
+                  <a:srgbClr val="5B6B63"/>
+                </a:solidFill>
+                <a:latin typeface="Segoe UI"/>
+              </a:rPr>
+              <a:t>A procurement assistant whose routine work is being automated. Needs a route out, not sympathy.</a:t>
+            </a:r>
+          </a:p>
+        </p:txBody>
+      </p:sp>
+      <p:sp>
+        <p:nvSpPr>
+          <p:cNvPr id="8" name="Rounded Rectangle 7"/>
+          <p:cNvSpPr/>
+          <p:nvPr/>
+        </p:nvSpPr>
+        <p:spPr>
+          <a:xfrm>
+            <a:off x="6126480" y="2651760"/>
+            <a:ext cx="5029200" cy="1143000"/>
+          </a:xfrm>
+          <a:prstGeom prst="roundRect">
+            <a:avLst>
+              <a:gd name="adj" fmla="val 14000"/>
+            </a:avLst>
+          </a:prstGeom>
+          <a:solidFill>
+            <a:srgbClr val="FFFFFF"/>
+          </a:solidFill>
+          <a:ln w="12700">
+            <a:solidFill>
+              <a:srgbClr val="D8D0C2"/>
+            </a:solidFill>
+          </a:ln>
+          <a:effectLst/>
+        </p:spPr>
+        <p:style>
+          <a:lnRef idx="1">
+            <a:schemeClr val="accent1"/>
+          </a:lnRef>
+          <a:fillRef idx="3">
+            <a:schemeClr val="accent1"/>
+          </a:fillRef>
+          <a:effectRef idx="2">
+            <a:schemeClr val="accent1"/>
+          </a:effectRef>
+          <a:fontRef idx="minor">
+            <a:schemeClr val="lt1"/>
+          </a:fontRef>
+        </p:style>
+        <p:txBody>
+          <a:bodyPr rtlCol="0" anchor="ctr"/>
+          <a:lstStyle/>
+          <a:p>
+            <a:pPr algn="ctr"/>
+          </a:p>
+        </p:txBody>
+      </p:sp>
+      <p:sp>
+        <p:nvSpPr>
+          <p:cNvPr id="9" name="TextBox 8"/>
+          <p:cNvSpPr txBox="1"/>
+          <p:nvPr/>
+        </p:nvSpPr>
+        <p:spPr>
+          <a:xfrm>
+            <a:off x="6355080" y="2779776"/>
+            <a:ext cx="4572000" cy="274320"/>
+          </a:xfrm>
+          <a:prstGeom prst="rect">
+            <a:avLst/>
+          </a:prstGeom>
+          <a:noFill/>
+        </p:spPr>
+        <p:txBody>
+          <a:bodyPr wrap="square" anchor="t">
+            <a:spAutoFit/>
+          </a:bodyPr>
+          <a:lstStyle/>
+          <a:p>
+            <a:pPr algn="l">
+              <a:lnSpc>
+                <a:spcPct val="125000"/>
+              </a:lnSpc>
+              <a:spcAft>
+                <a:spcPts val="800"/>
+              </a:spcAft>
+            </a:pPr>
+            <a:r>
+              <a:rPr sz="1300" b="1">
+                <a:solidFill>
+                  <a:srgbClr val="1F3A37"/>
+                </a:solidFill>
+                <a:latin typeface="Segoe UI Semibold"/>
+              </a:rPr>
+              <a:t>The switcher</a:t>
+            </a:r>
+          </a:p>
+        </p:txBody>
+      </p:sp>
+      <p:sp>
+        <p:nvSpPr>
+          <p:cNvPr id="10" name="TextBox 9"/>
+          <p:cNvSpPr txBox="1"/>
+          <p:nvPr/>
+        </p:nvSpPr>
+        <p:spPr>
+          <a:xfrm>
+            <a:off x="6355080" y="3090672"/>
+            <a:ext cx="4572000" cy="640080"/>
+          </a:xfrm>
+          <a:prstGeom prst="rect">
+            <a:avLst/>
+          </a:prstGeom>
+          <a:noFill/>
+        </p:spPr>
+        <p:txBody>
+          <a:bodyPr wrap="square" anchor="t">
+            <a:spAutoFit/>
+          </a:bodyPr>
+          <a:lstStyle/>
+          <a:p>
+            <a:pPr algn="l">
+              <a:lnSpc>
+                <a:spcPct val="120000"/>
+              </a:lnSpc>
+              <a:spcAft>
+                <a:spcPts val="800"/>
+              </a:spcAft>
+            </a:pPr>
+            <a:r>
+              <a:rPr sz="1050" b="0">
+                <a:solidFill>
+                  <a:srgbClr val="5B6B63"/>
+                </a:solidFill>
+                <a:latin typeface="Segoe UI"/>
+              </a:rPr>
+              <a:t>A nurse, designer or clerk deciding where existing skills can carry them next.</a:t>
+            </a:r>
+          </a:p>
+        </p:txBody>
+      </p:sp>
+      <p:sp>
+        <p:nvSpPr>
+          <p:cNvPr id="11" name="Rounded Rectangle 10"/>
+          <p:cNvSpPr/>
+          <p:nvPr/>
+        </p:nvSpPr>
+        <p:spPr>
+          <a:xfrm>
+            <a:off x="777240" y="3977639"/>
+            <a:ext cx="5029200" cy="1143000"/>
+          </a:xfrm>
+          <a:prstGeom prst="roundRect">
+            <a:avLst>
+              <a:gd name="adj" fmla="val 14000"/>
+            </a:avLst>
+          </a:prstGeom>
+          <a:solidFill>
+            <a:srgbClr val="FFFFFF"/>
+          </a:solidFill>
+          <a:ln w="12700">
+            <a:solidFill>
+              <a:srgbClr val="D8D0C2"/>
+            </a:solidFill>
+          </a:ln>
+          <a:effectLst/>
+        </p:spPr>
+        <p:style>
+          <a:lnRef idx="1">
+            <a:schemeClr val="accent1"/>
+          </a:lnRef>
+          <a:fillRef idx="3">
+            <a:schemeClr val="accent1"/>
+          </a:fillRef>
+          <a:effectRef idx="2">
+            <a:schemeClr val="accent1"/>
+          </a:effectRef>
+          <a:fontRef idx="minor">
+            <a:schemeClr val="lt1"/>
+          </a:fontRef>
+        </p:style>
+        <p:txBody>
+          <a:bodyPr rtlCol="0" anchor="ctr"/>
+          <a:lstStyle/>
+          <a:p>
+            <a:pPr algn="ctr"/>
+          </a:p>
+        </p:txBody>
+      </p:sp>
+      <p:sp>
+        <p:nvSpPr>
+          <p:cNvPr id="12" name="TextBox 11"/>
+          <p:cNvSpPr txBox="1"/>
+          <p:nvPr/>
+        </p:nvSpPr>
+        <p:spPr>
+          <a:xfrm>
+            <a:off x="1005840" y="4105655"/>
+            <a:ext cx="4572000" cy="274320"/>
+          </a:xfrm>
+          <a:prstGeom prst="rect">
+            <a:avLst/>
+          </a:prstGeom>
+          <a:noFill/>
+        </p:spPr>
+        <p:txBody>
+          <a:bodyPr wrap="square" anchor="t">
+            <a:spAutoFit/>
+          </a:bodyPr>
+          <a:lstStyle/>
+          <a:p>
+            <a:pPr algn="l">
+              <a:lnSpc>
+                <a:spcPct val="125000"/>
+              </a:lnSpc>
+              <a:spcAft>
+                <a:spcPts val="800"/>
+              </a:spcAft>
+            </a:pPr>
+            <a:r>
+              <a:rPr sz="1300" b="1">
+                <a:solidFill>
+                  <a:srgbClr val="1F3A37"/>
+                </a:solidFill>
+                <a:latin typeface="Segoe UI Semibold"/>
+              </a:rPr>
+              <a:t>HR and L&amp;D</a:t>
+            </a:r>
+          </a:p>
+        </p:txBody>
+      </p:sp>
+      <p:sp>
+        <p:nvSpPr>
+          <p:cNvPr id="13" name="TextBox 12"/>
+          <p:cNvSpPr txBox="1"/>
+          <p:nvPr/>
+        </p:nvSpPr>
+        <p:spPr>
+          <a:xfrm>
+            <a:off x="1005840" y="4416551"/>
+            <a:ext cx="4572000" cy="640080"/>
+          </a:xfrm>
+          <a:prstGeom prst="rect">
+            <a:avLst/>
+          </a:prstGeom>
+          <a:noFill/>
+        </p:spPr>
+        <p:txBody>
+          <a:bodyPr wrap="square" anchor="t">
+            <a:spAutoFit/>
+          </a:bodyPr>
+          <a:lstStyle/>
+          <a:p>
+            <a:pPr algn="l">
+              <a:lnSpc>
+                <a:spcPct val="120000"/>
+              </a:lnSpc>
+              <a:spcAft>
+                <a:spcPts val="800"/>
+              </a:spcAft>
+            </a:pPr>
+            <a:r>
+              <a:rPr sz="1050" b="0">
+                <a:solidFill>
+                  <a:srgbClr val="5B6B63"/>
+                </a:solidFill>
+                <a:latin typeface="Segoe UI"/>
+              </a:rPr>
+              <a:t>Planning next year's reskilling budget and needing evidence, not vendor decks.</a:t>
+            </a:r>
+          </a:p>
+        </p:txBody>
+      </p:sp>
+      <p:sp>
+        <p:nvSpPr>
+          <p:cNvPr id="14" name="Rounded Rectangle 13"/>
+          <p:cNvSpPr/>
+          <p:nvPr/>
+        </p:nvSpPr>
+        <p:spPr>
+          <a:xfrm>
+            <a:off x="6126480" y="3977639"/>
+            <a:ext cx="5029200" cy="1143000"/>
+          </a:xfrm>
+          <a:prstGeom prst="roundRect">
+            <a:avLst>
+              <a:gd name="adj" fmla="val 14000"/>
+            </a:avLst>
+          </a:prstGeom>
+          <a:solidFill>
+            <a:srgbClr val="FFFFFF"/>
+          </a:solidFill>
+          <a:ln w="12700">
+            <a:solidFill>
+              <a:srgbClr val="D8D0C2"/>
+            </a:solidFill>
+          </a:ln>
+          <a:effectLst/>
+        </p:spPr>
+        <p:style>
+          <a:lnRef idx="1">
+            <a:schemeClr val="accent1"/>
+          </a:lnRef>
+          <a:fillRef idx="3">
+            <a:schemeClr val="accent1"/>
+          </a:fillRef>
+          <a:effectRef idx="2">
+            <a:schemeClr val="accent1"/>
+          </a:effectRef>
+          <a:fontRef idx="minor">
+            <a:schemeClr val="lt1"/>
+          </a:fontRef>
+        </p:style>
+        <p:txBody>
+          <a:bodyPr rtlCol="0" anchor="ctr"/>
+          <a:lstStyle/>
+          <a:p>
+            <a:pPr algn="ctr"/>
+          </a:p>
+        </p:txBody>
+      </p:sp>
+      <p:sp>
+        <p:nvSpPr>
+          <p:cNvPr id="15" name="TextBox 14"/>
+          <p:cNvSpPr txBox="1"/>
+          <p:nvPr/>
+        </p:nvSpPr>
+        <p:spPr>
+          <a:xfrm>
+            <a:off x="6355080" y="4105655"/>
+            <a:ext cx="4572000" cy="274320"/>
+          </a:xfrm>
+          <a:prstGeom prst="rect">
+            <a:avLst/>
+          </a:prstGeom>
+          <a:noFill/>
+        </p:spPr>
+        <p:txBody>
+          <a:bodyPr wrap="square" anchor="t">
+            <a:spAutoFit/>
+          </a:bodyPr>
+          <a:lstStyle/>
+          <a:p>
+            <a:pPr algn="l">
+              <a:lnSpc>
+                <a:spcPct val="125000"/>
+              </a:lnSpc>
+              <a:spcAft>
+                <a:spcPts val="800"/>
+              </a:spcAft>
+            </a:pPr>
+            <a:r>
+              <a:rPr sz="1300" b="1">
+                <a:solidFill>
+                  <a:srgbClr val="1F3A37"/>
+                </a:solidFill>
+                <a:latin typeface="Segoe UI Semibold"/>
+              </a:rPr>
+              <a:t>TVET and university advisers</a:t>
+            </a:r>
+          </a:p>
+        </p:txBody>
+      </p:sp>
+      <p:sp>
+        <p:nvSpPr>
+          <p:cNvPr id="16" name="TextBox 15"/>
+          <p:cNvSpPr txBox="1"/>
+          <p:nvPr/>
+        </p:nvSpPr>
+        <p:spPr>
+          <a:xfrm>
+            <a:off x="6355080" y="4416551"/>
+            <a:ext cx="4572000" cy="640080"/>
+          </a:xfrm>
+          <a:prstGeom prst="rect">
+            <a:avLst/>
+          </a:prstGeom>
+          <a:noFill/>
+        </p:spPr>
+        <p:txBody>
+          <a:bodyPr wrap="square" anchor="t">
+            <a:spAutoFit/>
+          </a:bodyPr>
+          <a:lstStyle/>
+          <a:p>
+            <a:pPr algn="l">
+              <a:lnSpc>
+                <a:spcPct val="120000"/>
+              </a:lnSpc>
+              <a:spcAft>
+                <a:spcPts val="800"/>
+              </a:spcAft>
+            </a:pPr>
+            <a:r>
+              <a:rPr sz="1050" b="0">
+                <a:solidFill>
+                  <a:srgbClr val="5B6B63"/>
+                </a:solidFill>
+                <a:latin typeface="Segoe UI"/>
+              </a:rPr>
+              <a:t>Advising students from a printed list that was accurate five years ago.</a:t>
+            </a:r>
+          </a:p>
+        </p:txBody>
+      </p:sp>
+      <p:sp>
+        <p:nvSpPr>
+          <p:cNvPr id="17" name="TextBox 16"/>
+          <p:cNvSpPr txBox="1"/>
+          <p:nvPr/>
+        </p:nvSpPr>
+        <p:spPr>
+          <a:xfrm>
+            <a:off x="777240" y="5440680"/>
+            <a:ext cx="10424160" cy="548640"/>
+          </a:xfrm>
+          <a:prstGeom prst="rect">
+            <a:avLst/>
+          </a:prstGeom>
+          <a:noFill/>
+        </p:spPr>
+        <p:txBody>
+          <a:bodyPr wrap="square" anchor="t">
+            <a:spAutoFit/>
+          </a:bodyPr>
+          <a:lstStyle/>
+          <a:p>
+            <a:pPr algn="l">
               <a:lnSpc>
                 <a:spcPct val="130000"/>
               </a:lnSpc>
               <a:spcAft>
-                <a:spcPts val="600"/>
-              </a:spcAft>
-            </a:pPr>
-            <a:r>
-              <a:rPr sz="1700" b="0">
+                <a:spcPts val="800"/>
+              </a:spcAft>
+            </a:pPr>
+            <a:r>
+              <a:rPr sz="1300" b="0">
                 <a:solidFill>
                   <a:srgbClr val="1F3A37"/>
                 </a:solidFill>
-                <a:latin typeface="Arial"/>
-              </a:rPr>
-              <a:t>The displaced worker — a procurement assistant whose routine work is being automated.</a:t>
-            </a:r>
-          </a:p>
-          <a:p>
-            <a:pPr>
-              <a:lnSpc>
-                <a:spcPct val="130000"/>
-              </a:lnSpc>
-              <a:spcAft>
-                <a:spcPts val="600"/>
-              </a:spcAft>
-            </a:pPr>
-            <a:r>
-              <a:rPr sz="1700" b="0">
-                <a:solidFill>
-                  <a:srgbClr val="1F3A37"/>
-                </a:solidFill>
-                <a:latin typeface="Arial"/>
-              </a:rPr>
-              <a:t>The switcher — a nurse or designer deciding where their existing skills can carry them.</a:t>
-            </a:r>
-          </a:p>
-          <a:p>
-            <a:pPr>
-              <a:lnSpc>
-                <a:spcPct val="130000"/>
-              </a:lnSpc>
-              <a:spcAft>
-                <a:spcPts val="600"/>
-              </a:spcAft>
-            </a:pPr>
-            <a:r>
-              <a:rPr sz="1700" b="0">
-                <a:solidFill>
-                  <a:srgbClr val="1F3A37"/>
-                </a:solidFill>
-                <a:latin typeface="Arial"/>
-              </a:rPr>
-              <a:t>The HR / L&amp;D manager planning next year’s reskilling budget.</a:t>
-            </a:r>
-          </a:p>
-          <a:p>
-            <a:pPr>
-              <a:lnSpc>
-                <a:spcPct val="130000"/>
-              </a:lnSpc>
-              <a:spcAft>
-                <a:spcPts val="600"/>
-              </a:spcAft>
-            </a:pPr>
-            <a:r>
-              <a:rPr sz="1700" b="0">
-                <a:solidFill>
-                  <a:srgbClr val="1F3A37"/>
-                </a:solidFill>
-                <a:latin typeface="Arial"/>
-              </a:rPr>
-              <a:t>The TVET or university career officer advising students from a printed list.</a:t>
-            </a:r>
-          </a:p>
-          <a:p>
-            <a:pPr>
-              <a:lnSpc>
-                <a:spcPct val="130000"/>
-              </a:lnSpc>
-              <a:spcAft>
-                <a:spcPts val="600"/>
-              </a:spcAft>
-            </a:pPr>
-          </a:p>
-          <a:p>
-            <a:pPr>
-              <a:lnSpc>
-                <a:spcPct val="130000"/>
-              </a:lnSpc>
-              <a:spcAft>
-                <a:spcPts val="600"/>
-              </a:spcAft>
-            </a:pPr>
-            <a:r>
-              <a:rPr sz="1700" b="0">
-                <a:solidFill>
-                  <a:srgbClr val="1F3A37"/>
-                </a:solidFill>
-                <a:latin typeface="Arial"/>
-              </a:rPr>
-              <a:t>The moment: the week a person learns their role is changing. They do not want a prediction;</a:t>
-            </a:r>
-          </a:p>
-          <a:p>
-            <a:pPr>
-              <a:lnSpc>
-                <a:spcPct val="130000"/>
-              </a:lnSpc>
-              <a:spcAft>
-                <a:spcPts val="600"/>
-              </a:spcAft>
-            </a:pPr>
-            <a:r>
-              <a:rPr sz="1700" b="0">
-                <a:solidFill>
-                  <a:srgbClr val="1F3A37"/>
-                </a:solidFill>
-                <a:latin typeface="Arial"/>
-              </a:rPr>
-              <a:t>they want to know what to do next and whether to trust it.</a:t>
+                <a:latin typeface="Segoe UI"/>
+              </a:rPr>
+              <a:t>The moment: the week a person learns their role is changing. They do not want a prediction — they want to know what to do next, and whether to trust it.</a:t>
+            </a:r>
+          </a:p>
+        </p:txBody>
+      </p:sp>
+      <p:sp>
+        <p:nvSpPr>
+          <p:cNvPr id="18" name="TextBox 17"/>
+          <p:cNvSpPr txBox="1"/>
+          <p:nvPr/>
+        </p:nvSpPr>
+        <p:spPr>
+          <a:xfrm>
+            <a:off x="777240" y="6263640"/>
+            <a:ext cx="10607040" cy="274320"/>
+          </a:xfrm>
+          <a:prstGeom prst="rect">
+            <a:avLst/>
+          </a:prstGeom>
+          <a:noFill/>
+        </p:spPr>
+        <p:txBody>
+          <a:bodyPr wrap="square" anchor="t">
+            <a:spAutoFit/>
+          </a:bodyPr>
+          <a:lstStyle/>
+          <a:p>
+            <a:pPr algn="l">
+              <a:lnSpc>
+                <a:spcPct val="125000"/>
+              </a:lnSpc>
+              <a:spcAft>
+                <a:spcPts val="800"/>
+              </a:spcAft>
+            </a:pPr>
+            <a:r>
+              <a:rPr sz="900" b="0">
+                <a:solidFill>
+                  <a:srgbClr val="5B6B63"/>
+                </a:solidFill>
+                <a:latin typeface="Segoe UI"/>
+              </a:rPr>
+              <a:t>Personas derived from the Domain 1 brief</a:t>
+            </a:r>
+          </a:p>
+        </p:txBody>
+      </p:sp>
+      <p:sp>
+        <p:nvSpPr>
+          <p:cNvPr id="19" name="TextBox 18"/>
+          <p:cNvSpPr txBox="1"/>
+          <p:nvPr/>
+        </p:nvSpPr>
+        <p:spPr>
+          <a:xfrm>
+            <a:off x="10591495" y="6263640"/>
+            <a:ext cx="822960" cy="274320"/>
+          </a:xfrm>
+          <a:prstGeom prst="rect">
+            <a:avLst/>
+          </a:prstGeom>
+          <a:noFill/>
+        </p:spPr>
+        <p:txBody>
+          <a:bodyPr wrap="square" anchor="t">
+            <a:spAutoFit/>
+          </a:bodyPr>
+          <a:lstStyle/>
+          <a:p>
+            <a:pPr algn="r">
+              <a:lnSpc>
+                <a:spcPct val="125000"/>
+              </a:lnSpc>
+              <a:spcAft>
+                <a:spcPts val="800"/>
+              </a:spcAft>
+            </a:pPr>
+            <a:r>
+              <a:rPr sz="900" b="0">
+                <a:solidFill>
+                  <a:srgbClr val="5B6B63"/>
+                </a:solidFill>
+                <a:latin typeface="Segoe UI"/>
+              </a:rPr>
+              <a:t>03 / 12</a:t>
             </a:r>
           </a:p>
         </p:txBody>
@@ -3928,7 +7089,7 @@
     <p:bg>
       <p:bgPr>
         <a:solidFill>
-          <a:srgbClr val="F6F2EA"/>
+          <a:srgbClr val="1F3A37"/>
         </a:solidFill>
         <a:effectLst/>
       </p:bgPr>
@@ -3942,56 +7103,14 @@
       <p:grpSpPr/>
       <p:sp>
         <p:nvSpPr>
-          <p:cNvPr id="2" name="TextBox 1"/>
-          <p:cNvSpPr txBox="1"/>
-          <p:nvPr/>
-        </p:nvSpPr>
-        <p:spPr>
-          <a:xfrm>
-            <a:off x="822960" y="502920"/>
-            <a:ext cx="8229600" cy="274320"/>
-          </a:xfrm>
-          <a:prstGeom prst="rect">
-            <a:avLst/>
-          </a:prstGeom>
-          <a:noFill/>
-        </p:spPr>
-        <p:txBody>
-          <a:bodyPr wrap="square">
-            <a:spAutoFit/>
-          </a:bodyPr>
-          <a:lstStyle/>
-          <a:p>
-            <a:pPr>
-              <a:lnSpc>
-                <a:spcPct val="115000"/>
-              </a:lnSpc>
-              <a:spcAft>
-                <a:spcPts val="600"/>
-              </a:spcAft>
-            </a:pPr>
-            <a:r>
-              <a:rPr sz="1100" b="1">
-                <a:solidFill>
-                  <a:srgbClr val="5B6B67"/>
-                </a:solidFill>
-                <a:latin typeface="Arial"/>
-              </a:rPr>
-              <a:t>WHAT IT DOES</a:t>
-            </a:r>
-          </a:p>
-        </p:txBody>
-      </p:sp>
-      <p:sp>
-        <p:nvSpPr>
-          <p:cNvPr id="3" name="Rectangle 2"/>
+          <p:cNvPr id="2" name="Rectangle 1"/>
           <p:cNvSpPr/>
           <p:nvPr/>
         </p:nvSpPr>
         <p:spPr>
           <a:xfrm>
-            <a:off x="822960" y="822960"/>
-            <a:ext cx="1005840" cy="45720"/>
+            <a:off x="777240" y="566928"/>
+            <a:ext cx="310896" cy="31750"/>
           </a:xfrm>
           <a:prstGeom prst="rect">
             <a:avLst/>
@@ -4027,198 +7146,784 @@
       </p:sp>
       <p:sp>
         <p:nvSpPr>
+          <p:cNvPr id="3" name="TextBox 2"/>
+          <p:cNvSpPr txBox="1"/>
+          <p:nvPr/>
+        </p:nvSpPr>
+        <p:spPr>
+          <a:xfrm>
+            <a:off x="1234440" y="457200"/>
+            <a:ext cx="8229600" cy="274320"/>
+          </a:xfrm>
+          <a:prstGeom prst="rect">
+            <a:avLst/>
+          </a:prstGeom>
+          <a:noFill/>
+        </p:spPr>
+        <p:txBody>
+          <a:bodyPr wrap="square" anchor="t">
+            <a:spAutoFit/>
+          </a:bodyPr>
+          <a:lstStyle/>
+          <a:p>
+            <a:pPr algn="l">
+              <a:lnSpc>
+                <a:spcPct val="125000"/>
+              </a:lnSpc>
+              <a:spcAft>
+                <a:spcPts val="800"/>
+              </a:spcAft>
+            </a:pPr>
+            <a:r>
+              <a:rPr sz="1050" b="1">
+                <a:solidFill>
+                  <a:srgbClr val="D98E77"/>
+                </a:solidFill>
+                <a:latin typeface="Segoe UI Semibold"/>
+              </a:rPr>
+              <a:t>THE PRODUCT</a:t>
+            </a:r>
+          </a:p>
+        </p:txBody>
+      </p:sp>
+      <p:sp>
+        <p:nvSpPr>
           <p:cNvPr id="4" name="TextBox 3"/>
           <p:cNvSpPr txBox="1"/>
           <p:nvPr/>
         </p:nvSpPr>
         <p:spPr>
           <a:xfrm>
-            <a:off x="822960" y="960120"/>
-            <a:ext cx="10515600" cy="1463040"/>
-          </a:xfrm>
-          <a:prstGeom prst="rect">
-            <a:avLst/>
-          </a:prstGeom>
-          <a:noFill/>
-        </p:spPr>
-        <p:txBody>
-          <a:bodyPr wrap="square">
-            <a:spAutoFit/>
-          </a:bodyPr>
-          <a:lstStyle/>
-          <a:p>
-            <a:pPr>
-              <a:lnSpc>
-                <a:spcPct val="115000"/>
-              </a:lnSpc>
-              <a:spcAft>
-                <a:spcPts val="600"/>
-              </a:spcAft>
-            </a:pPr>
-            <a:r>
-              <a:rPr sz="3400" b="1">
-                <a:solidFill>
-                  <a:srgbClr val="1F3A37"/>
-                </a:solidFill>
-                <a:latin typeface="Arial"/>
-              </a:rPr>
-              <a:t>Profile in. Ranked roles, gaps and a pathway out.</a:t>
-            </a:r>
-          </a:p>
-        </p:txBody>
-      </p:sp>
-      <p:sp>
-        <p:nvSpPr>
-          <p:cNvPr id="5" name="TextBox 4"/>
-          <p:cNvSpPr txBox="1"/>
-          <p:nvPr/>
-        </p:nvSpPr>
+            <a:off x="777240" y="914400"/>
+            <a:ext cx="10058400" cy="914400"/>
+          </a:xfrm>
+          <a:prstGeom prst="rect">
+            <a:avLst/>
+          </a:prstGeom>
+          <a:noFill/>
+        </p:spPr>
+        <p:txBody>
+          <a:bodyPr wrap="square" anchor="t">
+            <a:spAutoFit/>
+          </a:bodyPr>
+          <a:lstStyle/>
+          <a:p>
+            <a:pPr algn="l">
+              <a:lnSpc>
+                <a:spcPct val="125000"/>
+              </a:lnSpc>
+              <a:spcAft>
+                <a:spcPts val="800"/>
+              </a:spcAft>
+            </a:pPr>
+            <a:r>
+              <a:rPr sz="4000" b="1">
+                <a:solidFill>
+                  <a:srgbClr val="FFFFFF"/>
+                </a:solidFill>
+                <a:latin typeface="Segoe UI Semibold"/>
+              </a:rPr>
+              <a:t>One page. Four checkpoints.</a:t>
+            </a:r>
+          </a:p>
+        </p:txBody>
+      </p:sp>
+      <p:pic>
+        <p:nvPicPr>
+          <p:cNvPr id="5" name="Picture 4" descr="device-phone.png"/>
+          <p:cNvPicPr>
+            <a:picLocks noChangeAspect="1"/>
+          </p:cNvPicPr>
+          <p:nvPr/>
+        </p:nvPicPr>
+        <p:blipFill>
+          <a:blip r:embed="rId2"/>
+          <a:stretch>
+            <a:fillRect/>
+          </a:stretch>
+        </p:blipFill>
         <p:spPr>
           <a:xfrm>
             <a:off x="822960" y="2606040"/>
-            <a:ext cx="10515600" cy="3840480"/>
-          </a:xfrm>
-          <a:prstGeom prst="rect">
-            <a:avLst/>
-          </a:prstGeom>
-          <a:noFill/>
-        </p:spPr>
-        <p:txBody>
-          <a:bodyPr wrap="square">
-            <a:spAutoFit/>
-          </a:bodyPr>
-          <a:lstStyle/>
-          <a:p>
-            <a:pPr>
-              <a:lnSpc>
-                <a:spcPct val="130000"/>
-              </a:lnSpc>
-              <a:spcAft>
-                <a:spcPts val="600"/>
-              </a:spcAft>
-            </a:pPr>
-            <a:r>
-              <a:rPr sz="1600" b="0">
-                <a:solidFill>
-                  <a:srgbClr val="1F3A37"/>
-                </a:solidFill>
-                <a:latin typeface="Arial"/>
-              </a:rPr>
-              <a:t>1  Intake — role, industry, experience. The model expands them into concrete, selectable skills.</a:t>
-            </a:r>
-          </a:p>
-          <a:p>
-            <a:pPr>
-              <a:lnSpc>
-                <a:spcPct val="130000"/>
-              </a:lnSpc>
-              <a:spcAft>
-                <a:spcPts val="600"/>
-              </a:spcAft>
-            </a:pPr>
-            <a:r>
-              <a:rPr sz="1600" b="0">
-                <a:solidFill>
-                  <a:srgbClr val="1F3A37"/>
-                </a:solidFill>
-                <a:latin typeface="Arial"/>
-              </a:rPr>
-              <a:t>2  Live trend layer — 300 recent public job postings, counted against each role’s skills,</a:t>
-            </a:r>
-          </a:p>
-          <a:p>
-            <a:pPr>
-              <a:lnSpc>
-                <a:spcPct val="130000"/>
-              </a:lnSpc>
-              <a:spcAft>
-                <a:spcPts val="600"/>
-              </a:spcAft>
-            </a:pPr>
-            <a:r>
-              <a:rPr sz="1600" b="0">
-                <a:solidFill>
-                  <a:srgbClr val="1F3A37"/>
-                </a:solidFill>
-                <a:latin typeface="Arial"/>
-              </a:rPr>
-              <a:t>     stamped with source, fetch time and sample size.</a:t>
-            </a:r>
-          </a:p>
-          <a:p>
-            <a:pPr>
-              <a:lnSpc>
-                <a:spcPct val="130000"/>
-              </a:lnSpc>
-              <a:spcAft>
-                <a:spcPts val="600"/>
-              </a:spcAft>
-            </a:pPr>
-            <a:r>
-              <a:rPr sz="1600" b="0">
-                <a:solidFill>
-                  <a:srgbClr val="1F3A37"/>
-                </a:solidFill>
-                <a:latin typeface="Arial"/>
-              </a:rPr>
-              <a:t>3  Matching — deterministic, inspectable score: skills, transferable skills, sector, experience, demand.</a:t>
-            </a:r>
-          </a:p>
-          <a:p>
-            <a:pPr>
-              <a:lnSpc>
-                <a:spcPct val="130000"/>
-              </a:lnSpc>
-              <a:spcAft>
-                <a:spcPts val="600"/>
-              </a:spcAft>
-            </a:pPr>
-            <a:r>
-              <a:rPr sz="1600" b="0">
-                <a:solidFill>
-                  <a:srgbClr val="1F3A37"/>
-                </a:solidFill>
-                <a:latin typeface="Arial"/>
-              </a:rPr>
-              <a:t>4  Pathway — ordered steps, prerequisites respected, hours fitted to the learner’s week.</a:t>
-            </a:r>
-          </a:p>
-          <a:p>
-            <a:pPr>
-              <a:lnSpc>
-                <a:spcPct val="130000"/>
-              </a:lnSpc>
-              <a:spcAft>
-                <a:spcPts val="600"/>
-              </a:spcAft>
-            </a:pPr>
-            <a:r>
-              <a:rPr sz="1600" b="0">
-                <a:solidFill>
-                  <a:srgbClr val="1F3A37"/>
-                </a:solidFill>
-                <a:latin typeface="Arial"/>
-              </a:rPr>
-              <a:t>5  SDG mapping — every role and step tagged to a sub-target.</a:t>
-            </a:r>
-          </a:p>
-          <a:p>
-            <a:pPr>
-              <a:lnSpc>
-                <a:spcPct val="130000"/>
-              </a:lnSpc>
-              <a:spcAft>
-                <a:spcPts val="600"/>
-              </a:spcAft>
-            </a:pPr>
-            <a:r>
-              <a:rPr sz="1600" b="0">
-                <a:solidFill>
-                  <a:srgbClr val="1F3A37"/>
-                </a:solidFill>
-                <a:latin typeface="Arial"/>
-              </a:rPr>
-              <a:t>6  Uncertainty — moderate (4-year) and aggressive (18-month) scenarios, not one forecast.</a:t>
+            <a:ext cx="1173480" cy="2240280"/>
+          </a:xfrm>
+          <a:prstGeom prst="rect">
+            <a:avLst/>
+          </a:prstGeom>
+        </p:spPr>
+      </p:pic>
+      <p:pic>
+        <p:nvPicPr>
+          <p:cNvPr id="6" name="Picture 5" descr="device-tablet.png"/>
+          <p:cNvPicPr>
+            <a:picLocks noChangeAspect="1"/>
+          </p:cNvPicPr>
+          <p:nvPr/>
+        </p:nvPicPr>
+        <p:blipFill>
+          <a:blip r:embed="rId3"/>
+          <a:stretch>
+            <a:fillRect/>
+          </a:stretch>
+        </p:blipFill>
+        <p:spPr>
+          <a:xfrm>
+            <a:off x="2194560" y="2834640"/>
+            <a:ext cx="2494910" cy="1920240"/>
+          </a:xfrm>
+          <a:prstGeom prst="rect">
+            <a:avLst/>
+          </a:prstGeom>
+        </p:spPr>
+      </p:pic>
+      <p:pic>
+        <p:nvPicPr>
+          <p:cNvPr id="7" name="Picture 6" descr="device-laptop.png"/>
+          <p:cNvPicPr>
+            <a:picLocks noChangeAspect="1"/>
+          </p:cNvPicPr>
+          <p:nvPr/>
+        </p:nvPicPr>
+        <p:blipFill>
+          <a:blip r:embed="rId4"/>
+          <a:stretch>
+            <a:fillRect/>
+          </a:stretch>
+        </p:blipFill>
+        <p:spPr>
+          <a:xfrm>
+            <a:off x="4709160" y="2606040"/>
+            <a:ext cx="3215286" cy="2194560"/>
+          </a:xfrm>
+          <a:prstGeom prst="rect">
+            <a:avLst/>
+          </a:prstGeom>
+        </p:spPr>
+      </p:pic>
+      <p:sp>
+        <p:nvSpPr>
+          <p:cNvPr id="8" name="TextBox 7"/>
+          <p:cNvSpPr txBox="1"/>
+          <p:nvPr/>
+        </p:nvSpPr>
+        <p:spPr>
+          <a:xfrm>
+            <a:off x="8275320" y="2240280"/>
+            <a:ext cx="548640" cy="274320"/>
+          </a:xfrm>
+          <a:prstGeom prst="rect">
+            <a:avLst/>
+          </a:prstGeom>
+          <a:noFill/>
+        </p:spPr>
+        <p:txBody>
+          <a:bodyPr wrap="square" anchor="t">
+            <a:spAutoFit/>
+          </a:bodyPr>
+          <a:lstStyle/>
+          <a:p>
+            <a:pPr algn="l">
+              <a:lnSpc>
+                <a:spcPct val="125000"/>
+              </a:lnSpc>
+              <a:spcAft>
+                <a:spcPts val="800"/>
+              </a:spcAft>
+            </a:pPr>
+            <a:r>
+              <a:rPr sz="1100" b="1">
+                <a:solidFill>
+                  <a:srgbClr val="D98E77"/>
+                </a:solidFill>
+                <a:latin typeface="Segoe UI Semibold"/>
+              </a:rPr>
+              <a:t>01</a:t>
+            </a:r>
+          </a:p>
+        </p:txBody>
+      </p:sp>
+      <p:sp>
+        <p:nvSpPr>
+          <p:cNvPr id="9" name="TextBox 8"/>
+          <p:cNvSpPr txBox="1"/>
+          <p:nvPr/>
+        </p:nvSpPr>
+        <p:spPr>
+          <a:xfrm>
+            <a:off x="8778240" y="2212848"/>
+            <a:ext cx="3200400" cy="274320"/>
+          </a:xfrm>
+          <a:prstGeom prst="rect">
+            <a:avLst/>
+          </a:prstGeom>
+          <a:noFill/>
+        </p:spPr>
+        <p:txBody>
+          <a:bodyPr wrap="square" anchor="t">
+            <a:spAutoFit/>
+          </a:bodyPr>
+          <a:lstStyle/>
+          <a:p>
+            <a:pPr algn="l">
+              <a:lnSpc>
+                <a:spcPct val="125000"/>
+              </a:lnSpc>
+              <a:spcAft>
+                <a:spcPts val="800"/>
+              </a:spcAft>
+            </a:pPr>
+            <a:r>
+              <a:rPr sz="1200" b="1">
+                <a:solidFill>
+                  <a:srgbClr val="FFFFFF"/>
+                </a:solidFill>
+                <a:latin typeface="Segoe UI Semibold"/>
+              </a:rPr>
+              <a:t>Market signals</a:t>
+            </a:r>
+          </a:p>
+        </p:txBody>
+      </p:sp>
+      <p:sp>
+        <p:nvSpPr>
+          <p:cNvPr id="10" name="TextBox 9"/>
+          <p:cNvSpPr txBox="1"/>
+          <p:nvPr/>
+        </p:nvSpPr>
+        <p:spPr>
+          <a:xfrm>
+            <a:off x="8778240" y="2496312"/>
+            <a:ext cx="3200400" cy="548640"/>
+          </a:xfrm>
+          <a:prstGeom prst="rect">
+            <a:avLst/>
+          </a:prstGeom>
+          <a:noFill/>
+        </p:spPr>
+        <p:txBody>
+          <a:bodyPr wrap="square" anchor="t">
+            <a:spAutoFit/>
+          </a:bodyPr>
+          <a:lstStyle/>
+          <a:p>
+            <a:pPr algn="l">
+              <a:lnSpc>
+                <a:spcPct val="120000"/>
+              </a:lnSpc>
+              <a:spcAft>
+                <a:spcPts val="800"/>
+              </a:spcAft>
+            </a:pPr>
+            <a:r>
+              <a:rPr sz="850" b="0">
+                <a:solidFill>
+                  <a:srgbClr val="F6F2EA"/>
+                </a:solidFill>
+                <a:latin typeface="Segoe UI"/>
+              </a:rPr>
+              <a:t>Live demand from real postings,</a:t>
+            </a:r>
+            <a:br/>
+            <a:r>
+              <a:rPr sz="850" b="0">
+                <a:solidFill>
+                  <a:srgbClr val="F6F2EA"/>
+                </a:solidFill>
+                <a:latin typeface="Segoe UI"/>
+              </a:rPr>
+              <a:t>with the source and date.</a:t>
+            </a:r>
+          </a:p>
+        </p:txBody>
+      </p:sp>
+      <p:sp>
+        <p:nvSpPr>
+          <p:cNvPr id="11" name="TextBox 10"/>
+          <p:cNvSpPr txBox="1"/>
+          <p:nvPr/>
+        </p:nvSpPr>
+        <p:spPr>
+          <a:xfrm>
+            <a:off x="8275320" y="3200400"/>
+            <a:ext cx="548640" cy="274320"/>
+          </a:xfrm>
+          <a:prstGeom prst="rect">
+            <a:avLst/>
+          </a:prstGeom>
+          <a:noFill/>
+        </p:spPr>
+        <p:txBody>
+          <a:bodyPr wrap="square" anchor="t">
+            <a:spAutoFit/>
+          </a:bodyPr>
+          <a:lstStyle/>
+          <a:p>
+            <a:pPr algn="l">
+              <a:lnSpc>
+                <a:spcPct val="125000"/>
+              </a:lnSpc>
+              <a:spcAft>
+                <a:spcPts val="800"/>
+              </a:spcAft>
+            </a:pPr>
+            <a:r>
+              <a:rPr sz="1100" b="1">
+                <a:solidFill>
+                  <a:srgbClr val="D98E77"/>
+                </a:solidFill>
+                <a:latin typeface="Segoe UI Semibold"/>
+              </a:rPr>
+              <a:t>02</a:t>
+            </a:r>
+          </a:p>
+        </p:txBody>
+      </p:sp>
+      <p:sp>
+        <p:nvSpPr>
+          <p:cNvPr id="12" name="TextBox 11"/>
+          <p:cNvSpPr txBox="1"/>
+          <p:nvPr/>
+        </p:nvSpPr>
+        <p:spPr>
+          <a:xfrm>
+            <a:off x="8778240" y="3172968"/>
+            <a:ext cx="3200400" cy="274320"/>
+          </a:xfrm>
+          <a:prstGeom prst="rect">
+            <a:avLst/>
+          </a:prstGeom>
+          <a:noFill/>
+        </p:spPr>
+        <p:txBody>
+          <a:bodyPr wrap="square" anchor="t">
+            <a:spAutoFit/>
+          </a:bodyPr>
+          <a:lstStyle/>
+          <a:p>
+            <a:pPr algn="l">
+              <a:lnSpc>
+                <a:spcPct val="125000"/>
+              </a:lnSpc>
+              <a:spcAft>
+                <a:spcPts val="800"/>
+              </a:spcAft>
+            </a:pPr>
+            <a:r>
+              <a:rPr sz="1200" b="1">
+                <a:solidFill>
+                  <a:srgbClr val="FFFFFF"/>
+                </a:solidFill>
+                <a:latin typeface="Segoe UI Semibold"/>
+              </a:rPr>
+              <a:t>Your profile</a:t>
+            </a:r>
+          </a:p>
+        </p:txBody>
+      </p:sp>
+      <p:sp>
+        <p:nvSpPr>
+          <p:cNvPr id="13" name="TextBox 12"/>
+          <p:cNvSpPr txBox="1"/>
+          <p:nvPr/>
+        </p:nvSpPr>
+        <p:spPr>
+          <a:xfrm>
+            <a:off x="8778240" y="3456432"/>
+            <a:ext cx="3200400" cy="548640"/>
+          </a:xfrm>
+          <a:prstGeom prst="rect">
+            <a:avLst/>
+          </a:prstGeom>
+          <a:noFill/>
+        </p:spPr>
+        <p:txBody>
+          <a:bodyPr wrap="square" anchor="t">
+            <a:spAutoFit/>
+          </a:bodyPr>
+          <a:lstStyle/>
+          <a:p>
+            <a:pPr algn="l">
+              <a:lnSpc>
+                <a:spcPct val="120000"/>
+              </a:lnSpc>
+              <a:spcAft>
+                <a:spcPts val="800"/>
+              </a:spcAft>
+            </a:pPr>
+            <a:r>
+              <a:rPr sz="850" b="0">
+                <a:solidFill>
+                  <a:srgbClr val="F6F2EA"/>
+                </a:solidFill>
+                <a:latin typeface="Segoe UI"/>
+              </a:rPr>
+              <a:t>The AI expands what you write</a:t>
+            </a:r>
+            <a:br/>
+            <a:r>
+              <a:rPr sz="850" b="0">
+                <a:solidFill>
+                  <a:srgbClr val="F6F2EA"/>
+                </a:solidFill>
+                <a:latin typeface="Segoe UI"/>
+              </a:rPr>
+              <a:t>into skills you choose.</a:t>
+            </a:r>
+          </a:p>
+        </p:txBody>
+      </p:sp>
+      <p:sp>
+        <p:nvSpPr>
+          <p:cNvPr id="14" name="TextBox 13"/>
+          <p:cNvSpPr txBox="1"/>
+          <p:nvPr/>
+        </p:nvSpPr>
+        <p:spPr>
+          <a:xfrm>
+            <a:off x="8275320" y="4160520"/>
+            <a:ext cx="548640" cy="274320"/>
+          </a:xfrm>
+          <a:prstGeom prst="rect">
+            <a:avLst/>
+          </a:prstGeom>
+          <a:noFill/>
+        </p:spPr>
+        <p:txBody>
+          <a:bodyPr wrap="square" anchor="t">
+            <a:spAutoFit/>
+          </a:bodyPr>
+          <a:lstStyle/>
+          <a:p>
+            <a:pPr algn="l">
+              <a:lnSpc>
+                <a:spcPct val="125000"/>
+              </a:lnSpc>
+              <a:spcAft>
+                <a:spcPts val="800"/>
+              </a:spcAft>
+            </a:pPr>
+            <a:r>
+              <a:rPr sz="1100" b="1">
+                <a:solidFill>
+                  <a:srgbClr val="D98E77"/>
+                </a:solidFill>
+                <a:latin typeface="Segoe UI Semibold"/>
+              </a:rPr>
+              <a:t>03</a:t>
+            </a:r>
+          </a:p>
+        </p:txBody>
+      </p:sp>
+      <p:sp>
+        <p:nvSpPr>
+          <p:cNvPr id="15" name="TextBox 14"/>
+          <p:cNvSpPr txBox="1"/>
+          <p:nvPr/>
+        </p:nvSpPr>
+        <p:spPr>
+          <a:xfrm>
+            <a:off x="8778240" y="4133088"/>
+            <a:ext cx="3200400" cy="274320"/>
+          </a:xfrm>
+          <a:prstGeom prst="rect">
+            <a:avLst/>
+          </a:prstGeom>
+          <a:noFill/>
+        </p:spPr>
+        <p:txBody>
+          <a:bodyPr wrap="square" anchor="t">
+            <a:spAutoFit/>
+          </a:bodyPr>
+          <a:lstStyle/>
+          <a:p>
+            <a:pPr algn="l">
+              <a:lnSpc>
+                <a:spcPct val="125000"/>
+              </a:lnSpc>
+              <a:spcAft>
+                <a:spcPts val="800"/>
+              </a:spcAft>
+            </a:pPr>
+            <a:r>
+              <a:rPr sz="1200" b="1">
+                <a:solidFill>
+                  <a:srgbClr val="FFFFFF"/>
+                </a:solidFill>
+                <a:latin typeface="Segoe UI Semibold"/>
+              </a:rPr>
+              <a:t>Future roles</a:t>
+            </a:r>
+          </a:p>
+        </p:txBody>
+      </p:sp>
+      <p:sp>
+        <p:nvSpPr>
+          <p:cNvPr id="16" name="TextBox 15"/>
+          <p:cNvSpPr txBox="1"/>
+          <p:nvPr/>
+        </p:nvSpPr>
+        <p:spPr>
+          <a:xfrm>
+            <a:off x="8778240" y="4416552"/>
+            <a:ext cx="3200400" cy="548640"/>
+          </a:xfrm>
+          <a:prstGeom prst="rect">
+            <a:avLst/>
+          </a:prstGeom>
+          <a:noFill/>
+        </p:spPr>
+        <p:txBody>
+          <a:bodyPr wrap="square" anchor="t">
+            <a:spAutoFit/>
+          </a:bodyPr>
+          <a:lstStyle/>
+          <a:p>
+            <a:pPr algn="l">
+              <a:lnSpc>
+                <a:spcPct val="120000"/>
+              </a:lnSpc>
+              <a:spcAft>
+                <a:spcPts val="800"/>
+              </a:spcAft>
+            </a:pPr>
+            <a:r>
+              <a:rPr sz="850" b="0">
+                <a:solidFill>
+                  <a:srgbClr val="F6F2EA"/>
+                </a:solidFill>
+                <a:latin typeface="Segoe UI"/>
+              </a:rPr>
+              <a:t>Occupations proposed from your</a:t>
+            </a:r>
+            <a:br/>
+            <a:r>
+              <a:rPr sz="850" b="0">
+                <a:solidFill>
+                  <a:srgbClr val="F6F2EA"/>
+                </a:solidFill>
+                <a:latin typeface="Segoe UI"/>
+              </a:rPr>
+              <a:t>profile — not a fixed catalogue.</a:t>
+            </a:r>
+          </a:p>
+        </p:txBody>
+      </p:sp>
+      <p:sp>
+        <p:nvSpPr>
+          <p:cNvPr id="17" name="TextBox 16"/>
+          <p:cNvSpPr txBox="1"/>
+          <p:nvPr/>
+        </p:nvSpPr>
+        <p:spPr>
+          <a:xfrm>
+            <a:off x="8275320" y="5120640"/>
+            <a:ext cx="548640" cy="274320"/>
+          </a:xfrm>
+          <a:prstGeom prst="rect">
+            <a:avLst/>
+          </a:prstGeom>
+          <a:noFill/>
+        </p:spPr>
+        <p:txBody>
+          <a:bodyPr wrap="square" anchor="t">
+            <a:spAutoFit/>
+          </a:bodyPr>
+          <a:lstStyle/>
+          <a:p>
+            <a:pPr algn="l">
+              <a:lnSpc>
+                <a:spcPct val="125000"/>
+              </a:lnSpc>
+              <a:spcAft>
+                <a:spcPts val="800"/>
+              </a:spcAft>
+            </a:pPr>
+            <a:r>
+              <a:rPr sz="1100" b="1">
+                <a:solidFill>
+                  <a:srgbClr val="D98E77"/>
+                </a:solidFill>
+                <a:latin typeface="Segoe UI Semibold"/>
+              </a:rPr>
+              <a:t>04</a:t>
+            </a:r>
+          </a:p>
+        </p:txBody>
+      </p:sp>
+      <p:sp>
+        <p:nvSpPr>
+          <p:cNvPr id="18" name="TextBox 17"/>
+          <p:cNvSpPr txBox="1"/>
+          <p:nvPr/>
+        </p:nvSpPr>
+        <p:spPr>
+          <a:xfrm>
+            <a:off x="8778240" y="5093208"/>
+            <a:ext cx="3200400" cy="274320"/>
+          </a:xfrm>
+          <a:prstGeom prst="rect">
+            <a:avLst/>
+          </a:prstGeom>
+          <a:noFill/>
+        </p:spPr>
+        <p:txBody>
+          <a:bodyPr wrap="square" anchor="t">
+            <a:spAutoFit/>
+          </a:bodyPr>
+          <a:lstStyle/>
+          <a:p>
+            <a:pPr algn="l">
+              <a:lnSpc>
+                <a:spcPct val="125000"/>
+              </a:lnSpc>
+              <a:spcAft>
+                <a:spcPts val="800"/>
+              </a:spcAft>
+            </a:pPr>
+            <a:r>
+              <a:rPr sz="1200" b="1">
+                <a:solidFill>
+                  <a:srgbClr val="FFFFFF"/>
+                </a:solidFill>
+                <a:latin typeface="Segoe UI Semibold"/>
+              </a:rPr>
+              <a:t>Learning path</a:t>
+            </a:r>
+          </a:p>
+        </p:txBody>
+      </p:sp>
+      <p:sp>
+        <p:nvSpPr>
+          <p:cNvPr id="19" name="TextBox 18"/>
+          <p:cNvSpPr txBox="1"/>
+          <p:nvPr/>
+        </p:nvSpPr>
+        <p:spPr>
+          <a:xfrm>
+            <a:off x="8778240" y="5376672"/>
+            <a:ext cx="3200400" cy="548640"/>
+          </a:xfrm>
+          <a:prstGeom prst="rect">
+            <a:avLst/>
+          </a:prstGeom>
+          <a:noFill/>
+        </p:spPr>
+        <p:txBody>
+          <a:bodyPr wrap="square" anchor="t">
+            <a:spAutoFit/>
+          </a:bodyPr>
+          <a:lstStyle/>
+          <a:p>
+            <a:pPr algn="l">
+              <a:lnSpc>
+                <a:spcPct val="120000"/>
+              </a:lnSpc>
+              <a:spcAft>
+                <a:spcPts val="800"/>
+              </a:spcAft>
+            </a:pPr>
+            <a:r>
+              <a:rPr sz="850" b="0">
+                <a:solidFill>
+                  <a:srgbClr val="F6F2EA"/>
+                </a:solidFill>
+                <a:latin typeface="Segoe UI"/>
+              </a:rPr>
+              <a:t>A plan fitted to your weekly hours,</a:t>
+            </a:r>
+            <a:br/>
+            <a:r>
+              <a:rPr sz="850" b="0">
+                <a:solidFill>
+                  <a:srgbClr val="F6F2EA"/>
+                </a:solidFill>
+                <a:latin typeface="Segoe UI"/>
+              </a:rPr>
+              <a:t>with verified course links.</a:t>
+            </a:r>
+          </a:p>
+        </p:txBody>
+      </p:sp>
+      <p:sp>
+        <p:nvSpPr>
+          <p:cNvPr id="20" name="TextBox 19"/>
+          <p:cNvSpPr txBox="1"/>
+          <p:nvPr/>
+        </p:nvSpPr>
+        <p:spPr>
+          <a:xfrm>
+            <a:off x="777240" y="6263640"/>
+            <a:ext cx="10607040" cy="274320"/>
+          </a:xfrm>
+          <a:prstGeom prst="rect">
+            <a:avLst/>
+          </a:prstGeom>
+          <a:noFill/>
+        </p:spPr>
+        <p:txBody>
+          <a:bodyPr wrap="square" anchor="t">
+            <a:spAutoFit/>
+          </a:bodyPr>
+          <a:lstStyle/>
+          <a:p>
+            <a:pPr algn="l">
+              <a:lnSpc>
+                <a:spcPct val="125000"/>
+              </a:lnSpc>
+              <a:spcAft>
+                <a:spcPts val="800"/>
+              </a:spcAft>
+            </a:pPr>
+            <a:r>
+              <a:rPr sz="900" b="0">
+                <a:solidFill>
+                  <a:srgbClr val="9AB0AB"/>
+                </a:solidFill>
+                <a:latin typeface="Segoe UI"/>
+              </a:rPr>
+              <a:t>Same page on phone, tablet and desktop</a:t>
+            </a:r>
+          </a:p>
+        </p:txBody>
+      </p:sp>
+      <p:sp>
+        <p:nvSpPr>
+          <p:cNvPr id="21" name="TextBox 20"/>
+          <p:cNvSpPr txBox="1"/>
+          <p:nvPr/>
+        </p:nvSpPr>
+        <p:spPr>
+          <a:xfrm>
+            <a:off x="10591495" y="6263640"/>
+            <a:ext cx="822960" cy="274320"/>
+          </a:xfrm>
+          <a:prstGeom prst="rect">
+            <a:avLst/>
+          </a:prstGeom>
+          <a:noFill/>
+        </p:spPr>
+        <p:txBody>
+          <a:bodyPr wrap="square" anchor="t">
+            <a:spAutoFit/>
+          </a:bodyPr>
+          <a:lstStyle/>
+          <a:p>
+            <a:pPr algn="r">
+              <a:lnSpc>
+                <a:spcPct val="125000"/>
+              </a:lnSpc>
+              <a:spcAft>
+                <a:spcPts val="800"/>
+              </a:spcAft>
+            </a:pPr>
+            <a:r>
+              <a:rPr sz="900" b="0">
+                <a:solidFill>
+                  <a:srgbClr val="9AB0AB"/>
+                </a:solidFill>
+                <a:latin typeface="Segoe UI"/>
+              </a:rPr>
+              <a:t>04 / 12</a:t>
             </a:r>
           </a:p>
         </p:txBody>
@@ -4251,56 +7956,14 @@
       <p:grpSpPr/>
       <p:sp>
         <p:nvSpPr>
-          <p:cNvPr id="2" name="TextBox 1"/>
-          <p:cNvSpPr txBox="1"/>
-          <p:nvPr/>
-        </p:nvSpPr>
-        <p:spPr>
-          <a:xfrm>
-            <a:off x="822960" y="502920"/>
-            <a:ext cx="8229600" cy="274320"/>
-          </a:xfrm>
-          <a:prstGeom prst="rect">
-            <a:avLst/>
-          </a:prstGeom>
-          <a:noFill/>
-        </p:spPr>
-        <p:txBody>
-          <a:bodyPr wrap="square">
-            <a:spAutoFit/>
-          </a:bodyPr>
-          <a:lstStyle/>
-          <a:p>
-            <a:pPr>
-              <a:lnSpc>
-                <a:spcPct val="115000"/>
-              </a:lnSpc>
-              <a:spcAft>
-                <a:spcPts val="600"/>
-              </a:spcAft>
-            </a:pPr>
-            <a:r>
-              <a:rPr sz="1100" b="1">
-                <a:solidFill>
-                  <a:srgbClr val="5B6B67"/>
-                </a:solidFill>
-                <a:latin typeface="Arial"/>
-              </a:rPr>
-              <a:t>THE AI, AND WHAT IT MAY NOT DO</a:t>
-            </a:r>
-          </a:p>
-        </p:txBody>
-      </p:sp>
-      <p:sp>
-        <p:nvSpPr>
-          <p:cNvPr id="3" name="Rectangle 2"/>
+          <p:cNvPr id="2" name="Rectangle 1"/>
           <p:cNvSpPr/>
           <p:nvPr/>
         </p:nvSpPr>
         <p:spPr>
           <a:xfrm>
-            <a:off x="822960" y="822960"/>
-            <a:ext cx="1005840" cy="45720"/>
+            <a:off x="777240" y="566928"/>
+            <a:ext cx="310896" cy="31750"/>
           </a:xfrm>
           <a:prstGeom prst="rect">
             <a:avLst/>
@@ -4336,198 +7999,398 @@
       </p:sp>
       <p:sp>
         <p:nvSpPr>
+          <p:cNvPr id="3" name="TextBox 2"/>
+          <p:cNvSpPr txBox="1"/>
+          <p:nvPr/>
+        </p:nvSpPr>
+        <p:spPr>
+          <a:xfrm>
+            <a:off x="1234440" y="457200"/>
+            <a:ext cx="8229600" cy="274320"/>
+          </a:xfrm>
+          <a:prstGeom prst="rect">
+            <a:avLst/>
+          </a:prstGeom>
+          <a:noFill/>
+        </p:spPr>
+        <p:txBody>
+          <a:bodyPr wrap="square" anchor="t">
+            <a:spAutoFit/>
+          </a:bodyPr>
+          <a:lstStyle/>
+          <a:p>
+            <a:pPr algn="l">
+              <a:lnSpc>
+                <a:spcPct val="125000"/>
+              </a:lnSpc>
+              <a:spcAft>
+                <a:spcPts val="800"/>
+              </a:spcAft>
+            </a:pPr>
+            <a:r>
+              <a:rPr sz="1050" b="1">
+                <a:solidFill>
+                  <a:srgbClr val="5B6B63"/>
+                </a:solidFill>
+                <a:latin typeface="Segoe UI Semibold"/>
+              </a:rPr>
+              <a:t>CHECKPOINT 01 · MARKET SIGNALS</a:t>
+            </a:r>
+          </a:p>
+        </p:txBody>
+      </p:sp>
+      <p:sp>
+        <p:nvSpPr>
           <p:cNvPr id="4" name="TextBox 3"/>
           <p:cNvSpPr txBox="1"/>
           <p:nvPr/>
         </p:nvSpPr>
         <p:spPr>
           <a:xfrm>
-            <a:off x="822960" y="960120"/>
-            <a:ext cx="10515600" cy="1463040"/>
-          </a:xfrm>
-          <a:prstGeom prst="rect">
-            <a:avLst/>
-          </a:prstGeom>
-          <a:noFill/>
-        </p:spPr>
-        <p:txBody>
-          <a:bodyPr wrap="square">
-            <a:spAutoFit/>
-          </a:bodyPr>
-          <a:lstStyle/>
-          <a:p>
-            <a:pPr>
+            <a:off x="777240" y="960120"/>
+            <a:ext cx="6035040" cy="1554480"/>
+          </a:xfrm>
+          <a:prstGeom prst="rect">
+            <a:avLst/>
+          </a:prstGeom>
+          <a:noFill/>
+        </p:spPr>
+        <p:txBody>
+          <a:bodyPr wrap="square" anchor="t">
+            <a:spAutoFit/>
+          </a:bodyPr>
+          <a:lstStyle/>
+          <a:p>
+            <a:pPr algn="l">
+              <a:lnSpc>
+                <a:spcPct val="105000"/>
+              </a:lnSpc>
+              <a:spcAft>
+                <a:spcPts val="800"/>
+              </a:spcAft>
+            </a:pPr>
+            <a:r>
+              <a:rPr sz="3400" b="1">
+                <a:solidFill>
+                  <a:srgbClr val="1F3A37"/>
+                </a:solidFill>
+                <a:latin typeface="Segoe UI Semibold"/>
+              </a:rPr>
+              <a:t>Evidence, with its source attached.</a:t>
+            </a:r>
+          </a:p>
+        </p:txBody>
+      </p:sp>
+      <p:sp>
+        <p:nvSpPr>
+          <p:cNvPr id="5" name="TextBox 4"/>
+          <p:cNvSpPr txBox="1"/>
+          <p:nvPr/>
+        </p:nvSpPr>
+        <p:spPr>
+          <a:xfrm>
+            <a:off x="777240" y="2514600"/>
+            <a:ext cx="6035040" cy="3108960"/>
+          </a:xfrm>
+          <a:prstGeom prst="rect">
+            <a:avLst/>
+          </a:prstGeom>
+          <a:noFill/>
+        </p:spPr>
+        <p:txBody>
+          <a:bodyPr wrap="square" anchor="t">
+            <a:spAutoFit/>
+          </a:bodyPr>
+          <a:lstStyle/>
+          <a:p>
+            <a:pPr algn="l">
+              <a:lnSpc>
+                <a:spcPct val="135000"/>
+              </a:lnSpc>
+              <a:spcAft>
+                <a:spcPts val="1000"/>
+              </a:spcAft>
+            </a:pPr>
+            <a:r>
+              <a:rPr sz="1300" b="0">
+                <a:solidFill>
+                  <a:srgbClr val="1F3A37"/>
+                </a:solidFill>
+                <a:latin typeface="Segoe UI"/>
+              </a:rPr>
+              <a:t>Three hundred recent public postings, refreshed on demand.</a:t>
+            </a:r>
+          </a:p>
+          <a:p>
+            <a:pPr algn="l">
+              <a:lnSpc>
+                <a:spcPct val="135000"/>
+              </a:lnSpc>
+              <a:spcAft>
+                <a:spcPts val="1000"/>
+              </a:spcAft>
+            </a:pPr>
+            <a:r>
+              <a:rPr sz="1300" b="0">
+                <a:solidFill>
+                  <a:srgbClr val="1F3A37"/>
+                </a:solidFill>
+                <a:latin typeface="Segoe UI"/>
+              </a:rPr>
+              <a:t>The most requested skills plotted week by week — not a shortlist of our own roles.</a:t>
+            </a:r>
+          </a:p>
+          <a:p>
+            <a:pPr algn="l">
+              <a:lnSpc>
+                <a:spcPct val="135000"/>
+              </a:lnSpc>
+              <a:spcAft>
+                <a:spcPts val="1000"/>
+              </a:spcAft>
+            </a:pPr>
+            <a:r>
+              <a:rPr sz="1300" b="0">
+                <a:solidFill>
+                  <a:srgbClr val="1F3A37"/>
+                </a:solidFill>
+                <a:latin typeface="Segoe UI"/>
+              </a:rPr>
+              <a:t>Source, fetch time and sample size printed on the chart.</a:t>
+            </a:r>
+          </a:p>
+          <a:p>
+            <a:pPr algn="l">
+              <a:lnSpc>
+                <a:spcPct val="135000"/>
+              </a:lnSpc>
+              <a:spcAft>
+                <a:spcPts val="1000"/>
+              </a:spcAft>
+            </a:pPr>
+            <a:r>
+              <a:rPr sz="1300" b="0">
+                <a:solidFill>
+                  <a:srgbClr val="1F3A37"/>
+                </a:solidFill>
+                <a:latin typeface="Segoe UI"/>
+              </a:rPr>
+              <a:t>Six sourced labour-market signals from BLS and WEF, each with a source note.</a:t>
+            </a:r>
+          </a:p>
+          <a:p>
+            <a:pPr algn="l">
+              <a:lnSpc>
+                <a:spcPct val="135000"/>
+              </a:lnSpc>
+              <a:spcAft>
+                <a:spcPts val="1000"/>
+              </a:spcAft>
+            </a:pPr>
+            <a:r>
+              <a:rPr sz="1300" b="0">
+                <a:solidFill>
+                  <a:srgbClr val="1F3A37"/>
+                </a:solidFill>
+                <a:latin typeface="Segoe UI"/>
+              </a:rPr>
+              <a:t>The screen says what it is not: a global feed, not Malaysian vacancy counts.</a:t>
+            </a:r>
+          </a:p>
+        </p:txBody>
+      </p:sp>
+      <p:pic>
+        <p:nvPicPr>
+          <p:cNvPr id="6" name="Picture 5" descr="device-tablet.png"/>
+          <p:cNvPicPr>
+            <a:picLocks noChangeAspect="1"/>
+          </p:cNvPicPr>
+          <p:nvPr/>
+        </p:nvPicPr>
+        <p:blipFill>
+          <a:blip r:embed="rId2"/>
+          <a:stretch>
+            <a:fillRect/>
+          </a:stretch>
+        </p:blipFill>
+        <p:spPr>
+          <a:xfrm>
+            <a:off x="7850297" y="2286000"/>
+            <a:ext cx="3564158" cy="2743200"/>
+          </a:xfrm>
+          <a:prstGeom prst="rect">
+            <a:avLst/>
+          </a:prstGeom>
+        </p:spPr>
+      </p:pic>
+      <p:sp>
+        <p:nvSpPr>
+          <p:cNvPr id="7" name="Rounded Rectangle 6"/>
+          <p:cNvSpPr/>
+          <p:nvPr/>
+        </p:nvSpPr>
+        <p:spPr>
+          <a:xfrm>
+            <a:off x="777240" y="5532120"/>
+            <a:ext cx="10607040" cy="566928"/>
+          </a:xfrm>
+          <a:prstGeom prst="roundRect">
+            <a:avLst>
+              <a:gd name="adj" fmla="val 14000"/>
+            </a:avLst>
+          </a:prstGeom>
+          <a:solidFill>
+            <a:srgbClr val="ECE5D8"/>
+          </a:solidFill>
+          <a:ln>
+            <a:noFill/>
+          </a:ln>
+          <a:effectLst/>
+        </p:spPr>
+        <p:style>
+          <a:lnRef idx="1">
+            <a:schemeClr val="accent1"/>
+          </a:lnRef>
+          <a:fillRef idx="3">
+            <a:schemeClr val="accent1"/>
+          </a:fillRef>
+          <a:effectRef idx="2">
+            <a:schemeClr val="accent1"/>
+          </a:effectRef>
+          <a:fontRef idx="minor">
+            <a:schemeClr val="lt1"/>
+          </a:fontRef>
+        </p:style>
+        <p:txBody>
+          <a:bodyPr rtlCol="0" anchor="ctr"/>
+          <a:lstStyle/>
+          <a:p>
+            <a:pPr algn="ctr"/>
+          </a:p>
+        </p:txBody>
+      </p:sp>
+      <p:sp>
+        <p:nvSpPr>
+          <p:cNvPr id="8" name="TextBox 7"/>
+          <p:cNvSpPr txBox="1"/>
+          <p:nvPr/>
+        </p:nvSpPr>
+        <p:spPr>
+          <a:xfrm>
+            <a:off x="1005840" y="5632704"/>
+            <a:ext cx="10149840" cy="365760"/>
+          </a:xfrm>
+          <a:prstGeom prst="rect">
+            <a:avLst/>
+          </a:prstGeom>
+          <a:noFill/>
+        </p:spPr>
+        <p:txBody>
+          <a:bodyPr wrap="square" anchor="t">
+            <a:spAutoFit/>
+          </a:bodyPr>
+          <a:lstStyle/>
+          <a:p>
+            <a:pPr algn="l">
               <a:lnSpc>
                 <a:spcPct val="115000"/>
               </a:lnSpc>
               <a:spcAft>
-                <a:spcPts val="600"/>
-              </a:spcAft>
-            </a:pPr>
-            <a:r>
-              <a:rPr sz="3400" b="1">
-                <a:solidFill>
-                  <a:srgbClr val="1F3A37"/>
-                </a:solidFill>
-                <a:latin typeface="Arial"/>
-              </a:rPr>
-              <a:t>Two model calls. A closed world. No invented facts.</a:t>
-            </a:r>
-          </a:p>
-        </p:txBody>
-      </p:sp>
-      <p:sp>
-        <p:nvSpPr>
-          <p:cNvPr id="5" name="TextBox 4"/>
-          <p:cNvSpPr txBox="1"/>
-          <p:nvPr/>
-        </p:nvSpPr>
-        <p:spPr>
-          <a:xfrm>
-            <a:off x="822960" y="2606040"/>
-            <a:ext cx="10515600" cy="3840480"/>
-          </a:xfrm>
-          <a:prstGeom prst="rect">
-            <a:avLst/>
-          </a:prstGeom>
-          <a:noFill/>
-        </p:spPr>
-        <p:txBody>
-          <a:bodyPr wrap="square">
-            <a:spAutoFit/>
-          </a:bodyPr>
-          <a:lstStyle/>
-          <a:p>
-            <a:pPr>
-              <a:lnSpc>
-                <a:spcPct val="130000"/>
-              </a:lnSpc>
-              <a:spcAft>
-                <a:spcPts val="600"/>
-              </a:spcAft>
-            </a:pPr>
-            <a:r>
-              <a:rPr sz="1600" b="0">
-                <a:solidFill>
-                  <a:srgbClr val="1F3A37"/>
-                </a:solidFill>
-                <a:latin typeface="Arial"/>
-              </a:rPr>
-              <a:t>The model sees this person’s profile AND our catalogue — five roles, twenty learning steps.</a:t>
-            </a:r>
-          </a:p>
-          <a:p>
-            <a:pPr>
-              <a:lnSpc>
-                <a:spcPct val="130000"/>
-              </a:lnSpc>
-              <a:spcAft>
-                <a:spcPts val="600"/>
-              </a:spcAft>
-            </a:pPr>
-            <a:r>
-              <a:rPr sz="1600" b="0">
-                <a:solidFill>
-                  <a:srgbClr val="1F3A37"/>
-                </a:solidFill>
-                <a:latin typeface="Arial"/>
-              </a:rPr>
-              <a:t>It chooses, explains and sequences. Every role and module ID it returns is validated server-side;</a:t>
-            </a:r>
-          </a:p>
-          <a:p>
-            <a:pPr>
-              <a:lnSpc>
-                <a:spcPct val="130000"/>
-              </a:lnSpc>
-              <a:spcAft>
-                <a:spcPts val="600"/>
-              </a:spcAft>
-            </a:pPr>
-            <a:r>
-              <a:rPr sz="1600" b="0">
-                <a:solidFill>
-                  <a:srgbClr val="1F3A37"/>
-                </a:solidFill>
-                <a:latin typeface="Arial"/>
-              </a:rPr>
-              <a:t>unknown IDs are discarded. It cannot add a course, a provider or a statistic.</a:t>
-            </a:r>
-          </a:p>
-          <a:p>
-            <a:pPr>
-              <a:lnSpc>
-                <a:spcPct val="130000"/>
-              </a:lnSpc>
-              <a:spcAft>
-                <a:spcPts val="600"/>
-              </a:spcAft>
-            </a:pPr>
-            <a:r>
-              <a:rPr sz="1600" b="0">
-                <a:solidFill>
-                  <a:srgbClr val="1F3A37"/>
-                </a:solidFill>
-                <a:latin typeface="Arial"/>
-              </a:rPr>
-              <a:t>Its fit score is displayed next to the deterministic estimate — disagreement is visible, not hidden.</a:t>
-            </a:r>
-          </a:p>
-          <a:p>
-            <a:pPr>
-              <a:lnSpc>
-                <a:spcPct val="130000"/>
-              </a:lnSpc>
-              <a:spcAft>
-                <a:spcPts val="600"/>
-              </a:spcAft>
-            </a:pPr>
-            <a:r>
-              <a:rPr sz="1600" b="0">
-                <a:solidFill>
-                  <a:srgbClr val="1F3A37"/>
-                </a:solidFill>
-                <a:latin typeface="Arial"/>
-              </a:rPr>
-              <a:t>Beyond the catalogue, an exploratory tier proposes real occupations with a checkable reference</a:t>
-            </a:r>
-          </a:p>
-          <a:p>
-            <a:pPr>
-              <a:lnSpc>
-                <a:spcPct val="130000"/>
-              </a:lnSpc>
-              <a:spcAft>
-                <a:spcPts val="600"/>
-              </a:spcAft>
-            </a:pPr>
-            <a:r>
-              <a:rPr sz="1600" b="0">
-                <a:solidFill>
-                  <a:srgbClr val="1F3A37"/>
-                </a:solidFill>
-                <a:latin typeface="Arial"/>
-              </a:rPr>
-              <a:t>and an explicit “no verified pathway” badge.</a:t>
-            </a:r>
-          </a:p>
-          <a:p>
-            <a:pPr>
-              <a:lnSpc>
-                <a:spcPct val="130000"/>
-              </a:lnSpc>
-              <a:spcAft>
-                <a:spcPts val="600"/>
-              </a:spcAft>
-            </a:pPr>
-            <a:r>
-              <a:rPr sz="1600" b="0">
-                <a:solidFill>
-                  <a:srgbClr val="1F3A37"/>
-                </a:solidFill>
-                <a:latin typeface="Arial"/>
-              </a:rPr>
-              <a:t>Prompt injection is treated as data: delimited input, schema-validated output, vocabulary enforced.</a:t>
+                <a:spcPts val="800"/>
+              </a:spcAft>
+            </a:pPr>
+            <a:r>
+              <a:rPr sz="1000" b="0">
+                <a:solidFill>
+                  <a:srgbClr val="5B6B63"/>
+                </a:solidFill>
+                <a:latin typeface="Segoe UI"/>
+              </a:rPr>
+              <a:t>Numbers that cannot be checked are not shown at all.</a:t>
+            </a:r>
+          </a:p>
+        </p:txBody>
+      </p:sp>
+      <p:sp>
+        <p:nvSpPr>
+          <p:cNvPr id="9" name="TextBox 8"/>
+          <p:cNvSpPr txBox="1"/>
+          <p:nvPr/>
+        </p:nvSpPr>
+        <p:spPr>
+          <a:xfrm>
+            <a:off x="777240" y="6263640"/>
+            <a:ext cx="10607040" cy="274320"/>
+          </a:xfrm>
+          <a:prstGeom prst="rect">
+            <a:avLst/>
+          </a:prstGeom>
+          <a:noFill/>
+        </p:spPr>
+        <p:txBody>
+          <a:bodyPr wrap="square" anchor="t">
+            <a:spAutoFit/>
+          </a:bodyPr>
+          <a:lstStyle/>
+          <a:p>
+            <a:pPr algn="l">
+              <a:lnSpc>
+                <a:spcPct val="125000"/>
+              </a:lnSpc>
+              <a:spcAft>
+                <a:spcPts val="800"/>
+              </a:spcAft>
+            </a:pPr>
+            <a:r>
+              <a:rPr sz="900" b="0">
+                <a:solidFill>
+                  <a:srgbClr val="5B6B63"/>
+                </a:solidFill>
+                <a:latin typeface="Segoe UI"/>
+              </a:rPr>
+              <a:t>Checkpoint 01</a:t>
+            </a:r>
+          </a:p>
+        </p:txBody>
+      </p:sp>
+      <p:sp>
+        <p:nvSpPr>
+          <p:cNvPr id="10" name="TextBox 9"/>
+          <p:cNvSpPr txBox="1"/>
+          <p:nvPr/>
+        </p:nvSpPr>
+        <p:spPr>
+          <a:xfrm>
+            <a:off x="10591495" y="6263640"/>
+            <a:ext cx="822960" cy="274320"/>
+          </a:xfrm>
+          <a:prstGeom prst="rect">
+            <a:avLst/>
+          </a:prstGeom>
+          <a:noFill/>
+        </p:spPr>
+        <p:txBody>
+          <a:bodyPr wrap="square" anchor="t">
+            <a:spAutoFit/>
+          </a:bodyPr>
+          <a:lstStyle/>
+          <a:p>
+            <a:pPr algn="r">
+              <a:lnSpc>
+                <a:spcPct val="125000"/>
+              </a:lnSpc>
+              <a:spcAft>
+                <a:spcPts val="800"/>
+              </a:spcAft>
+            </a:pPr>
+            <a:r>
+              <a:rPr sz="900" b="0">
+                <a:solidFill>
+                  <a:srgbClr val="5B6B63"/>
+                </a:solidFill>
+                <a:latin typeface="Segoe UI"/>
+              </a:rPr>
+              <a:t>05 / 12</a:t>
             </a:r>
           </a:p>
         </p:txBody>
@@ -4560,56 +8423,14 @@
       <p:grpSpPr/>
       <p:sp>
         <p:nvSpPr>
-          <p:cNvPr id="2" name="TextBox 1"/>
-          <p:cNvSpPr txBox="1"/>
-          <p:nvPr/>
-        </p:nvSpPr>
-        <p:spPr>
-          <a:xfrm>
-            <a:off x="822960" y="502920"/>
-            <a:ext cx="8229600" cy="274320"/>
-          </a:xfrm>
-          <a:prstGeom prst="rect">
-            <a:avLst/>
-          </a:prstGeom>
-          <a:noFill/>
-        </p:spPr>
-        <p:txBody>
-          <a:bodyPr wrap="square">
-            <a:spAutoFit/>
-          </a:bodyPr>
-          <a:lstStyle/>
-          <a:p>
-            <a:pPr>
-              <a:lnSpc>
-                <a:spcPct val="115000"/>
-              </a:lnSpc>
-              <a:spcAft>
-                <a:spcPts val="600"/>
-              </a:spcAft>
-            </a:pPr>
-            <a:r>
-              <a:rPr sz="1100" b="1">
-                <a:solidFill>
-                  <a:srgbClr val="5B6B67"/>
-                </a:solidFill>
-                <a:latin typeface="Arial"/>
-              </a:rPr>
-              <a:t>THE SIGNAL LAYER</a:t>
-            </a:r>
-          </a:p>
-        </p:txBody>
-      </p:sp>
-      <p:sp>
-        <p:nvSpPr>
-          <p:cNvPr id="3" name="Rectangle 2"/>
+          <p:cNvPr id="2" name="Rectangle 1"/>
           <p:cNvSpPr/>
           <p:nvPr/>
         </p:nvSpPr>
         <p:spPr>
           <a:xfrm>
-            <a:off x="822960" y="822960"/>
-            <a:ext cx="1005840" cy="45720"/>
+            <a:off x="777240" y="566928"/>
+            <a:ext cx="310896" cy="31750"/>
           </a:xfrm>
           <a:prstGeom prst="rect">
             <a:avLst/>
@@ -4645,218 +8466,398 @@
       </p:sp>
       <p:sp>
         <p:nvSpPr>
+          <p:cNvPr id="3" name="TextBox 2"/>
+          <p:cNvSpPr txBox="1"/>
+          <p:nvPr/>
+        </p:nvSpPr>
+        <p:spPr>
+          <a:xfrm>
+            <a:off x="1234440" y="457200"/>
+            <a:ext cx="8229600" cy="274320"/>
+          </a:xfrm>
+          <a:prstGeom prst="rect">
+            <a:avLst/>
+          </a:prstGeom>
+          <a:noFill/>
+        </p:spPr>
+        <p:txBody>
+          <a:bodyPr wrap="square" anchor="t">
+            <a:spAutoFit/>
+          </a:bodyPr>
+          <a:lstStyle/>
+          <a:p>
+            <a:pPr algn="l">
+              <a:lnSpc>
+                <a:spcPct val="125000"/>
+              </a:lnSpc>
+              <a:spcAft>
+                <a:spcPts val="800"/>
+              </a:spcAft>
+            </a:pPr>
+            <a:r>
+              <a:rPr sz="1050" b="1">
+                <a:solidFill>
+                  <a:srgbClr val="5B6B63"/>
+                </a:solidFill>
+                <a:latin typeface="Segoe UI Semibold"/>
+              </a:rPr>
+              <a:t>CHECKPOINT 02 · YOUR PROFILE</a:t>
+            </a:r>
+          </a:p>
+        </p:txBody>
+      </p:sp>
+      <p:sp>
+        <p:nvSpPr>
           <p:cNvPr id="4" name="TextBox 3"/>
           <p:cNvSpPr txBox="1"/>
           <p:nvPr/>
         </p:nvSpPr>
         <p:spPr>
           <a:xfrm>
-            <a:off x="822960" y="960120"/>
-            <a:ext cx="10515600" cy="1463040"/>
-          </a:xfrm>
-          <a:prstGeom prst="rect">
-            <a:avLst/>
-          </a:prstGeom>
-          <a:noFill/>
-        </p:spPr>
-        <p:txBody>
-          <a:bodyPr wrap="square">
-            <a:spAutoFit/>
-          </a:bodyPr>
-          <a:lstStyle/>
-          <a:p>
-            <a:pPr>
+            <a:off x="777240" y="960120"/>
+            <a:ext cx="6035040" cy="1554480"/>
+          </a:xfrm>
+          <a:prstGeom prst="rect">
+            <a:avLst/>
+          </a:prstGeom>
+          <a:noFill/>
+        </p:spPr>
+        <p:txBody>
+          <a:bodyPr wrap="square" anchor="t">
+            <a:spAutoFit/>
+          </a:bodyPr>
+          <a:lstStyle/>
+          <a:p>
+            <a:pPr algn="l">
+              <a:lnSpc>
+                <a:spcPct val="105000"/>
+              </a:lnSpc>
+              <a:spcAft>
+                <a:spcPts val="800"/>
+              </a:spcAft>
+            </a:pPr>
+            <a:r>
+              <a:rPr sz="3400" b="1">
+                <a:solidFill>
+                  <a:srgbClr val="1F3A37"/>
+                </a:solidFill>
+                <a:latin typeface="Segoe UI Semibold"/>
+              </a:rPr>
+              <a:t>Name what you already bring.</a:t>
+            </a:r>
+          </a:p>
+        </p:txBody>
+      </p:sp>
+      <p:sp>
+        <p:nvSpPr>
+          <p:cNvPr id="5" name="TextBox 4"/>
+          <p:cNvSpPr txBox="1"/>
+          <p:nvPr/>
+        </p:nvSpPr>
+        <p:spPr>
+          <a:xfrm>
+            <a:off x="777240" y="2514600"/>
+            <a:ext cx="6035040" cy="3108960"/>
+          </a:xfrm>
+          <a:prstGeom prst="rect">
+            <a:avLst/>
+          </a:prstGeom>
+          <a:noFill/>
+        </p:spPr>
+        <p:txBody>
+          <a:bodyPr wrap="square" anchor="t">
+            <a:spAutoFit/>
+          </a:bodyPr>
+          <a:lstStyle/>
+          <a:p>
+            <a:pPr algn="l">
+              <a:lnSpc>
+                <a:spcPct val="135000"/>
+              </a:lnSpc>
+              <a:spcAft>
+                <a:spcPts val="1000"/>
+              </a:spcAft>
+            </a:pPr>
+            <a:r>
+              <a:rPr sz="1300" b="0">
+                <a:solidFill>
+                  <a:srgbClr val="1F3A37"/>
+                </a:solidFill>
+                <a:latin typeface="Segoe UI"/>
+              </a:rPr>
+              <a:t>Role, industry and years of experience, then one model call.</a:t>
+            </a:r>
+          </a:p>
+          <a:p>
+            <a:pPr algn="l">
+              <a:lnSpc>
+                <a:spcPct val="135000"/>
+              </a:lnSpc>
+              <a:spcAft>
+                <a:spcPts val="1000"/>
+              </a:spcAft>
+            </a:pPr>
+            <a:r>
+              <a:rPr sz="1300" b="0">
+                <a:solidFill>
+                  <a:srgbClr val="1F3A37"/>
+                </a:solidFill>
+                <a:latin typeface="Segoe UI"/>
+              </a:rPr>
+              <a:t>The AI expands that into concrete, selectable skills and tools.</a:t>
+            </a:r>
+          </a:p>
+          <a:p>
+            <a:pPr algn="l">
+              <a:lnSpc>
+                <a:spcPct val="135000"/>
+              </a:lnSpc>
+              <a:spcAft>
+                <a:spcPts val="1000"/>
+              </a:spcAft>
+            </a:pPr>
+            <a:r>
+              <a:rPr sz="1300" b="0">
+                <a:solidFill>
+                  <a:srgbClr val="1F3A37"/>
+                </a:solidFill>
+                <a:latin typeface="Segoe UI"/>
+              </a:rPr>
+              <a:t>Tools are pre-ticked because they are factual; judgement skills stay unticked.</a:t>
+            </a:r>
+          </a:p>
+          <a:p>
+            <a:pPr algn="l">
+              <a:lnSpc>
+                <a:spcPct val="135000"/>
+              </a:lnSpc>
+              <a:spcAft>
+                <a:spcPts val="1000"/>
+              </a:spcAft>
+            </a:pPr>
+            <a:r>
+              <a:rPr sz="1300" b="0">
+                <a:solidFill>
+                  <a:srgbClr val="1F3A37"/>
+                </a:solidFill>
+                <a:latin typeface="Segoe UI"/>
+              </a:rPr>
+              <a:t>Custom skills survive, so a title we never modelled still counts.</a:t>
+            </a:r>
+          </a:p>
+          <a:p>
+            <a:pPr algn="l">
+              <a:lnSpc>
+                <a:spcPct val="135000"/>
+              </a:lnSpc>
+              <a:spcAft>
+                <a:spcPts val="1000"/>
+              </a:spcAft>
+            </a:pPr>
+            <a:r>
+              <a:rPr sz="1300" b="0">
+                <a:solidFill>
+                  <a:srgbClr val="1F3A37"/>
+                </a:solidFill>
+                <a:latin typeface="Segoe UI"/>
+              </a:rPr>
+              <a:t>Weekly hours entered here become the schedule in checkpoint 04.</a:t>
+            </a:r>
+          </a:p>
+        </p:txBody>
+      </p:sp>
+      <p:pic>
+        <p:nvPicPr>
+          <p:cNvPr id="6" name="Picture 5" descr="device-phone.png"/>
+          <p:cNvPicPr>
+            <a:picLocks noChangeAspect="1"/>
+          </p:cNvPicPr>
+          <p:nvPr/>
+        </p:nvPicPr>
+        <p:blipFill>
+          <a:blip r:embed="rId2"/>
+          <a:stretch>
+            <a:fillRect/>
+          </a:stretch>
+        </p:blipFill>
+        <p:spPr>
+          <a:xfrm>
+            <a:off x="9977541" y="2286000"/>
+            <a:ext cx="1436914" cy="2743200"/>
+          </a:xfrm>
+          <a:prstGeom prst="rect">
+            <a:avLst/>
+          </a:prstGeom>
+        </p:spPr>
+      </p:pic>
+      <p:sp>
+        <p:nvSpPr>
+          <p:cNvPr id="7" name="Rounded Rectangle 6"/>
+          <p:cNvSpPr/>
+          <p:nvPr/>
+        </p:nvSpPr>
+        <p:spPr>
+          <a:xfrm>
+            <a:off x="777240" y="5532120"/>
+            <a:ext cx="10607040" cy="566928"/>
+          </a:xfrm>
+          <a:prstGeom prst="roundRect">
+            <a:avLst>
+              <a:gd name="adj" fmla="val 14000"/>
+            </a:avLst>
+          </a:prstGeom>
+          <a:solidFill>
+            <a:srgbClr val="ECE5D8"/>
+          </a:solidFill>
+          <a:ln>
+            <a:noFill/>
+          </a:ln>
+          <a:effectLst/>
+        </p:spPr>
+        <p:style>
+          <a:lnRef idx="1">
+            <a:schemeClr val="accent1"/>
+          </a:lnRef>
+          <a:fillRef idx="3">
+            <a:schemeClr val="accent1"/>
+          </a:fillRef>
+          <a:effectRef idx="2">
+            <a:schemeClr val="accent1"/>
+          </a:effectRef>
+          <a:fontRef idx="minor">
+            <a:schemeClr val="lt1"/>
+          </a:fontRef>
+        </p:style>
+        <p:txBody>
+          <a:bodyPr rtlCol="0" anchor="ctr"/>
+          <a:lstStyle/>
+          <a:p>
+            <a:pPr algn="ctr"/>
+          </a:p>
+        </p:txBody>
+      </p:sp>
+      <p:sp>
+        <p:nvSpPr>
+          <p:cNvPr id="8" name="TextBox 7"/>
+          <p:cNvSpPr txBox="1"/>
+          <p:nvPr/>
+        </p:nvSpPr>
+        <p:spPr>
+          <a:xfrm>
+            <a:off x="1005840" y="5632704"/>
+            <a:ext cx="10149840" cy="365760"/>
+          </a:xfrm>
+          <a:prstGeom prst="rect">
+            <a:avLst/>
+          </a:prstGeom>
+          <a:noFill/>
+        </p:spPr>
+        <p:txBody>
+          <a:bodyPr wrap="square" anchor="t">
+            <a:spAutoFit/>
+          </a:bodyPr>
+          <a:lstStyle/>
+          <a:p>
+            <a:pPr algn="l">
               <a:lnSpc>
                 <a:spcPct val="115000"/>
               </a:lnSpc>
               <a:spcAft>
-                <a:spcPts val="600"/>
-              </a:spcAft>
-            </a:pPr>
-            <a:r>
-              <a:rPr sz="3400" b="1">
-                <a:solidFill>
-                  <a:srgbClr val="1F3A37"/>
-                </a:solidFill>
-                <a:latin typeface="Arial"/>
-              </a:rPr>
-              <a:t>Updatable, dated, and honest about what it is.</a:t>
-            </a:r>
-          </a:p>
-        </p:txBody>
-      </p:sp>
-      <p:sp>
-        <p:nvSpPr>
-          <p:cNvPr id="5" name="TextBox 4"/>
-          <p:cNvSpPr txBox="1"/>
-          <p:nvPr/>
-        </p:nvSpPr>
-        <p:spPr>
-          <a:xfrm>
-            <a:off x="822960" y="2560320"/>
-            <a:ext cx="10515600" cy="3840480"/>
-          </a:xfrm>
-          <a:prstGeom prst="rect">
-            <a:avLst/>
-          </a:prstGeom>
-          <a:noFill/>
-        </p:spPr>
-        <p:txBody>
-          <a:bodyPr wrap="square">
-            <a:spAutoFit/>
-          </a:bodyPr>
-          <a:lstStyle/>
-          <a:p>
-            <a:pPr>
-              <a:lnSpc>
-                <a:spcPct val="130000"/>
-              </a:lnSpc>
-              <a:spcAft>
-                <a:spcPts val="600"/>
-              </a:spcAft>
-            </a:pPr>
-            <a:r>
-              <a:rPr sz="1600" b="0">
-                <a:solidFill>
-                  <a:srgbClr val="1F3A37"/>
-                </a:solidFill>
-                <a:latin typeface="Arial"/>
-              </a:rPr>
-              <a:t>Source: Arbeitnow public job board — 300 postings from the last 30 days, refreshed on demand.</a:t>
-            </a:r>
-          </a:p>
-          <a:p>
-            <a:pPr>
-              <a:lnSpc>
-                <a:spcPct val="130000"/>
-              </a:lnSpc>
-              <a:spcAft>
-                <a:spcPts val="600"/>
-              </a:spcAft>
-            </a:pPr>
-            <a:r>
-              <a:rPr sz="1600" b="0">
-                <a:solidFill>
-                  <a:srgbClr val="1F3A37"/>
-                </a:solidFill>
-                <a:latin typeface="Arial"/>
-              </a:rPr>
-              <a:t>Method: tokenised skill matching over full descriptions (naive substring matching inflated</a:t>
-            </a:r>
-          </a:p>
-          <a:p>
-            <a:pPr>
-              <a:lnSpc>
-                <a:spcPct val="130000"/>
-              </a:lnSpc>
-              <a:spcAft>
-                <a:spcPts val="600"/>
-              </a:spcAft>
-            </a:pPr>
-            <a:r>
-              <a:rPr sz="1600" b="0">
-                <a:solidFill>
-                  <a:srgbClr val="1F3A37"/>
-                </a:solidFill>
-                <a:latin typeface="Arial"/>
-              </a:rPr>
-              <a:t>supply-chain demand from 21% to 45% — we found that by measuring, and fixed it).</a:t>
-            </a:r>
-          </a:p>
-          <a:p>
-            <a:pPr>
-              <a:lnSpc>
-                <a:spcPct val="130000"/>
-              </a:lnSpc>
-              <a:spcAft>
-                <a:spcPts val="600"/>
-              </a:spcAft>
-            </a:pPr>
-          </a:p>
-          <a:p>
-            <a:pPr>
-              <a:lnSpc>
-                <a:spcPct val="130000"/>
-              </a:lnSpc>
-              <a:spcAft>
-                <a:spcPts val="600"/>
-              </a:spcAft>
-            </a:pPr>
-            <a:r>
-              <a:rPr sz="1600" b="0">
-                <a:solidFill>
-                  <a:srgbClr val="1F3A37"/>
-                </a:solidFill>
-                <a:latin typeface="Arial"/>
-              </a:rPr>
-              <a:t>Measured today:  AI Operations 54%   ·   Operations Research 35%   ·   Supply Chain 21%</a:t>
-            </a:r>
-          </a:p>
-          <a:p>
-            <a:pPr>
-              <a:lnSpc>
-                <a:spcPct val="130000"/>
-              </a:lnSpc>
-              <a:spcAft>
-                <a:spcPts val="600"/>
-              </a:spcAft>
-            </a:pPr>
-          </a:p>
-          <a:p>
-            <a:pPr>
-              <a:lnSpc>
-                <a:spcPct val="130000"/>
-              </a:lnSpc>
-              <a:spcAft>
-                <a:spcPts val="600"/>
-              </a:spcAft>
-            </a:pPr>
-            <a:r>
-              <a:rPr sz="1600" b="0">
-                <a:solidFill>
-                  <a:srgbClr val="1F3A37"/>
-                </a:solidFill>
-                <a:latin typeface="Arial"/>
-              </a:rPr>
-              <a:t>Every figure carries its source URL, fetch timestamp, window and sample size.</a:t>
-            </a:r>
-          </a:p>
-          <a:p>
-            <a:pPr>
-              <a:lnSpc>
-                <a:spcPct val="130000"/>
-              </a:lnSpc>
-              <a:spcAft>
-                <a:spcPts val="600"/>
-              </a:spcAft>
-            </a:pPr>
-            <a:r>
-              <a:rPr sz="1600" b="0">
-                <a:solidFill>
-                  <a:srgbClr val="1F3A37"/>
-                </a:solidFill>
-                <a:latin typeface="Arial"/>
-              </a:rPr>
-              <a:t>The interface states that this measures the direction of demand in a global board —</a:t>
-            </a:r>
-          </a:p>
-          <a:p>
-            <a:pPr>
-              <a:lnSpc>
-                <a:spcPct val="130000"/>
-              </a:lnSpc>
-              <a:spcAft>
-                <a:spcPts val="600"/>
-              </a:spcAft>
-            </a:pPr>
-            <a:r>
-              <a:rPr sz="1600" b="0">
-                <a:solidFill>
-                  <a:srgbClr val="1F3A37"/>
-                </a:solidFill>
-                <a:latin typeface="Arial"/>
-              </a:rPr>
-              <a:t>not Malaysian vacancy counts.</a:t>
+                <a:spcPts val="800"/>
+              </a:spcAft>
+            </a:pPr>
+            <a:r>
+              <a:rPr sz="1000" b="0">
+                <a:solidFill>
+                  <a:srgbClr val="5B6B63"/>
+                </a:solidFill>
+                <a:latin typeface="Segoe UI"/>
+              </a:rPr>
+              <a:t>Suggestions are offered, never applied on the person's behalf.</a:t>
+            </a:r>
+          </a:p>
+        </p:txBody>
+      </p:sp>
+      <p:sp>
+        <p:nvSpPr>
+          <p:cNvPr id="9" name="TextBox 8"/>
+          <p:cNvSpPr txBox="1"/>
+          <p:nvPr/>
+        </p:nvSpPr>
+        <p:spPr>
+          <a:xfrm>
+            <a:off x="777240" y="6263640"/>
+            <a:ext cx="10607040" cy="274320"/>
+          </a:xfrm>
+          <a:prstGeom prst="rect">
+            <a:avLst/>
+          </a:prstGeom>
+          <a:noFill/>
+        </p:spPr>
+        <p:txBody>
+          <a:bodyPr wrap="square" anchor="t">
+            <a:spAutoFit/>
+          </a:bodyPr>
+          <a:lstStyle/>
+          <a:p>
+            <a:pPr algn="l">
+              <a:lnSpc>
+                <a:spcPct val="125000"/>
+              </a:lnSpc>
+              <a:spcAft>
+                <a:spcPts val="800"/>
+              </a:spcAft>
+            </a:pPr>
+            <a:r>
+              <a:rPr sz="900" b="0">
+                <a:solidFill>
+                  <a:srgbClr val="5B6B63"/>
+                </a:solidFill>
+                <a:latin typeface="Segoe UI"/>
+              </a:rPr>
+              <a:t>Checkpoint 02</a:t>
+            </a:r>
+          </a:p>
+        </p:txBody>
+      </p:sp>
+      <p:sp>
+        <p:nvSpPr>
+          <p:cNvPr id="10" name="TextBox 9"/>
+          <p:cNvSpPr txBox="1"/>
+          <p:nvPr/>
+        </p:nvSpPr>
+        <p:spPr>
+          <a:xfrm>
+            <a:off x="10591495" y="6263640"/>
+            <a:ext cx="822960" cy="274320"/>
+          </a:xfrm>
+          <a:prstGeom prst="rect">
+            <a:avLst/>
+          </a:prstGeom>
+          <a:noFill/>
+        </p:spPr>
+        <p:txBody>
+          <a:bodyPr wrap="square" anchor="t">
+            <a:spAutoFit/>
+          </a:bodyPr>
+          <a:lstStyle/>
+          <a:p>
+            <a:pPr algn="r">
+              <a:lnSpc>
+                <a:spcPct val="125000"/>
+              </a:lnSpc>
+              <a:spcAft>
+                <a:spcPts val="800"/>
+              </a:spcAft>
+            </a:pPr>
+            <a:r>
+              <a:rPr sz="900" b="0">
+                <a:solidFill>
+                  <a:srgbClr val="5B6B63"/>
+                </a:solidFill>
+                <a:latin typeface="Segoe UI"/>
+              </a:rPr>
+              <a:t>06 / 12</a:t>
             </a:r>
           </a:p>
         </p:txBody>
@@ -4889,56 +8890,14 @@
       <p:grpSpPr/>
       <p:sp>
         <p:nvSpPr>
-          <p:cNvPr id="2" name="TextBox 1"/>
-          <p:cNvSpPr txBox="1"/>
-          <p:nvPr/>
-        </p:nvSpPr>
-        <p:spPr>
-          <a:xfrm>
-            <a:off x="822960" y="502920"/>
-            <a:ext cx="8229600" cy="274320"/>
-          </a:xfrm>
-          <a:prstGeom prst="rect">
-            <a:avLst/>
-          </a:prstGeom>
-          <a:noFill/>
-        </p:spPr>
-        <p:txBody>
-          <a:bodyPr wrap="square">
-            <a:spAutoFit/>
-          </a:bodyPr>
-          <a:lstStyle/>
-          <a:p>
-            <a:pPr>
-              <a:lnSpc>
-                <a:spcPct val="115000"/>
-              </a:lnSpc>
-              <a:spcAft>
-                <a:spcPts val="600"/>
-              </a:spcAft>
-            </a:pPr>
-            <a:r>
-              <a:rPr sz="1100" b="1">
-                <a:solidFill>
-                  <a:srgbClr val="5B6B67"/>
-                </a:solidFill>
-                <a:latin typeface="Arial"/>
-              </a:rPr>
-              <a:t>SDG IMPACT FRAMEWORK</a:t>
-            </a:r>
-          </a:p>
-        </p:txBody>
-      </p:sp>
-      <p:sp>
-        <p:nvSpPr>
-          <p:cNvPr id="3" name="Rectangle 2"/>
+          <p:cNvPr id="2" name="Rectangle 1"/>
           <p:cNvSpPr/>
           <p:nvPr/>
         </p:nvSpPr>
         <p:spPr>
           <a:xfrm>
-            <a:off x="822960" y="822960"/>
-            <a:ext cx="1005840" cy="45720"/>
+            <a:off x="777240" y="566928"/>
+            <a:ext cx="310896" cy="31750"/>
           </a:xfrm>
           <a:prstGeom prst="rect">
             <a:avLst/>
@@ -4974,228 +8933,379 @@
       </p:sp>
       <p:sp>
         <p:nvSpPr>
+          <p:cNvPr id="3" name="TextBox 2"/>
+          <p:cNvSpPr txBox="1"/>
+          <p:nvPr/>
+        </p:nvSpPr>
+        <p:spPr>
+          <a:xfrm>
+            <a:off x="1234440" y="457200"/>
+            <a:ext cx="8229600" cy="274320"/>
+          </a:xfrm>
+          <a:prstGeom prst="rect">
+            <a:avLst/>
+          </a:prstGeom>
+          <a:noFill/>
+        </p:spPr>
+        <p:txBody>
+          <a:bodyPr wrap="square" anchor="t">
+            <a:spAutoFit/>
+          </a:bodyPr>
+          <a:lstStyle/>
+          <a:p>
+            <a:pPr algn="l">
+              <a:lnSpc>
+                <a:spcPct val="125000"/>
+              </a:lnSpc>
+              <a:spcAft>
+                <a:spcPts val="800"/>
+              </a:spcAft>
+            </a:pPr>
+            <a:r>
+              <a:rPr sz="1050" b="1">
+                <a:solidFill>
+                  <a:srgbClr val="5B6B63"/>
+                </a:solidFill>
+                <a:latin typeface="Segoe UI Semibold"/>
+              </a:rPr>
+              <a:t>CHECKPOINT 03 · FUTURE ROLES</a:t>
+            </a:r>
+          </a:p>
+        </p:txBody>
+      </p:sp>
+      <p:sp>
+        <p:nvSpPr>
           <p:cNvPr id="4" name="TextBox 3"/>
           <p:cNvSpPr txBox="1"/>
           <p:nvPr/>
         </p:nvSpPr>
         <p:spPr>
           <a:xfrm>
-            <a:off x="822960" y="960120"/>
-            <a:ext cx="10515600" cy="1463040"/>
-          </a:xfrm>
-          <a:prstGeom prst="rect">
-            <a:avLst/>
-          </a:prstGeom>
-          <a:noFill/>
-        </p:spPr>
-        <p:txBody>
-          <a:bodyPr wrap="square">
-            <a:spAutoFit/>
-          </a:bodyPr>
-          <a:lstStyle/>
-          <a:p>
-            <a:pPr>
+            <a:off x="777240" y="960120"/>
+            <a:ext cx="6035040" cy="1554480"/>
+          </a:xfrm>
+          <a:prstGeom prst="rect">
+            <a:avLst/>
+          </a:prstGeom>
+          <a:noFill/>
+        </p:spPr>
+        <p:txBody>
+          <a:bodyPr wrap="square" anchor="t">
+            <a:spAutoFit/>
+          </a:bodyPr>
+          <a:lstStyle/>
+          <a:p>
+            <a:pPr algn="l">
+              <a:lnSpc>
+                <a:spcPct val="105000"/>
+              </a:lnSpc>
+              <a:spcAft>
+                <a:spcPts val="800"/>
+              </a:spcAft>
+            </a:pPr>
+            <a:r>
+              <a:rPr sz="3400" b="1">
+                <a:solidFill>
+                  <a:srgbClr val="1F3A37"/>
+                </a:solidFill>
+                <a:latin typeface="Segoe UI Semibold"/>
+              </a:rPr>
+              <a:t>The roles the AI chose for you.</a:t>
+            </a:r>
+          </a:p>
+        </p:txBody>
+      </p:sp>
+      <p:sp>
+        <p:nvSpPr>
+          <p:cNvPr id="5" name="TextBox 4"/>
+          <p:cNvSpPr txBox="1"/>
+          <p:nvPr/>
+        </p:nvSpPr>
+        <p:spPr>
+          <a:xfrm>
+            <a:off x="777240" y="2514600"/>
+            <a:ext cx="6035040" cy="3108960"/>
+          </a:xfrm>
+          <a:prstGeom prst="rect">
+            <a:avLst/>
+          </a:prstGeom>
+          <a:noFill/>
+        </p:spPr>
+        <p:txBody>
+          <a:bodyPr wrap="square" anchor="t">
+            <a:spAutoFit/>
+          </a:bodyPr>
+          <a:lstStyle/>
+          <a:p>
+            <a:pPr algn="l">
+              <a:lnSpc>
+                <a:spcPct val="135000"/>
+              </a:lnSpc>
+              <a:spcAft>
+                <a:spcPts val="1000"/>
+              </a:spcAft>
+            </a:pPr>
+            <a:r>
+              <a:rPr sz="1300" b="0">
+                <a:solidFill>
+                  <a:srgbClr val="1F3A37"/>
+                </a:solidFill>
+                <a:latin typeface="Segoe UI"/>
+              </a:rPr>
+              <a:t>The model proposes occupations from the profile — including ones outside our catalogue.</a:t>
+            </a:r>
+          </a:p>
+          <a:p>
+            <a:pPr algn="l">
+              <a:lnSpc>
+                <a:spcPct val="135000"/>
+              </a:lnSpc>
+              <a:spcAft>
+                <a:spcPts val="1000"/>
+              </a:spcAft>
+            </a:pPr>
+            <a:r>
+              <a:rPr sz="1300" b="0">
+                <a:solidFill>
+                  <a:srgbClr val="1F3A37"/>
+                </a:solidFill>
+                <a:latin typeface="Segoe UI"/>
+              </a:rPr>
+              <a:t>Each comes with its reasoning, the skills to build, a first step, and a reference you can check.</a:t>
+            </a:r>
+          </a:p>
+          <a:p>
+            <a:pPr algn="l">
+              <a:lnSpc>
+                <a:spcPct val="135000"/>
+              </a:lnSpc>
+              <a:spcAft>
+                <a:spcPts val="1000"/>
+              </a:spcAft>
+            </a:pPr>
+            <a:r>
+              <a:rPr sz="1300" b="0">
+                <a:solidFill>
+                  <a:srgbClr val="1F3A37"/>
+                </a:solidFill>
+                <a:latin typeface="Segoe UI"/>
+              </a:rPr>
+              <a:t>No salary, growth figure or course link is shown for those occupations, because we could not source one.</a:t>
+            </a:r>
+          </a:p>
+          <a:p>
+            <a:pPr algn="l">
+              <a:lnSpc>
+                <a:spcPct val="135000"/>
+              </a:lnSpc>
+              <a:spcAft>
+                <a:spcPts val="1000"/>
+              </a:spcAft>
+            </a:pPr>
+            <a:r>
+              <a:rPr sz="1300" b="0">
+                <a:solidFill>
+                  <a:srgbClr val="1F3A37"/>
+                </a:solidFill>
+                <a:latin typeface="Segoe UI"/>
+              </a:rPr>
+              <a:t>They carry an explicit badge: exploratory, no verified pathway.</a:t>
+            </a:r>
+          </a:p>
+        </p:txBody>
+      </p:sp>
+      <p:pic>
+        <p:nvPicPr>
+          <p:cNvPr id="6" name="Picture 5" descr="device-laptop.png"/>
+          <p:cNvPicPr>
+            <a:picLocks noChangeAspect="1"/>
+          </p:cNvPicPr>
+          <p:nvPr/>
+        </p:nvPicPr>
+        <p:blipFill>
+          <a:blip r:embed="rId2"/>
+          <a:stretch>
+            <a:fillRect/>
+          </a:stretch>
+        </p:blipFill>
+        <p:spPr>
+          <a:xfrm>
+            <a:off x="7395348" y="2286000"/>
+            <a:ext cx="4019107" cy="2743200"/>
+          </a:xfrm>
+          <a:prstGeom prst="rect">
+            <a:avLst/>
+          </a:prstGeom>
+        </p:spPr>
+      </p:pic>
+      <p:sp>
+        <p:nvSpPr>
+          <p:cNvPr id="7" name="Rounded Rectangle 6"/>
+          <p:cNvSpPr/>
+          <p:nvPr/>
+        </p:nvSpPr>
+        <p:spPr>
+          <a:xfrm>
+            <a:off x="777240" y="5532120"/>
+            <a:ext cx="10607040" cy="566928"/>
+          </a:xfrm>
+          <a:prstGeom prst="roundRect">
+            <a:avLst>
+              <a:gd name="adj" fmla="val 14000"/>
+            </a:avLst>
+          </a:prstGeom>
+          <a:solidFill>
+            <a:srgbClr val="ECE5D8"/>
+          </a:solidFill>
+          <a:ln>
+            <a:noFill/>
+          </a:ln>
+          <a:effectLst/>
+        </p:spPr>
+        <p:style>
+          <a:lnRef idx="1">
+            <a:schemeClr val="accent1"/>
+          </a:lnRef>
+          <a:fillRef idx="3">
+            <a:schemeClr val="accent1"/>
+          </a:fillRef>
+          <a:effectRef idx="2">
+            <a:schemeClr val="accent1"/>
+          </a:effectRef>
+          <a:fontRef idx="minor">
+            <a:schemeClr val="lt1"/>
+          </a:fontRef>
+        </p:style>
+        <p:txBody>
+          <a:bodyPr rtlCol="0" anchor="ctr"/>
+          <a:lstStyle/>
+          <a:p>
+            <a:pPr algn="ctr"/>
+          </a:p>
+        </p:txBody>
+      </p:sp>
+      <p:sp>
+        <p:nvSpPr>
+          <p:cNvPr id="8" name="TextBox 7"/>
+          <p:cNvSpPr txBox="1"/>
+          <p:nvPr/>
+        </p:nvSpPr>
+        <p:spPr>
+          <a:xfrm>
+            <a:off x="1005840" y="5632704"/>
+            <a:ext cx="10149840" cy="365760"/>
+          </a:xfrm>
+          <a:prstGeom prst="rect">
+            <a:avLst/>
+          </a:prstGeom>
+          <a:noFill/>
+        </p:spPr>
+        <p:txBody>
+          <a:bodyPr wrap="square" anchor="t">
+            <a:spAutoFit/>
+          </a:bodyPr>
+          <a:lstStyle/>
+          <a:p>
+            <a:pPr algn="l">
               <a:lnSpc>
                 <a:spcPct val="115000"/>
               </a:lnSpc>
               <a:spcAft>
-                <a:spcPts val="600"/>
-              </a:spcAft>
-            </a:pPr>
-            <a:r>
-              <a:rPr sz="3400" b="1">
-                <a:solidFill>
-                  <a:srgbClr val="1F3A37"/>
-                </a:solidFill>
-                <a:latin typeface="Arial"/>
-              </a:rPr>
-              <a:t>Baseline, KPI, and a target we can be held to.</a:t>
-            </a:r>
-          </a:p>
-        </p:txBody>
-      </p:sp>
-      <p:sp>
-        <p:nvSpPr>
-          <p:cNvPr id="5" name="TextBox 4"/>
-          <p:cNvSpPr txBox="1"/>
-          <p:nvPr/>
-        </p:nvSpPr>
-        <p:spPr>
-          <a:xfrm>
-            <a:off x="822960" y="2560320"/>
-            <a:ext cx="10515600" cy="3840480"/>
-          </a:xfrm>
-          <a:prstGeom prst="rect">
-            <a:avLst/>
-          </a:prstGeom>
-          <a:noFill/>
-        </p:spPr>
-        <p:txBody>
-          <a:bodyPr wrap="square">
-            <a:spAutoFit/>
-          </a:bodyPr>
-          <a:lstStyle/>
-          <a:p>
-            <a:pPr>
-              <a:lnSpc>
-                <a:spcPct val="130000"/>
-              </a:lnSpc>
-              <a:spcAft>
-                <a:spcPts val="600"/>
-              </a:spcAft>
-            </a:pPr>
-            <a:r>
-              <a:rPr sz="1500" b="0">
-                <a:solidFill>
-                  <a:srgbClr val="1F3A37"/>
-                </a:solidFill>
-                <a:latin typeface="Arial"/>
-              </a:rPr>
-              <a:t>Targets: 4.4.1 relevant skills · 4.3.1 lifelong learning access · 8.5.2 employment · 8.2.1 productivity.</a:t>
-            </a:r>
-          </a:p>
-          <a:p>
-            <a:pPr>
-              <a:lnSpc>
-                <a:spcPct val="130000"/>
-              </a:lnSpc>
-              <a:spcAft>
-                <a:spcPts val="600"/>
-              </a:spcAft>
-            </a:pPr>
-          </a:p>
-          <a:p>
-            <a:pPr>
-              <a:lnSpc>
-                <a:spcPct val="130000"/>
-              </a:lnSpc>
-              <a:spcAft>
-                <a:spcPts val="600"/>
-              </a:spcAft>
-            </a:pPr>
-            <a:r>
-              <a:rPr sz="1500" b="0">
-                <a:solidFill>
-                  <a:srgbClr val="1F3A37"/>
-                </a:solidFill>
-                <a:latin typeface="Arial"/>
-              </a:rPr>
-              <a:t>Baseline: 56% of Malaysian professionals use AI; 26% trained. 600,000+ need reskilling.</a:t>
-            </a:r>
-          </a:p>
-          <a:p>
-            <a:pPr>
-              <a:lnSpc>
-                <a:spcPct val="130000"/>
-              </a:lnSpc>
-              <a:spcAft>
-                <a:spcPts val="600"/>
-              </a:spcAft>
-            </a:pPr>
-            <a:r>
-              <a:rPr sz="1500" b="0">
-                <a:solidFill>
-                  <a:srgbClr val="1F3A37"/>
-                </a:solidFill>
-                <a:latin typeface="Arial"/>
-              </a:rPr>
-              <a:t>Prototype today: 6 curated signals but only 1 updatable trend source; recommendations sourced ~60%.</a:t>
-            </a:r>
-          </a:p>
-          <a:p>
-            <a:pPr>
-              <a:lnSpc>
-                <a:spcPct val="130000"/>
-              </a:lnSpc>
-              <a:spcAft>
-                <a:spcPts val="600"/>
-              </a:spcAft>
-            </a:pPr>
-          </a:p>
-          <a:p>
-            <a:pPr>
-              <a:lnSpc>
-                <a:spcPct val="130000"/>
-              </a:lnSpc>
-              <a:spcAft>
-                <a:spcPts val="600"/>
-              </a:spcAft>
-            </a:pPr>
-            <a:r>
-              <a:rPr sz="1500" b="0">
-                <a:solidFill>
-                  <a:srgbClr val="1F3A37"/>
-                </a:solidFill>
-                <a:latin typeface="Arial"/>
-              </a:rPr>
-              <a:t>KPI: % of role, skill and course recommendations carrying a verifiable source and date;</a:t>
-            </a:r>
-          </a:p>
-          <a:p>
-            <a:pPr>
-              <a:lnSpc>
-                <a:spcPct val="130000"/>
-              </a:lnSpc>
-              <a:spcAft>
-                <a:spcPts val="600"/>
-              </a:spcAft>
-            </a:pPr>
-            <a:r>
-              <a:rPr sz="1500" b="0">
-                <a:solidFill>
-                  <a:srgbClr val="1F3A37"/>
-                </a:solidFill>
-                <a:latin typeface="Arial"/>
-              </a:rPr>
-              <a:t>median time from profile start to a ranked pathway; number of independent trend sources.</a:t>
-            </a:r>
-          </a:p>
-          <a:p>
-            <a:pPr>
-              <a:lnSpc>
-                <a:spcPct val="130000"/>
-              </a:lnSpc>
-              <a:spcAft>
-                <a:spcPts val="600"/>
-              </a:spcAft>
-            </a:pPr>
-          </a:p>
-          <a:p>
-            <a:pPr>
-              <a:lnSpc>
-                <a:spcPct val="130000"/>
-              </a:lnSpc>
-              <a:spcAft>
-                <a:spcPts val="600"/>
-              </a:spcAft>
-            </a:pPr>
-            <a:r>
-              <a:rPr sz="1500" b="0">
-                <a:solidFill>
-                  <a:srgbClr val="1F3A37"/>
-                </a:solidFill>
-                <a:latin typeface="Arial"/>
-              </a:rPr>
-              <a:t>Phase 2 target: 100% sourced and dated · median time-to-plan under 5 minutes ·</a:t>
-            </a:r>
-          </a:p>
-          <a:p>
-            <a:pPr>
-              <a:lnSpc>
-                <a:spcPct val="130000"/>
-              </a:lnSpc>
-              <a:spcAft>
-                <a:spcPts val="600"/>
-              </a:spcAft>
-            </a:pPr>
-            <a:r>
-              <a:rPr sz="1500" b="0">
-                <a:solidFill>
-                  <a:srgbClr val="1F3A37"/>
-                </a:solidFill>
-                <a:latin typeface="Arial"/>
-              </a:rPr>
-              <a:t>two independent trend sources, one Malaysian.</a:t>
+                <a:spcPts val="800"/>
+              </a:spcAft>
+            </a:pPr>
+            <a:r>
+              <a:rPr sz="1000" b="0">
+                <a:solidFill>
+                  <a:srgbClr val="5B6B63"/>
+                </a:solidFill>
+                <a:latin typeface="Segoe UI"/>
+              </a:rPr>
+              <a:t>If the model cannot name a reference, the suggestion is discarded.</a:t>
+            </a:r>
+          </a:p>
+        </p:txBody>
+      </p:sp>
+      <p:sp>
+        <p:nvSpPr>
+          <p:cNvPr id="9" name="TextBox 8"/>
+          <p:cNvSpPr txBox="1"/>
+          <p:nvPr/>
+        </p:nvSpPr>
+        <p:spPr>
+          <a:xfrm>
+            <a:off x="777240" y="6263640"/>
+            <a:ext cx="10607040" cy="274320"/>
+          </a:xfrm>
+          <a:prstGeom prst="rect">
+            <a:avLst/>
+          </a:prstGeom>
+          <a:noFill/>
+        </p:spPr>
+        <p:txBody>
+          <a:bodyPr wrap="square" anchor="t">
+            <a:spAutoFit/>
+          </a:bodyPr>
+          <a:lstStyle/>
+          <a:p>
+            <a:pPr algn="l">
+              <a:lnSpc>
+                <a:spcPct val="125000"/>
+              </a:lnSpc>
+              <a:spcAft>
+                <a:spcPts val="800"/>
+              </a:spcAft>
+            </a:pPr>
+            <a:r>
+              <a:rPr sz="900" b="0">
+                <a:solidFill>
+                  <a:srgbClr val="5B6B63"/>
+                </a:solidFill>
+                <a:latin typeface="Segoe UI"/>
+              </a:rPr>
+              <a:t>Checkpoint 03</a:t>
+            </a:r>
+          </a:p>
+        </p:txBody>
+      </p:sp>
+      <p:sp>
+        <p:nvSpPr>
+          <p:cNvPr id="10" name="TextBox 9"/>
+          <p:cNvSpPr txBox="1"/>
+          <p:nvPr/>
+        </p:nvSpPr>
+        <p:spPr>
+          <a:xfrm>
+            <a:off x="10591495" y="6263640"/>
+            <a:ext cx="822960" cy="274320"/>
+          </a:xfrm>
+          <a:prstGeom prst="rect">
+            <a:avLst/>
+          </a:prstGeom>
+          <a:noFill/>
+        </p:spPr>
+        <p:txBody>
+          <a:bodyPr wrap="square" anchor="t">
+            <a:spAutoFit/>
+          </a:bodyPr>
+          <a:lstStyle/>
+          <a:p>
+            <a:pPr algn="r">
+              <a:lnSpc>
+                <a:spcPct val="125000"/>
+              </a:lnSpc>
+              <a:spcAft>
+                <a:spcPts val="800"/>
+              </a:spcAft>
+            </a:pPr>
+            <a:r>
+              <a:rPr sz="900" b="0">
+                <a:solidFill>
+                  <a:srgbClr val="5B6B63"/>
+                </a:solidFill>
+                <a:latin typeface="Segoe UI"/>
+              </a:rPr>
+              <a:t>07 / 12</a:t>
             </a:r>
           </a:p>
         </p:txBody>
@@ -5228,56 +9338,14 @@
       <p:grpSpPr/>
       <p:sp>
         <p:nvSpPr>
-          <p:cNvPr id="2" name="TextBox 1"/>
-          <p:cNvSpPr txBox="1"/>
-          <p:nvPr/>
-        </p:nvSpPr>
-        <p:spPr>
-          <a:xfrm>
-            <a:off x="822960" y="502920"/>
-            <a:ext cx="8229600" cy="274320"/>
-          </a:xfrm>
-          <a:prstGeom prst="rect">
-            <a:avLst/>
-          </a:prstGeom>
-          <a:noFill/>
-        </p:spPr>
-        <p:txBody>
-          <a:bodyPr wrap="square">
-            <a:spAutoFit/>
-          </a:bodyPr>
-          <a:lstStyle/>
-          <a:p>
-            <a:pPr>
-              <a:lnSpc>
-                <a:spcPct val="115000"/>
-              </a:lnSpc>
-              <a:spcAft>
-                <a:spcPts val="600"/>
-              </a:spcAft>
-            </a:pPr>
-            <a:r>
-              <a:rPr sz="1100" b="1">
-                <a:solidFill>
-                  <a:srgbClr val="5B6B67"/>
-                </a:solidFill>
-                <a:latin typeface="Arial"/>
-              </a:rPr>
-              <a:t>FEASIBILITY, AND THE RISK WE NAME</a:t>
-            </a:r>
-          </a:p>
-        </p:txBody>
-      </p:sp>
-      <p:sp>
-        <p:nvSpPr>
-          <p:cNvPr id="3" name="Rectangle 2"/>
+          <p:cNvPr id="2" name="Rectangle 1"/>
           <p:cNvSpPr/>
           <p:nvPr/>
         </p:nvSpPr>
         <p:spPr>
           <a:xfrm>
-            <a:off x="822960" y="822960"/>
-            <a:ext cx="1005840" cy="45720"/>
+            <a:off x="777240" y="566928"/>
+            <a:ext cx="310896" cy="31750"/>
           </a:xfrm>
           <a:prstGeom prst="rect">
             <a:avLst/>
@@ -5313,208 +9381,374 @@
       </p:sp>
       <p:sp>
         <p:nvSpPr>
+          <p:cNvPr id="3" name="TextBox 2"/>
+          <p:cNvSpPr txBox="1"/>
+          <p:nvPr/>
+        </p:nvSpPr>
+        <p:spPr>
+          <a:xfrm>
+            <a:off x="1234440" y="457200"/>
+            <a:ext cx="8229600" cy="274320"/>
+          </a:xfrm>
+          <a:prstGeom prst="rect">
+            <a:avLst/>
+          </a:prstGeom>
+          <a:noFill/>
+        </p:spPr>
+        <p:txBody>
+          <a:bodyPr wrap="square" anchor="t">
+            <a:spAutoFit/>
+          </a:bodyPr>
+          <a:lstStyle/>
+          <a:p>
+            <a:pPr algn="l">
+              <a:lnSpc>
+                <a:spcPct val="125000"/>
+              </a:lnSpc>
+              <a:spcAft>
+                <a:spcPts val="800"/>
+              </a:spcAft>
+            </a:pPr>
+            <a:r>
+              <a:rPr sz="1050" b="1">
+                <a:solidFill>
+                  <a:srgbClr val="5B6B63"/>
+                </a:solidFill>
+                <a:latin typeface="Segoe UI Semibold"/>
+              </a:rPr>
+              <a:t>CHECKPOINT 04 · LEARNING PATH</a:t>
+            </a:r>
+          </a:p>
+        </p:txBody>
+      </p:sp>
+      <p:sp>
+        <p:nvSpPr>
           <p:cNvPr id="4" name="TextBox 3"/>
           <p:cNvSpPr txBox="1"/>
           <p:nvPr/>
         </p:nvSpPr>
         <p:spPr>
           <a:xfrm>
-            <a:off x="822960" y="960120"/>
-            <a:ext cx="10515600" cy="1463040"/>
-          </a:xfrm>
-          <a:prstGeom prst="rect">
-            <a:avLst/>
-          </a:prstGeom>
-          <a:noFill/>
-        </p:spPr>
-        <p:txBody>
-          <a:bodyPr wrap="square">
-            <a:spAutoFit/>
-          </a:bodyPr>
-          <a:lstStyle/>
-          <a:p>
-            <a:pPr>
+            <a:off x="777240" y="960120"/>
+            <a:ext cx="10058400" cy="1554480"/>
+          </a:xfrm>
+          <a:prstGeom prst="rect">
+            <a:avLst/>
+          </a:prstGeom>
+          <a:noFill/>
+        </p:spPr>
+        <p:txBody>
+          <a:bodyPr wrap="square" anchor="t">
+            <a:spAutoFit/>
+          </a:bodyPr>
+          <a:lstStyle/>
+          <a:p>
+            <a:pPr algn="l">
+              <a:lnSpc>
+                <a:spcPct val="105000"/>
+              </a:lnSpc>
+              <a:spcAft>
+                <a:spcPts val="800"/>
+              </a:spcAft>
+            </a:pPr>
+            <a:r>
+              <a:rPr sz="3400" b="1">
+                <a:solidFill>
+                  <a:srgbClr val="1F3A37"/>
+                </a:solidFill>
+                <a:latin typeface="Segoe UI Semibold"/>
+              </a:rPr>
+              <a:t>A plan built around the hours you actually have.</a:t>
+            </a:r>
+          </a:p>
+        </p:txBody>
+      </p:sp>
+      <p:sp>
+        <p:nvSpPr>
+          <p:cNvPr id="5" name="TextBox 4"/>
+          <p:cNvSpPr txBox="1"/>
+          <p:nvPr/>
+        </p:nvSpPr>
+        <p:spPr>
+          <a:xfrm>
+            <a:off x="777240" y="2514600"/>
+            <a:ext cx="10424160" cy="3108960"/>
+          </a:xfrm>
+          <a:prstGeom prst="rect">
+            <a:avLst/>
+          </a:prstGeom>
+          <a:noFill/>
+        </p:spPr>
+        <p:txBody>
+          <a:bodyPr wrap="square" anchor="t">
+            <a:spAutoFit/>
+          </a:bodyPr>
+          <a:lstStyle/>
+          <a:p>
+            <a:pPr algn="l">
+              <a:lnSpc>
+                <a:spcPct val="135000"/>
+              </a:lnSpc>
+              <a:spcAft>
+                <a:spcPts val="1000"/>
+              </a:spcAft>
+            </a:pPr>
+            <a:r>
+              <a:rPr sz="1300" b="0">
+                <a:solidFill>
+                  <a:srgbClr val="1F3A37"/>
+                </a:solidFill>
+                <a:latin typeface="Segoe UI"/>
+              </a:rPr>
+              <a:t>The model may only choose courses from a library we verified, link by link.</a:t>
+            </a:r>
+          </a:p>
+          <a:p>
+            <a:pPr algn="l">
+              <a:lnSpc>
+                <a:spcPct val="135000"/>
+              </a:lnSpc>
+              <a:spcAft>
+                <a:spcPts val="1000"/>
+              </a:spcAft>
+            </a:pPr>
+            <a:r>
+              <a:rPr sz="1300" b="0">
+                <a:solidFill>
+                  <a:srgbClr val="1F3A37"/>
+                </a:solidFill>
+                <a:latin typeface="Segoe UI"/>
+              </a:rPr>
+              <a:t>Every step shows provider, hours and the reason it was ordered there.</a:t>
+            </a:r>
+          </a:p>
+          <a:p>
+            <a:pPr algn="l">
+              <a:lnSpc>
+                <a:spcPct val="135000"/>
+              </a:lnSpc>
+              <a:spcAft>
+                <a:spcPts val="1000"/>
+              </a:spcAft>
+            </a:pPr>
+            <a:r>
+              <a:rPr sz="1300" b="0">
+                <a:solidFill>
+                  <a:srgbClr val="1F3A37"/>
+                </a:solidFill>
+                <a:latin typeface="Segoe UI"/>
+              </a:rPr>
+              <a:t>The plan is divided by the weekly hours the person said they have.</a:t>
+            </a:r>
+          </a:p>
+          <a:p>
+            <a:pPr algn="l">
+              <a:lnSpc>
+                <a:spcPct val="135000"/>
+              </a:lnSpc>
+              <a:spcAft>
+                <a:spcPts val="1000"/>
+              </a:spcAft>
+            </a:pPr>
+            <a:r>
+              <a:rPr sz="1300" b="0">
+                <a:solidFill>
+                  <a:srgbClr val="1F3A37"/>
+                </a:solidFill>
+                <a:latin typeface="Segoe UI"/>
+              </a:rPr>
+              <a:t>If nothing fits, it returns study topics with real search links — never an invented course.</a:t>
+            </a:r>
+          </a:p>
+          <a:p>
+            <a:pPr algn="l">
+              <a:lnSpc>
+                <a:spcPct val="135000"/>
+              </a:lnSpc>
+              <a:spcAft>
+                <a:spcPts val="1000"/>
+              </a:spcAft>
+            </a:pPr>
+            <a:r>
+              <a:rPr sz="1300" b="0">
+                <a:solidFill>
+                  <a:srgbClr val="1F3A37"/>
+                </a:solidFill>
+                <a:latin typeface="Segoe UI"/>
+              </a:rPr>
+              <a:t>Export to PDF, with a QR code on every step for the classroom or a printed handout.</a:t>
+            </a:r>
+          </a:p>
+        </p:txBody>
+      </p:sp>
+      <p:sp>
+        <p:nvSpPr>
+          <p:cNvPr id="6" name="Rounded Rectangle 5"/>
+          <p:cNvSpPr/>
+          <p:nvPr/>
+        </p:nvSpPr>
+        <p:spPr>
+          <a:xfrm>
+            <a:off x="777240" y="5532120"/>
+            <a:ext cx="10607040" cy="566928"/>
+          </a:xfrm>
+          <a:prstGeom prst="roundRect">
+            <a:avLst>
+              <a:gd name="adj" fmla="val 14000"/>
+            </a:avLst>
+          </a:prstGeom>
+          <a:solidFill>
+            <a:srgbClr val="ECE5D8"/>
+          </a:solidFill>
+          <a:ln>
+            <a:noFill/>
+          </a:ln>
+          <a:effectLst/>
+        </p:spPr>
+        <p:style>
+          <a:lnRef idx="1">
+            <a:schemeClr val="accent1"/>
+          </a:lnRef>
+          <a:fillRef idx="3">
+            <a:schemeClr val="accent1"/>
+          </a:fillRef>
+          <a:effectRef idx="2">
+            <a:schemeClr val="accent1"/>
+          </a:effectRef>
+          <a:fontRef idx="minor">
+            <a:schemeClr val="lt1"/>
+          </a:fontRef>
+        </p:style>
+        <p:txBody>
+          <a:bodyPr rtlCol="0" anchor="ctr"/>
+          <a:lstStyle/>
+          <a:p>
+            <a:pPr algn="ctr"/>
+          </a:p>
+        </p:txBody>
+      </p:sp>
+      <p:sp>
+        <p:nvSpPr>
+          <p:cNvPr id="7" name="TextBox 6"/>
+          <p:cNvSpPr txBox="1"/>
+          <p:nvPr/>
+        </p:nvSpPr>
+        <p:spPr>
+          <a:xfrm>
+            <a:off x="1005840" y="5632704"/>
+            <a:ext cx="10149840" cy="365760"/>
+          </a:xfrm>
+          <a:prstGeom prst="rect">
+            <a:avLst/>
+          </a:prstGeom>
+          <a:noFill/>
+        </p:spPr>
+        <p:txBody>
+          <a:bodyPr wrap="square" anchor="t">
+            <a:spAutoFit/>
+          </a:bodyPr>
+          <a:lstStyle/>
+          <a:p>
+            <a:pPr algn="l">
               <a:lnSpc>
                 <a:spcPct val="115000"/>
               </a:lnSpc>
               <a:spcAft>
-                <a:spcPts val="600"/>
-              </a:spcAft>
-            </a:pPr>
-            <a:r>
-              <a:rPr sz="3400" b="1">
-                <a:solidFill>
-                  <a:srgbClr val="1F3A37"/>
-                </a:solidFill>
-                <a:latin typeface="Arial"/>
-              </a:rPr>
-              <a:t>Hardest risk: the model inventing a job or a course.</a:t>
-            </a:r>
-          </a:p>
-        </p:txBody>
-      </p:sp>
-      <p:sp>
-        <p:nvSpPr>
-          <p:cNvPr id="5" name="TextBox 4"/>
-          <p:cNvSpPr txBox="1"/>
-          <p:nvPr/>
-        </p:nvSpPr>
-        <p:spPr>
-          <a:xfrm>
-            <a:off x="822960" y="2606040"/>
-            <a:ext cx="10515600" cy="3840480"/>
-          </a:xfrm>
-          <a:prstGeom prst="rect">
-            <a:avLst/>
-          </a:prstGeom>
-          <a:noFill/>
-        </p:spPr>
-        <p:txBody>
-          <a:bodyPr wrap="square">
-            <a:spAutoFit/>
-          </a:bodyPr>
-          <a:lstStyle/>
-          <a:p>
-            <a:pPr>
-              <a:lnSpc>
-                <a:spcPct val="130000"/>
-              </a:lnSpc>
-              <a:spcAft>
-                <a:spcPts val="600"/>
-              </a:spcAft>
-            </a:pPr>
-            <a:r>
-              <a:rPr sz="1500" b="0">
-                <a:solidFill>
-                  <a:srgbClr val="1F3A37"/>
-                </a:solidFill>
-                <a:latin typeface="Arial"/>
-              </a:rPr>
-              <a:t>Mitigation: closed catalogue, server-side ID validation, bounded fit, visible disagreement,</a:t>
-            </a:r>
-          </a:p>
-          <a:p>
-            <a:pPr>
-              <a:lnSpc>
-                <a:spcPct val="130000"/>
-              </a:lnSpc>
-              <a:spcAft>
-                <a:spcPts val="600"/>
-              </a:spcAft>
-            </a:pPr>
-            <a:r>
-              <a:rPr sz="1500" b="0">
-                <a:solidFill>
-                  <a:srgbClr val="1F3A37"/>
-                </a:solidFill>
-                <a:latin typeface="Arial"/>
-              </a:rPr>
-              <a:t>and an exploratory tier that cites an occupational reference or drops the suggestion.</a:t>
-            </a:r>
-          </a:p>
-          <a:p>
-            <a:pPr>
-              <a:lnSpc>
-                <a:spcPct val="130000"/>
-              </a:lnSpc>
-              <a:spcAft>
-                <a:spcPts val="600"/>
-              </a:spcAft>
-            </a:pPr>
-            <a:r>
-              <a:rPr sz="1500" b="0">
-                <a:solidFill>
-                  <a:srgbClr val="1F3A37"/>
-                </a:solidFill>
-                <a:latin typeface="Arial"/>
-              </a:rPr>
-              <a:t>Second risk: a global tech-oriented feed ≠ Malaysian vacancies — stated in the UI, Phase 2 fix.</a:t>
-            </a:r>
-          </a:p>
-          <a:p>
-            <a:pPr>
-              <a:lnSpc>
-                <a:spcPct val="130000"/>
-              </a:lnSpc>
-              <a:spcAft>
-                <a:spcPts val="600"/>
-              </a:spcAft>
-            </a:pPr>
-            <a:r>
-              <a:rPr sz="1500" b="0">
-                <a:solidFill>
-                  <a:srgbClr val="1F3A37"/>
-                </a:solidFill>
-                <a:latin typeface="Arial"/>
-              </a:rPr>
-              <a:t>Third: five roles cannot cover every occupation — the exploratory tier and 916-occupation search</a:t>
-            </a:r>
-          </a:p>
-          <a:p>
-            <a:pPr>
-              <a:lnSpc>
-                <a:spcPct val="130000"/>
-              </a:lnSpc>
-              <a:spcAft>
-                <a:spcPts val="600"/>
-              </a:spcAft>
-            </a:pPr>
-            <a:r>
-              <a:rPr sz="1500" b="0">
-                <a:solidFill>
-                  <a:srgbClr val="1F3A37"/>
-                </a:solidFill>
-                <a:latin typeface="Arial"/>
-              </a:rPr>
-              <a:t>make that limit visible instead of pretending otherwise.</a:t>
-            </a:r>
-          </a:p>
-          <a:p>
-            <a:pPr>
-              <a:lnSpc>
-                <a:spcPct val="130000"/>
-              </a:lnSpc>
-              <a:spcAft>
-                <a:spcPts val="600"/>
-              </a:spcAft>
-            </a:pPr>
-          </a:p>
-          <a:p>
-            <a:pPr>
-              <a:lnSpc>
-                <a:spcPct val="130000"/>
-              </a:lnSpc>
-              <a:spcAft>
-                <a:spcPts val="600"/>
-              </a:spcAft>
-            </a:pPr>
-            <a:r>
-              <a:rPr sz="1500" b="0">
-                <a:solidFill>
-                  <a:srgbClr val="1F3A37"/>
-                </a:solidFill>
-                <a:latin typeface="Arial"/>
-              </a:rPr>
-              <a:t>Stack: React 19 · Vite · Tailwind · Express 5 · Zod · OpenAPI + Orval · DeepSeek · Replit · O*NET</a:t>
-            </a:r>
-          </a:p>
-          <a:p>
-            <a:pPr>
-              <a:lnSpc>
-                <a:spcPct val="130000"/>
-              </a:lnSpc>
-              <a:spcAft>
-                <a:spcPts val="600"/>
-              </a:spcAft>
-            </a:pPr>
-            <a:r>
-              <a:rPr sz="1500" b="0">
-                <a:solidFill>
-                  <a:srgbClr val="1F3A37"/>
-                </a:solidFill>
-                <a:latin typeface="Arial"/>
-              </a:rPr>
-              <a:t>Live: aura-workforce.replit.app      Repo: github.com/adamnaemman/sdc-hackathon</a:t>
+                <a:spcPts val="800"/>
+              </a:spcAft>
+            </a:pPr>
+            <a:r>
+              <a:rPr sz="1000" b="0">
+                <a:solidFill>
+                  <a:srgbClr val="5B6B63"/>
+                </a:solidFill>
+                <a:latin typeface="Segoe UI"/>
+              </a:rPr>
+              <a:t>Verified means fetched and checked before shipping.</a:t>
+            </a:r>
+          </a:p>
+        </p:txBody>
+      </p:sp>
+      <p:sp>
+        <p:nvSpPr>
+          <p:cNvPr id="8" name="TextBox 7"/>
+          <p:cNvSpPr txBox="1"/>
+          <p:nvPr/>
+        </p:nvSpPr>
+        <p:spPr>
+          <a:xfrm>
+            <a:off x="777240" y="6263640"/>
+            <a:ext cx="10607040" cy="274320"/>
+          </a:xfrm>
+          <a:prstGeom prst="rect">
+            <a:avLst/>
+          </a:prstGeom>
+          <a:noFill/>
+        </p:spPr>
+        <p:txBody>
+          <a:bodyPr wrap="square" anchor="t">
+            <a:spAutoFit/>
+          </a:bodyPr>
+          <a:lstStyle/>
+          <a:p>
+            <a:pPr algn="l">
+              <a:lnSpc>
+                <a:spcPct val="125000"/>
+              </a:lnSpc>
+              <a:spcAft>
+                <a:spcPts val="800"/>
+              </a:spcAft>
+            </a:pPr>
+            <a:r>
+              <a:rPr sz="900" b="0">
+                <a:solidFill>
+                  <a:srgbClr val="5B6B63"/>
+                </a:solidFill>
+                <a:latin typeface="Segoe UI"/>
+              </a:rPr>
+              <a:t>Checkpoint 04</a:t>
+            </a:r>
+          </a:p>
+        </p:txBody>
+      </p:sp>
+      <p:sp>
+        <p:nvSpPr>
+          <p:cNvPr id="9" name="TextBox 8"/>
+          <p:cNvSpPr txBox="1"/>
+          <p:nvPr/>
+        </p:nvSpPr>
+        <p:spPr>
+          <a:xfrm>
+            <a:off x="10591495" y="6263640"/>
+            <a:ext cx="822960" cy="274320"/>
+          </a:xfrm>
+          <a:prstGeom prst="rect">
+            <a:avLst/>
+          </a:prstGeom>
+          <a:noFill/>
+        </p:spPr>
+        <p:txBody>
+          <a:bodyPr wrap="square" anchor="t">
+            <a:spAutoFit/>
+          </a:bodyPr>
+          <a:lstStyle/>
+          <a:p>
+            <a:pPr algn="r">
+              <a:lnSpc>
+                <a:spcPct val="125000"/>
+              </a:lnSpc>
+              <a:spcAft>
+                <a:spcPts val="800"/>
+              </a:spcAft>
+            </a:pPr>
+            <a:r>
+              <a:rPr sz="900" b="0">
+                <a:solidFill>
+                  <a:srgbClr val="5B6B63"/>
+                </a:solidFill>
+                <a:latin typeface="Segoe UI"/>
+              </a:rPr>
+              <a:t>08 / 12</a:t>
             </a:r>
           </a:p>
         </p:txBody>
@@ -5533,7 +9767,7 @@
     <p:bg>
       <p:bgPr>
         <a:solidFill>
-          <a:srgbClr val="F6F2EA"/>
+          <a:srgbClr val="1F3A37"/>
         </a:solidFill>
         <a:effectLst/>
       </p:bgPr>
@@ -5547,56 +9781,14 @@
       <p:grpSpPr/>
       <p:sp>
         <p:nvSpPr>
-          <p:cNvPr id="2" name="TextBox 1"/>
-          <p:cNvSpPr txBox="1"/>
-          <p:nvPr/>
-        </p:nvSpPr>
-        <p:spPr>
-          <a:xfrm>
-            <a:off x="822960" y="502920"/>
-            <a:ext cx="8229600" cy="274320"/>
-          </a:xfrm>
-          <a:prstGeom prst="rect">
-            <a:avLst/>
-          </a:prstGeom>
-          <a:noFill/>
-        </p:spPr>
-        <p:txBody>
-          <a:bodyPr wrap="square">
-            <a:spAutoFit/>
-          </a:bodyPr>
-          <a:lstStyle/>
-          <a:p>
-            <a:pPr>
-              <a:lnSpc>
-                <a:spcPct val="115000"/>
-              </a:lnSpc>
-              <a:spcAft>
-                <a:spcPts val="600"/>
-              </a:spcAft>
-            </a:pPr>
-            <a:r>
-              <a:rPr sz="1100" b="1">
-                <a:solidFill>
-                  <a:srgbClr val="5B6B67"/>
-                </a:solidFill>
-                <a:latin typeface="Arial"/>
-              </a:rPr>
-              <a:t>WHAT COMES NEXT</a:t>
-            </a:r>
-          </a:p>
-        </p:txBody>
-      </p:sp>
-      <p:sp>
-        <p:nvSpPr>
-          <p:cNvPr id="3" name="Rectangle 2"/>
+          <p:cNvPr id="2" name="Rectangle 1"/>
           <p:cNvSpPr/>
           <p:nvPr/>
         </p:nvSpPr>
         <p:spPr>
           <a:xfrm>
-            <a:off x="822960" y="822960"/>
-            <a:ext cx="1005840" cy="45720"/>
+            <a:off x="777240" y="566928"/>
+            <a:ext cx="310896" cy="31750"/>
           </a:xfrm>
           <a:prstGeom prst="rect">
             <a:avLst/>
@@ -5632,189 +9824,749 @@
       </p:sp>
       <p:sp>
         <p:nvSpPr>
+          <p:cNvPr id="3" name="TextBox 2"/>
+          <p:cNvSpPr txBox="1"/>
+          <p:nvPr/>
+        </p:nvSpPr>
+        <p:spPr>
+          <a:xfrm>
+            <a:off x="1234440" y="457200"/>
+            <a:ext cx="8229600" cy="274320"/>
+          </a:xfrm>
+          <a:prstGeom prst="rect">
+            <a:avLst/>
+          </a:prstGeom>
+          <a:noFill/>
+        </p:spPr>
+        <p:txBody>
+          <a:bodyPr wrap="square" anchor="t">
+            <a:spAutoFit/>
+          </a:bodyPr>
+          <a:lstStyle/>
+          <a:p>
+            <a:pPr algn="l">
+              <a:lnSpc>
+                <a:spcPct val="125000"/>
+              </a:lnSpc>
+              <a:spcAft>
+                <a:spcPts val="800"/>
+              </a:spcAft>
+            </a:pPr>
+            <a:r>
+              <a:rPr sz="1050" b="1">
+                <a:solidFill>
+                  <a:srgbClr val="D98E77"/>
+                </a:solidFill>
+                <a:latin typeface="Segoe UI Semibold"/>
+              </a:rPr>
+              <a:t>TRUST, BY CONSTRUCTION</a:t>
+            </a:r>
+          </a:p>
+        </p:txBody>
+      </p:sp>
+      <p:sp>
+        <p:nvSpPr>
           <p:cNvPr id="4" name="TextBox 3"/>
           <p:cNvSpPr txBox="1"/>
           <p:nvPr/>
         </p:nvSpPr>
         <p:spPr>
           <a:xfrm>
-            <a:off x="822960" y="960120"/>
-            <a:ext cx="10515600" cy="1463040"/>
-          </a:xfrm>
-          <a:prstGeom prst="rect">
-            <a:avLst/>
-          </a:prstGeom>
-          <a:noFill/>
-        </p:spPr>
-        <p:txBody>
-          <a:bodyPr wrap="square">
-            <a:spAutoFit/>
-          </a:bodyPr>
-          <a:lstStyle/>
-          <a:p>
-            <a:pPr>
+            <a:off x="777240" y="914400"/>
+            <a:ext cx="10058400" cy="914400"/>
+          </a:xfrm>
+          <a:prstGeom prst="rect">
+            <a:avLst/>
+          </a:prstGeom>
+          <a:noFill/>
+        </p:spPr>
+        <p:txBody>
+          <a:bodyPr wrap="square" anchor="t">
+            <a:spAutoFit/>
+          </a:bodyPr>
+          <a:lstStyle/>
+          <a:p>
+            <a:pPr algn="l">
+              <a:lnSpc>
+                <a:spcPct val="125000"/>
+              </a:lnSpc>
+              <a:spcAft>
+                <a:spcPts val="800"/>
+              </a:spcAft>
+            </a:pPr>
+            <a:r>
+              <a:rPr sz="4000" b="1">
+                <a:solidFill>
+                  <a:srgbClr val="FFFFFF"/>
+                </a:solidFill>
+                <a:latin typeface="Segoe UI Semibold"/>
+              </a:rPr>
+              <a:t>What the AI may not do.</a:t>
+            </a:r>
+          </a:p>
+        </p:txBody>
+      </p:sp>
+      <p:sp>
+        <p:nvSpPr>
+          <p:cNvPr id="5" name="Rounded Rectangle 4"/>
+          <p:cNvSpPr/>
+          <p:nvPr/>
+        </p:nvSpPr>
+        <p:spPr>
+          <a:xfrm>
+            <a:off x="777240" y="2286000"/>
+            <a:ext cx="2542032" cy="2057400"/>
+          </a:xfrm>
+          <a:prstGeom prst="roundRect">
+            <a:avLst>
+              <a:gd name="adj" fmla="val 14000"/>
+            </a:avLst>
+          </a:prstGeom>
+          <a:solidFill>
+            <a:srgbClr val="2A4743"/>
+          </a:solidFill>
+          <a:ln>
+            <a:noFill/>
+          </a:ln>
+          <a:effectLst/>
+        </p:spPr>
+        <p:style>
+          <a:lnRef idx="1">
+            <a:schemeClr val="accent1"/>
+          </a:lnRef>
+          <a:fillRef idx="3">
+            <a:schemeClr val="accent1"/>
+          </a:fillRef>
+          <a:effectRef idx="2">
+            <a:schemeClr val="accent1"/>
+          </a:effectRef>
+          <a:fontRef idx="minor">
+            <a:schemeClr val="lt1"/>
+          </a:fontRef>
+        </p:style>
+        <p:txBody>
+          <a:bodyPr rtlCol="0" anchor="ctr"/>
+          <a:lstStyle/>
+          <a:p>
+            <a:pPr algn="ctr"/>
+          </a:p>
+        </p:txBody>
+      </p:sp>
+      <p:sp>
+        <p:nvSpPr>
+          <p:cNvPr id="6" name="TextBox 5"/>
+          <p:cNvSpPr txBox="1"/>
+          <p:nvPr/>
+        </p:nvSpPr>
+        <p:spPr>
+          <a:xfrm>
+            <a:off x="996696" y="2432304"/>
+            <a:ext cx="2103120" cy="731520"/>
+          </a:xfrm>
+          <a:prstGeom prst="rect">
+            <a:avLst/>
+          </a:prstGeom>
+          <a:noFill/>
+        </p:spPr>
+        <p:txBody>
+          <a:bodyPr wrap="square" anchor="t">
+            <a:spAutoFit/>
+          </a:bodyPr>
+          <a:lstStyle/>
+          <a:p>
+            <a:pPr algn="l">
               <a:lnSpc>
                 <a:spcPct val="115000"/>
               </a:lnSpc>
               <a:spcAft>
-                <a:spcPts val="600"/>
-              </a:spcAft>
-            </a:pPr>
-            <a:r>
-              <a:rPr sz="3400" b="1">
-                <a:solidFill>
-                  <a:srgbClr val="1F3A37"/>
-                </a:solidFill>
-                <a:latin typeface="Arial"/>
-              </a:rPr>
-              <a:t>Phase 2: breadth, Malayan context, and proof.</a:t>
-            </a:r>
-          </a:p>
-        </p:txBody>
-      </p:sp>
-      <p:sp>
-        <p:nvSpPr>
-          <p:cNvPr id="5" name="TextBox 4"/>
-          <p:cNvSpPr txBox="1"/>
-          <p:nvPr/>
-        </p:nvSpPr>
-        <p:spPr>
-          <a:xfrm>
-            <a:off x="822960" y="2606040"/>
-            <a:ext cx="10515600" cy="3840480"/>
-          </a:xfrm>
-          <a:prstGeom prst="rect">
-            <a:avLst/>
-          </a:prstGeom>
-          <a:noFill/>
-        </p:spPr>
-        <p:txBody>
-          <a:bodyPr wrap="square">
-            <a:spAutoFit/>
-          </a:bodyPr>
-          <a:lstStyle/>
-          <a:p>
-            <a:pPr>
+                <a:spcPts val="800"/>
+              </a:spcAft>
+            </a:pPr>
+            <a:r>
+              <a:rPr sz="1300" b="1">
+                <a:solidFill>
+                  <a:srgbClr val="FFFFFF"/>
+                </a:solidFill>
+                <a:latin typeface="Segoe UI Semibold"/>
+              </a:rPr>
+              <a:t>Closed vocabulary</a:t>
+            </a:r>
+          </a:p>
+        </p:txBody>
+      </p:sp>
+      <p:sp>
+        <p:nvSpPr>
+          <p:cNvPr id="7" name="TextBox 6"/>
+          <p:cNvSpPr txBox="1"/>
+          <p:nvPr/>
+        </p:nvSpPr>
+        <p:spPr>
+          <a:xfrm>
+            <a:off x="996696" y="2880360"/>
+            <a:ext cx="2103120" cy="1280160"/>
+          </a:xfrm>
+          <a:prstGeom prst="rect">
+            <a:avLst/>
+          </a:prstGeom>
+          <a:noFill/>
+        </p:spPr>
+        <p:txBody>
+          <a:bodyPr wrap="square" anchor="t">
+            <a:spAutoFit/>
+          </a:bodyPr>
+          <a:lstStyle/>
+          <a:p>
+            <a:pPr algn="l">
               <a:lnSpc>
                 <a:spcPct val="130000"/>
               </a:lnSpc>
               <a:spcAft>
-                <a:spcPts val="600"/>
-              </a:spcAft>
-            </a:pPr>
-            <a:r>
-              <a:rPr sz="1500" b="0">
-                <a:solidFill>
-                  <a:srgbClr val="1F3A37"/>
-                </a:solidFill>
-                <a:latin typeface="Arial"/>
-              </a:rPr>
-              <a:t>A Malaysian trend source (DOSM / local job postings) so the ranking reflects local demand.</a:t>
-            </a:r>
-          </a:p>
-          <a:p>
-            <a:pPr>
+                <a:spcPts val="800"/>
+              </a:spcAft>
+            </a:pPr>
+            <a:r>
+              <a:rPr sz="950" b="0">
+                <a:solidFill>
+                  <a:srgbClr val="F6F2EA"/>
+                </a:solidFill>
+                <a:latin typeface="Segoe UI"/>
+              </a:rPr>
+              <a:t>Every role and module identifier is validated against our catalogue; anything unknown is discarded before it reaches the screen.</a:t>
+            </a:r>
+          </a:p>
+        </p:txBody>
+      </p:sp>
+      <p:sp>
+        <p:nvSpPr>
+          <p:cNvPr id="8" name="Rounded Rectangle 7"/>
+          <p:cNvSpPr/>
+          <p:nvPr/>
+        </p:nvSpPr>
+        <p:spPr>
+          <a:xfrm>
+            <a:off x="3465576" y="2286000"/>
+            <a:ext cx="2542032" cy="2057400"/>
+          </a:xfrm>
+          <a:prstGeom prst="roundRect">
+            <a:avLst>
+              <a:gd name="adj" fmla="val 14000"/>
+            </a:avLst>
+          </a:prstGeom>
+          <a:solidFill>
+            <a:srgbClr val="2A4743"/>
+          </a:solidFill>
+          <a:ln>
+            <a:noFill/>
+          </a:ln>
+          <a:effectLst/>
+        </p:spPr>
+        <p:style>
+          <a:lnRef idx="1">
+            <a:schemeClr val="accent1"/>
+          </a:lnRef>
+          <a:fillRef idx="3">
+            <a:schemeClr val="accent1"/>
+          </a:fillRef>
+          <a:effectRef idx="2">
+            <a:schemeClr val="accent1"/>
+          </a:effectRef>
+          <a:fontRef idx="minor">
+            <a:schemeClr val="lt1"/>
+          </a:fontRef>
+        </p:style>
+        <p:txBody>
+          <a:bodyPr rtlCol="0" anchor="ctr"/>
+          <a:lstStyle/>
+          <a:p>
+            <a:pPr algn="ctr"/>
+          </a:p>
+        </p:txBody>
+      </p:sp>
+      <p:sp>
+        <p:nvSpPr>
+          <p:cNvPr id="9" name="TextBox 8"/>
+          <p:cNvSpPr txBox="1"/>
+          <p:nvPr/>
+        </p:nvSpPr>
+        <p:spPr>
+          <a:xfrm>
+            <a:off x="3685032" y="2432304"/>
+            <a:ext cx="2103120" cy="731520"/>
+          </a:xfrm>
+          <a:prstGeom prst="rect">
+            <a:avLst/>
+          </a:prstGeom>
+          <a:noFill/>
+        </p:spPr>
+        <p:txBody>
+          <a:bodyPr wrap="square" anchor="t">
+            <a:spAutoFit/>
+          </a:bodyPr>
+          <a:lstStyle/>
+          <a:p>
+            <a:pPr algn="l">
+              <a:lnSpc>
+                <a:spcPct val="115000"/>
+              </a:lnSpc>
+              <a:spcAft>
+                <a:spcPts val="800"/>
+              </a:spcAft>
+            </a:pPr>
+            <a:r>
+              <a:rPr sz="1300" b="1">
+                <a:solidFill>
+                  <a:srgbClr val="FFFFFF"/>
+                </a:solidFill>
+                <a:latin typeface="Segoe UI Semibold"/>
+              </a:rPr>
+              <a:t>Visible disagreement</a:t>
+            </a:r>
+          </a:p>
+        </p:txBody>
+      </p:sp>
+      <p:sp>
+        <p:nvSpPr>
+          <p:cNvPr id="10" name="TextBox 9"/>
+          <p:cNvSpPr txBox="1"/>
+          <p:nvPr/>
+        </p:nvSpPr>
+        <p:spPr>
+          <a:xfrm>
+            <a:off x="3685032" y="2880360"/>
+            <a:ext cx="2103120" cy="1280160"/>
+          </a:xfrm>
+          <a:prstGeom prst="rect">
+            <a:avLst/>
+          </a:prstGeom>
+          <a:noFill/>
+        </p:spPr>
+        <p:txBody>
+          <a:bodyPr wrap="square" anchor="t">
+            <a:spAutoFit/>
+          </a:bodyPr>
+          <a:lstStyle/>
+          <a:p>
+            <a:pPr algn="l">
               <a:lnSpc>
                 <a:spcPct val="130000"/>
               </a:lnSpc>
               <a:spcAft>
-                <a:spcPts val="600"/>
-              </a:spcAft>
-            </a:pPr>
-            <a:r>
-              <a:rPr sz="1500" b="0">
-                <a:solidFill>
-                  <a:srgbClr val="1F3A37"/>
-                </a:solidFill>
-                <a:latin typeface="Arial"/>
-              </a:rPr>
-              <a:t>Semantic skill matching with embeddings — lexical matching is the weakest part of the engine.</a:t>
-            </a:r>
-          </a:p>
-          <a:p>
-            <a:pPr>
+                <a:spcPts val="800"/>
+              </a:spcAft>
+            </a:pPr>
+            <a:r>
+              <a:rPr sz="950" b="0">
+                <a:solidFill>
+                  <a:srgbClr val="F6F2EA"/>
+                </a:solidFill>
+                <a:latin typeface="Segoe UI"/>
+              </a:rPr>
+              <a:t>The model's fit score is shown next to the deterministic estimate, so the two can be compared rather than blended.</a:t>
+            </a:r>
+          </a:p>
+        </p:txBody>
+      </p:sp>
+      <p:sp>
+        <p:nvSpPr>
+          <p:cNvPr id="11" name="Rounded Rectangle 10"/>
+          <p:cNvSpPr/>
+          <p:nvPr/>
+        </p:nvSpPr>
+        <p:spPr>
+          <a:xfrm>
+            <a:off x="6153912" y="2286000"/>
+            <a:ext cx="2542032" cy="2057400"/>
+          </a:xfrm>
+          <a:prstGeom prst="roundRect">
+            <a:avLst>
+              <a:gd name="adj" fmla="val 14000"/>
+            </a:avLst>
+          </a:prstGeom>
+          <a:solidFill>
+            <a:srgbClr val="2A4743"/>
+          </a:solidFill>
+          <a:ln>
+            <a:noFill/>
+          </a:ln>
+          <a:effectLst/>
+        </p:spPr>
+        <p:style>
+          <a:lnRef idx="1">
+            <a:schemeClr val="accent1"/>
+          </a:lnRef>
+          <a:fillRef idx="3">
+            <a:schemeClr val="accent1"/>
+          </a:fillRef>
+          <a:effectRef idx="2">
+            <a:schemeClr val="accent1"/>
+          </a:effectRef>
+          <a:fontRef idx="minor">
+            <a:schemeClr val="lt1"/>
+          </a:fontRef>
+        </p:style>
+        <p:txBody>
+          <a:bodyPr rtlCol="0" anchor="ctr"/>
+          <a:lstStyle/>
+          <a:p>
+            <a:pPr algn="ctr"/>
+          </a:p>
+        </p:txBody>
+      </p:sp>
+      <p:sp>
+        <p:nvSpPr>
+          <p:cNvPr id="12" name="TextBox 11"/>
+          <p:cNvSpPr txBox="1"/>
+          <p:nvPr/>
+        </p:nvSpPr>
+        <p:spPr>
+          <a:xfrm>
+            <a:off x="6373368" y="2432304"/>
+            <a:ext cx="2103120" cy="731520"/>
+          </a:xfrm>
+          <a:prstGeom prst="rect">
+            <a:avLst/>
+          </a:prstGeom>
+          <a:noFill/>
+        </p:spPr>
+        <p:txBody>
+          <a:bodyPr wrap="square" anchor="t">
+            <a:spAutoFit/>
+          </a:bodyPr>
+          <a:lstStyle/>
+          <a:p>
+            <a:pPr algn="l">
+              <a:lnSpc>
+                <a:spcPct val="115000"/>
+              </a:lnSpc>
+              <a:spcAft>
+                <a:spcPts val="800"/>
+              </a:spcAft>
+            </a:pPr>
+            <a:r>
+              <a:rPr sz="1300" b="1">
+                <a:solidFill>
+                  <a:srgbClr val="FFFFFF"/>
+                </a:solidFill>
+                <a:latin typeface="Segoe UI Semibold"/>
+              </a:rPr>
+              <a:t>No storage</a:t>
+            </a:r>
+          </a:p>
+        </p:txBody>
+      </p:sp>
+      <p:sp>
+        <p:nvSpPr>
+          <p:cNvPr id="13" name="TextBox 12"/>
+          <p:cNvSpPr txBox="1"/>
+          <p:nvPr/>
+        </p:nvSpPr>
+        <p:spPr>
+          <a:xfrm>
+            <a:off x="6373368" y="2880360"/>
+            <a:ext cx="2103120" cy="1280160"/>
+          </a:xfrm>
+          <a:prstGeom prst="rect">
+            <a:avLst/>
+          </a:prstGeom>
+          <a:noFill/>
+        </p:spPr>
+        <p:txBody>
+          <a:bodyPr wrap="square" anchor="t">
+            <a:spAutoFit/>
+          </a:bodyPr>
+          <a:lstStyle/>
+          <a:p>
+            <a:pPr algn="l">
               <a:lnSpc>
                 <a:spcPct val="130000"/>
               </a:lnSpc>
               <a:spcAft>
-                <a:spcPts val="600"/>
-              </a:spcAft>
-            </a:pPr>
-            <a:r>
-              <a:rPr sz="1500" b="0">
-                <a:solidFill>
-                  <a:srgbClr val="1F3A37"/>
-                </a:solidFill>
-                <a:latin typeface="Arial"/>
-              </a:rPr>
-              <a:t>A counsellor view: cohort-level gaps, and plans that can be reviewed together.</a:t>
-            </a:r>
-          </a:p>
-          <a:p>
-            <a:pPr>
+                <a:spcPts val="800"/>
+              </a:spcAft>
+            </a:pPr>
+            <a:r>
+              <a:rPr sz="950" b="0">
+                <a:solidFill>
+                  <a:srgbClr val="F6F2EA"/>
+                </a:solidFill>
+                <a:latin typeface="Segoe UI"/>
+              </a:rPr>
+              <a:t>No account, no database, no CV. The profile lives in the browser tab and is gone when it closes.</a:t>
+            </a:r>
+          </a:p>
+        </p:txBody>
+      </p:sp>
+      <p:sp>
+        <p:nvSpPr>
+          <p:cNvPr id="14" name="Rounded Rectangle 13"/>
+          <p:cNvSpPr/>
+          <p:nvPr/>
+        </p:nvSpPr>
+        <p:spPr>
+          <a:xfrm>
+            <a:off x="8842248" y="2286000"/>
+            <a:ext cx="2542032" cy="2057400"/>
+          </a:xfrm>
+          <a:prstGeom prst="roundRect">
+            <a:avLst>
+              <a:gd name="adj" fmla="val 14000"/>
+            </a:avLst>
+          </a:prstGeom>
+          <a:solidFill>
+            <a:srgbClr val="2A4743"/>
+          </a:solidFill>
+          <a:ln>
+            <a:noFill/>
+          </a:ln>
+          <a:effectLst/>
+        </p:spPr>
+        <p:style>
+          <a:lnRef idx="1">
+            <a:schemeClr val="accent1"/>
+          </a:lnRef>
+          <a:fillRef idx="3">
+            <a:schemeClr val="accent1"/>
+          </a:fillRef>
+          <a:effectRef idx="2">
+            <a:schemeClr val="accent1"/>
+          </a:effectRef>
+          <a:fontRef idx="minor">
+            <a:schemeClr val="lt1"/>
+          </a:fontRef>
+        </p:style>
+        <p:txBody>
+          <a:bodyPr rtlCol="0" anchor="ctr"/>
+          <a:lstStyle/>
+          <a:p>
+            <a:pPr algn="ctr"/>
+          </a:p>
+        </p:txBody>
+      </p:sp>
+      <p:sp>
+        <p:nvSpPr>
+          <p:cNvPr id="15" name="TextBox 14"/>
+          <p:cNvSpPr txBox="1"/>
+          <p:nvPr/>
+        </p:nvSpPr>
+        <p:spPr>
+          <a:xfrm>
+            <a:off x="9061704" y="2432304"/>
+            <a:ext cx="2103120" cy="731520"/>
+          </a:xfrm>
+          <a:prstGeom prst="rect">
+            <a:avLst/>
+          </a:prstGeom>
+          <a:noFill/>
+        </p:spPr>
+        <p:txBody>
+          <a:bodyPr wrap="square" anchor="t">
+            <a:spAutoFit/>
+          </a:bodyPr>
+          <a:lstStyle/>
+          <a:p>
+            <a:pPr algn="l">
+              <a:lnSpc>
+                <a:spcPct val="115000"/>
+              </a:lnSpc>
+              <a:spcAft>
+                <a:spcPts val="800"/>
+              </a:spcAft>
+            </a:pPr>
+            <a:r>
+              <a:rPr sz="1300" b="1">
+                <a:solidFill>
+                  <a:srgbClr val="FFFFFF"/>
+                </a:solidFill>
+                <a:latin typeface="Segoe UI Semibold"/>
+              </a:rPr>
+              <a:t>Injection treated as data</a:t>
+            </a:r>
+          </a:p>
+        </p:txBody>
+      </p:sp>
+      <p:sp>
+        <p:nvSpPr>
+          <p:cNvPr id="16" name="TextBox 15"/>
+          <p:cNvSpPr txBox="1"/>
+          <p:nvPr/>
+        </p:nvSpPr>
+        <p:spPr>
+          <a:xfrm>
+            <a:off x="9061704" y="2880360"/>
+            <a:ext cx="2103120" cy="1280160"/>
+          </a:xfrm>
+          <a:prstGeom prst="rect">
+            <a:avLst/>
+          </a:prstGeom>
+          <a:noFill/>
+        </p:spPr>
+        <p:txBody>
+          <a:bodyPr wrap="square" anchor="t">
+            <a:spAutoFit/>
+          </a:bodyPr>
+          <a:lstStyle/>
+          <a:p>
+            <a:pPr algn="l">
               <a:lnSpc>
                 <a:spcPct val="130000"/>
               </a:lnSpc>
               <a:spcAft>
-                <a:spcPts val="600"/>
-              </a:spcAft>
-            </a:pPr>
-            <a:r>
-              <a:rPr sz="1500" b="0">
-                <a:solidFill>
-                  <a:srgbClr val="1F3A37"/>
-                </a:solidFill>
-                <a:latin typeface="Arial"/>
-              </a:rPr>
-              <a:t>Saved plans with explicit consent, one-click deletion, and no CV storage.</a:t>
-            </a:r>
-          </a:p>
-          <a:p>
-            <a:pPr>
-              <a:lnSpc>
-                <a:spcPct val="130000"/>
-              </a:lnSpc>
-              <a:spcAft>
-                <a:spcPts val="600"/>
-              </a:spcAft>
-            </a:pPr>
-            <a:r>
-              <a:rPr sz="1500" b="0">
-                <a:solidFill>
-                  <a:srgbClr val="1F3A37"/>
-                </a:solidFill>
-                <a:latin typeface="Arial"/>
-              </a:rPr>
-              <a:t>Self-hosted model on RunPod GPU, using the sponsor credit; the client is already OpenAI-compatible.</a:t>
-            </a:r>
-          </a:p>
-          <a:p>
-            <a:pPr>
-              <a:lnSpc>
-                <a:spcPct val="130000"/>
-              </a:lnSpc>
-              <a:spcAft>
-                <a:spcPts val="600"/>
-              </a:spcAft>
-            </a:pPr>
-          </a:p>
-          <a:p>
-            <a:pPr>
-              <a:lnSpc>
-                <a:spcPct val="130000"/>
-              </a:lnSpc>
-              <a:spcAft>
-                <a:spcPts val="600"/>
-              </a:spcAft>
-            </a:pPr>
-            <a:r>
-              <a:rPr sz="1500" b="0">
-                <a:solidFill>
-                  <a:srgbClr val="1F3A37"/>
-                </a:solidFill>
-                <a:latin typeface="Arial"/>
-              </a:rPr>
-              <a:t>Team overinfinity · Ahmad Adam Hakimi bin Naeman · IIUM · SDC 2026 Domain 1</a:t>
+                <a:spcPts val="800"/>
+              </a:spcAft>
+            </a:pPr>
+            <a:r>
+              <a:rPr sz="950" b="0">
+                <a:solidFill>
+                  <a:srgbClr val="F6F2EA"/>
+                </a:solidFill>
+                <a:latin typeface="Segoe UI"/>
+              </a:rPr>
+              <a:t>Free text is delimited, output is schema-validated, and the model never receives a tool that can write.</a:t>
+            </a:r>
+          </a:p>
+        </p:txBody>
+      </p:sp>
+      <p:sp>
+        <p:nvSpPr>
+          <p:cNvPr id="17" name="TextBox 16"/>
+          <p:cNvSpPr txBox="1"/>
+          <p:nvPr/>
+        </p:nvSpPr>
+        <p:spPr>
+          <a:xfrm>
+            <a:off x="777240" y="4617720"/>
+            <a:ext cx="10424160" cy="731520"/>
+          </a:xfrm>
+          <a:prstGeom prst="rect">
+            <a:avLst/>
+          </a:prstGeom>
+          <a:noFill/>
+        </p:spPr>
+        <p:txBody>
+          <a:bodyPr wrap="square" anchor="t">
+            <a:spAutoFit/>
+          </a:bodyPr>
+          <a:lstStyle/>
+          <a:p>
+            <a:pPr algn="l">
+              <a:lnSpc>
+                <a:spcPct val="125000"/>
+              </a:lnSpc>
+              <a:spcAft>
+                <a:spcPts val="400"/>
+              </a:spcAft>
+            </a:pPr>
+            <a:r>
+              <a:rPr sz="1400" b="0">
+                <a:solidFill>
+                  <a:srgbClr val="F6F2EA"/>
+                </a:solidFill>
+                <a:latin typeface="Segoe UI"/>
+              </a:rPr>
+              <a:t>Each rule is a validation path in the repository — not a promise in a document.</a:t>
+            </a:r>
+          </a:p>
+          <a:p>
+            <a:pPr algn="l">
+              <a:lnSpc>
+                <a:spcPct val="125000"/>
+              </a:lnSpc>
+              <a:spcAft>
+                <a:spcPts val="400"/>
+              </a:spcAft>
+            </a:pPr>
+            <a:r>
+              <a:rPr sz="1400" b="0">
+                <a:solidFill>
+                  <a:srgbClr val="F6F2EA"/>
+                </a:solidFill>
+                <a:latin typeface="Segoe UI"/>
+              </a:rPr>
+              <a:t>The model chooses and explains; it never writes the catalogue.</a:t>
+            </a:r>
+          </a:p>
+        </p:txBody>
+      </p:sp>
+      <p:sp>
+        <p:nvSpPr>
+          <p:cNvPr id="18" name="TextBox 17"/>
+          <p:cNvSpPr txBox="1"/>
+          <p:nvPr/>
+        </p:nvSpPr>
+        <p:spPr>
+          <a:xfrm>
+            <a:off x="777240" y="6263640"/>
+            <a:ext cx="10607040" cy="274320"/>
+          </a:xfrm>
+          <a:prstGeom prst="rect">
+            <a:avLst/>
+          </a:prstGeom>
+          <a:noFill/>
+        </p:spPr>
+        <p:txBody>
+          <a:bodyPr wrap="square" anchor="t">
+            <a:spAutoFit/>
+          </a:bodyPr>
+          <a:lstStyle/>
+          <a:p>
+            <a:pPr algn="l">
+              <a:lnSpc>
+                <a:spcPct val="125000"/>
+              </a:lnSpc>
+              <a:spcAft>
+                <a:spcPts val="800"/>
+              </a:spcAft>
+            </a:pPr>
+            <a:r>
+              <a:rPr sz="900" b="0">
+                <a:solidFill>
+                  <a:srgbClr val="9AB0AB"/>
+                </a:solidFill>
+                <a:latin typeface="Segoe UI"/>
+              </a:rPr>
+              <a:t>Enforced in code, not in a policy document</a:t>
+            </a:r>
+          </a:p>
+        </p:txBody>
+      </p:sp>
+      <p:sp>
+        <p:nvSpPr>
+          <p:cNvPr id="19" name="TextBox 18"/>
+          <p:cNvSpPr txBox="1"/>
+          <p:nvPr/>
+        </p:nvSpPr>
+        <p:spPr>
+          <a:xfrm>
+            <a:off x="10591495" y="6263640"/>
+            <a:ext cx="822960" cy="274320"/>
+          </a:xfrm>
+          <a:prstGeom prst="rect">
+            <a:avLst/>
+          </a:prstGeom>
+          <a:noFill/>
+        </p:spPr>
+        <p:txBody>
+          <a:bodyPr wrap="square" anchor="t">
+            <a:spAutoFit/>
+          </a:bodyPr>
+          <a:lstStyle/>
+          <a:p>
+            <a:pPr algn="r">
+              <a:lnSpc>
+                <a:spcPct val="125000"/>
+              </a:lnSpc>
+              <a:spcAft>
+                <a:spcPts val="800"/>
+              </a:spcAft>
+            </a:pPr>
+            <a:r>
+              <a:rPr sz="900" b="0">
+                <a:solidFill>
+                  <a:srgbClr val="9AB0AB"/>
+                </a:solidFill>
+                <a:latin typeface="Segoe UI"/>
+              </a:rPr>
+              <a:t>09 / 12</a:t>
             </a:r>
           </a:p>
         </p:txBody>
